--- a/AI_Document_OCR_Scanner_Similarity_Detector_PBL_v2.pptx
+++ b/AI_Document_OCR_Scanner_Similarity_Detector_PBL_v2.pptx
@@ -5,40 +5,40 @@
     <p:sldMasterId id="2147483648" r:id="rId1"/>
   </p:sldMasterIdLst>
   <p:sldIdLst>
-    <p:sldId id="256" r:id="rId7"/>
-    <p:sldId id="257" r:id="rId8"/>
-    <p:sldId id="258" r:id="rId9"/>
-    <p:sldId id="259" r:id="rId10"/>
-    <p:sldId id="260" r:id="rId11"/>
-    <p:sldId id="261" r:id="rId12"/>
-    <p:sldId id="262" r:id="rId13"/>
-    <p:sldId id="263" r:id="rId14"/>
-    <p:sldId id="264" r:id="rId15"/>
-    <p:sldId id="265" r:id="rId16"/>
-    <p:sldId id="266" r:id="rId17"/>
-    <p:sldId id="267" r:id="rId18"/>
-    <p:sldId id="268" r:id="rId19"/>
-    <p:sldId id="269" r:id="rId20"/>
-    <p:sldId id="270" r:id="rId21"/>
-    <p:sldId id="271" r:id="rId22"/>
-    <p:sldId id="272" r:id="rId23"/>
-    <p:sldId id="273" r:id="rId24"/>
-    <p:sldId id="274" r:id="rId25"/>
-    <p:sldId id="275" r:id="rId26"/>
-    <p:sldId id="276" r:id="rId27"/>
-    <p:sldId id="277" r:id="rId28"/>
-    <p:sldId id="278" r:id="rId29"/>
-    <p:sldId id="279" r:id="rId30"/>
-    <p:sldId id="280" r:id="rId31"/>
-    <p:sldId id="281" r:id="rId32"/>
-    <p:sldId id="282" r:id="rId33"/>
-    <p:sldId id="283" r:id="rId34"/>
-    <p:sldId id="284" r:id="rId35"/>
-    <p:sldId id="285" r:id="rId36"/>
-    <p:sldId id="286" r:id="rId37"/>
-    <p:sldId id="287" r:id="rId38"/>
+    <p:sldId id="256" r:id="rId2"/>
+    <p:sldId id="257" r:id="rId3"/>
+    <p:sldId id="258" r:id="rId4"/>
+    <p:sldId id="259" r:id="rId5"/>
+    <p:sldId id="260" r:id="rId6"/>
+    <p:sldId id="261" r:id="rId7"/>
+    <p:sldId id="262" r:id="rId8"/>
+    <p:sldId id="263" r:id="rId9"/>
+    <p:sldId id="264" r:id="rId10"/>
+    <p:sldId id="265" r:id="rId11"/>
+    <p:sldId id="266" r:id="rId12"/>
+    <p:sldId id="267" r:id="rId13"/>
+    <p:sldId id="268" r:id="rId14"/>
+    <p:sldId id="269" r:id="rId15"/>
+    <p:sldId id="270" r:id="rId16"/>
+    <p:sldId id="271" r:id="rId17"/>
+    <p:sldId id="272" r:id="rId18"/>
+    <p:sldId id="273" r:id="rId19"/>
+    <p:sldId id="274" r:id="rId20"/>
+    <p:sldId id="275" r:id="rId21"/>
+    <p:sldId id="276" r:id="rId22"/>
+    <p:sldId id="277" r:id="rId23"/>
+    <p:sldId id="278" r:id="rId24"/>
+    <p:sldId id="279" r:id="rId25"/>
+    <p:sldId id="280" r:id="rId26"/>
+    <p:sldId id="281" r:id="rId27"/>
+    <p:sldId id="282" r:id="rId28"/>
+    <p:sldId id="283" r:id="rId29"/>
+    <p:sldId id="284" r:id="rId30"/>
+    <p:sldId id="285" r:id="rId31"/>
+    <p:sldId id="286" r:id="rId32"/>
+    <p:sldId id="287" r:id="rId33"/>
   </p:sldIdLst>
-  <p:sldSz cx="12188952" cy="6858000" type="screen4x3"/>
+  <p:sldSz cx="12188825" cy="6858000"/>
   <p:notesSz cx="6858000" cy="9144000"/>
   <p:defaultTextStyle>
     <a:defPPr>
@@ -135,6 +135,22 @@
       </a:defRPr>
     </a:lvl9pPr>
   </p:defaultTextStyle>
+  <p:extLst>
+    <p:ext uri="{EFAFB233-063F-42B5-8137-9DF3F51BA10A}">
+      <p15:sldGuideLst xmlns:p15="http://schemas.microsoft.com/office/powerpoint/2012/main">
+        <p15:guide id="1" orient="horz" pos="2160">
+          <p15:clr>
+            <a:srgbClr val="A4A3A4"/>
+          </p15:clr>
+        </p15:guide>
+        <p15:guide id="2" pos="2880">
+          <p15:clr>
+            <a:srgbClr val="A4A3A4"/>
+          </p15:clr>
+        </p15:guide>
+      </p15:sldGuideLst>
+    </p:ext>
+  </p:extLst>
 </p:presentation>
 </file>
 
@@ -176,10 +192,9 @@
           <a:lstStyle/>
           <a:p>
             <a:r>
-              <a:rPr lang="en-US" smtClean="0"/>
+              <a:rPr lang="en-US"/>
               <a:t>Click to edit Master title style</a:t>
             </a:r>
-            <a:endParaRPr lang="en-US"/>
           </a:p>
         </p:txBody>
       </p:sp>
@@ -295,10 +310,9 @@
           </a:lstStyle>
           <a:p>
             <a:r>
-              <a:rPr lang="en-US" smtClean="0"/>
+              <a:rPr lang="en-US"/>
               <a:t>Click to edit Master subtitle style</a:t>
             </a:r>
-            <a:endParaRPr lang="en-US"/>
           </a:p>
         </p:txBody>
       </p:sp>
@@ -319,7 +333,7 @@
           <a:p>
             <a:fld id="{5BCAD085-E8A6-8845-BD4E-CB4CCA059FC4}" type="datetimeFigureOut">
               <a:rPr lang="en-US" smtClean="0"/>
-              <a:t>1/27/13</a:t>
+              <a:t>8/22/2026</a:t>
             </a:fld>
             <a:endParaRPr lang="en-US"/>
           </a:p>
@@ -413,10 +427,9 @@
           <a:lstStyle/>
           <a:p>
             <a:r>
-              <a:rPr lang="en-US" smtClean="0"/>
+              <a:rPr lang="en-US"/>
               <a:t>Click to edit Master title style</a:t>
             </a:r>
-            <a:endParaRPr lang="en-US"/>
           </a:p>
         </p:txBody>
       </p:sp>
@@ -437,38 +450,37 @@
           <a:p>
             <a:pPr lvl="0"/>
             <a:r>
-              <a:rPr lang="en-US" smtClean="0"/>
+              <a:rPr lang="en-US"/>
               <a:t>Click to edit Master text styles</a:t>
             </a:r>
           </a:p>
           <a:p>
             <a:pPr lvl="1"/>
             <a:r>
-              <a:rPr lang="en-US" smtClean="0"/>
+              <a:rPr lang="en-US"/>
               <a:t>Second level</a:t>
             </a:r>
           </a:p>
           <a:p>
             <a:pPr lvl="2"/>
             <a:r>
-              <a:rPr lang="en-US" smtClean="0"/>
+              <a:rPr lang="en-US"/>
               <a:t>Third level</a:t>
             </a:r>
           </a:p>
           <a:p>
             <a:pPr lvl="3"/>
             <a:r>
-              <a:rPr lang="en-US" smtClean="0"/>
+              <a:rPr lang="en-US"/>
               <a:t>Fourth level</a:t>
             </a:r>
           </a:p>
           <a:p>
             <a:pPr lvl="4"/>
             <a:r>
-              <a:rPr lang="en-US" smtClean="0"/>
+              <a:rPr lang="en-US"/>
               <a:t>Fifth level</a:t>
             </a:r>
-            <a:endParaRPr lang="en-US"/>
           </a:p>
         </p:txBody>
       </p:sp>
@@ -489,7 +501,7 @@
           <a:p>
             <a:fld id="{5BCAD085-E8A6-8845-BD4E-CB4CCA059FC4}" type="datetimeFigureOut">
               <a:rPr lang="en-US" smtClean="0"/>
-              <a:t>1/27/13</a:t>
+              <a:t>8/22/2026</a:t>
             </a:fld>
             <a:endParaRPr lang="en-US"/>
           </a:p>
@@ -588,10 +600,9 @@
           <a:lstStyle/>
           <a:p>
             <a:r>
-              <a:rPr lang="en-US" smtClean="0"/>
+              <a:rPr lang="en-US"/>
               <a:t>Click to edit Master title style</a:t>
             </a:r>
-            <a:endParaRPr lang="en-US"/>
           </a:p>
         </p:txBody>
       </p:sp>
@@ -617,38 +628,37 @@
           <a:p>
             <a:pPr lvl="0"/>
             <a:r>
-              <a:rPr lang="en-US" smtClean="0"/>
+              <a:rPr lang="en-US"/>
               <a:t>Click to edit Master text styles</a:t>
             </a:r>
           </a:p>
           <a:p>
             <a:pPr lvl="1"/>
             <a:r>
-              <a:rPr lang="en-US" smtClean="0"/>
+              <a:rPr lang="en-US"/>
               <a:t>Second level</a:t>
             </a:r>
           </a:p>
           <a:p>
             <a:pPr lvl="2"/>
             <a:r>
-              <a:rPr lang="en-US" smtClean="0"/>
+              <a:rPr lang="en-US"/>
               <a:t>Third level</a:t>
             </a:r>
           </a:p>
           <a:p>
             <a:pPr lvl="3"/>
             <a:r>
-              <a:rPr lang="en-US" smtClean="0"/>
+              <a:rPr lang="en-US"/>
               <a:t>Fourth level</a:t>
             </a:r>
           </a:p>
           <a:p>
             <a:pPr lvl="4"/>
             <a:r>
-              <a:rPr lang="en-US" smtClean="0"/>
+              <a:rPr lang="en-US"/>
               <a:t>Fifth level</a:t>
             </a:r>
-            <a:endParaRPr lang="en-US"/>
           </a:p>
         </p:txBody>
       </p:sp>
@@ -669,7 +679,7 @@
           <a:p>
             <a:fld id="{5BCAD085-E8A6-8845-BD4E-CB4CCA059FC4}" type="datetimeFigureOut">
               <a:rPr lang="en-US" smtClean="0"/>
-              <a:t>1/27/13</a:t>
+              <a:t>8/22/2026</a:t>
             </a:fld>
             <a:endParaRPr lang="en-US"/>
           </a:p>
@@ -763,10 +773,9 @@
           <a:lstStyle/>
           <a:p>
             <a:r>
-              <a:rPr lang="en-US" smtClean="0"/>
+              <a:rPr lang="en-US"/>
               <a:t>Click to edit Master title style</a:t>
             </a:r>
-            <a:endParaRPr lang="en-US"/>
           </a:p>
         </p:txBody>
       </p:sp>
@@ -787,38 +796,37 @@
           <a:p>
             <a:pPr lvl="0"/>
             <a:r>
-              <a:rPr lang="en-US" smtClean="0"/>
+              <a:rPr lang="en-US"/>
               <a:t>Click to edit Master text styles</a:t>
             </a:r>
           </a:p>
           <a:p>
             <a:pPr lvl="1"/>
             <a:r>
-              <a:rPr lang="en-US" smtClean="0"/>
+              <a:rPr lang="en-US"/>
               <a:t>Second level</a:t>
             </a:r>
           </a:p>
           <a:p>
             <a:pPr lvl="2"/>
             <a:r>
-              <a:rPr lang="en-US" smtClean="0"/>
+              <a:rPr lang="en-US"/>
               <a:t>Third level</a:t>
             </a:r>
           </a:p>
           <a:p>
             <a:pPr lvl="3"/>
             <a:r>
-              <a:rPr lang="en-US" smtClean="0"/>
+              <a:rPr lang="en-US"/>
               <a:t>Fourth level</a:t>
             </a:r>
           </a:p>
           <a:p>
             <a:pPr lvl="4"/>
             <a:r>
-              <a:rPr lang="en-US" smtClean="0"/>
+              <a:rPr lang="en-US"/>
               <a:t>Fifth level</a:t>
             </a:r>
-            <a:endParaRPr lang="en-US"/>
           </a:p>
         </p:txBody>
       </p:sp>
@@ -839,7 +847,7 @@
           <a:p>
             <a:fld id="{5BCAD085-E8A6-8845-BD4E-CB4CCA059FC4}" type="datetimeFigureOut">
               <a:rPr lang="en-US" smtClean="0"/>
-              <a:t>1/27/13</a:t>
+              <a:t>8/22/2026</a:t>
             </a:fld>
             <a:endParaRPr lang="en-US"/>
           </a:p>
@@ -942,10 +950,9 @@
           </a:lstStyle>
           <a:p>
             <a:r>
-              <a:rPr lang="en-US" smtClean="0"/>
+              <a:rPr lang="en-US"/>
               <a:t>Click to edit Master title style</a:t>
             </a:r>
-            <a:endParaRPr lang="en-US"/>
           </a:p>
         </p:txBody>
       </p:sp>
@@ -1062,7 +1069,7 @@
           <a:p>
             <a:pPr lvl="0"/>
             <a:r>
-              <a:rPr lang="en-US" smtClean="0"/>
+              <a:rPr lang="en-US"/>
               <a:t>Click to edit Master text styles</a:t>
             </a:r>
           </a:p>
@@ -1085,7 +1092,7 @@
           <a:p>
             <a:fld id="{5BCAD085-E8A6-8845-BD4E-CB4CCA059FC4}" type="datetimeFigureOut">
               <a:rPr lang="en-US" smtClean="0"/>
-              <a:t>1/27/13</a:t>
+              <a:t>8/22/2026</a:t>
             </a:fld>
             <a:endParaRPr lang="en-US"/>
           </a:p>
@@ -1179,10 +1186,9 @@
           <a:lstStyle/>
           <a:p>
             <a:r>
-              <a:rPr lang="en-US" smtClean="0"/>
+              <a:rPr lang="en-US"/>
               <a:t>Click to edit Master title style</a:t>
             </a:r>
-            <a:endParaRPr lang="en-US"/>
           </a:p>
         </p:txBody>
       </p:sp>
@@ -1236,38 +1242,37 @@
           <a:p>
             <a:pPr lvl="0"/>
             <a:r>
-              <a:rPr lang="en-US" smtClean="0"/>
+              <a:rPr lang="en-US"/>
               <a:t>Click to edit Master text styles</a:t>
             </a:r>
           </a:p>
           <a:p>
             <a:pPr lvl="1"/>
             <a:r>
-              <a:rPr lang="en-US" smtClean="0"/>
+              <a:rPr lang="en-US"/>
               <a:t>Second level</a:t>
             </a:r>
           </a:p>
           <a:p>
             <a:pPr lvl="2"/>
             <a:r>
-              <a:rPr lang="en-US" smtClean="0"/>
+              <a:rPr lang="en-US"/>
               <a:t>Third level</a:t>
             </a:r>
           </a:p>
           <a:p>
             <a:pPr lvl="3"/>
             <a:r>
-              <a:rPr lang="en-US" smtClean="0"/>
+              <a:rPr lang="en-US"/>
               <a:t>Fourth level</a:t>
             </a:r>
           </a:p>
           <a:p>
             <a:pPr lvl="4"/>
             <a:r>
-              <a:rPr lang="en-US" smtClean="0"/>
+              <a:rPr lang="en-US"/>
               <a:t>Fifth level</a:t>
             </a:r>
-            <a:endParaRPr lang="en-US"/>
           </a:p>
         </p:txBody>
       </p:sp>
@@ -1321,38 +1326,37 @@
           <a:p>
             <a:pPr lvl="0"/>
             <a:r>
-              <a:rPr lang="en-US" smtClean="0"/>
+              <a:rPr lang="en-US"/>
               <a:t>Click to edit Master text styles</a:t>
             </a:r>
           </a:p>
           <a:p>
             <a:pPr lvl="1"/>
             <a:r>
-              <a:rPr lang="en-US" smtClean="0"/>
+              <a:rPr lang="en-US"/>
               <a:t>Second level</a:t>
             </a:r>
           </a:p>
           <a:p>
             <a:pPr lvl="2"/>
             <a:r>
-              <a:rPr lang="en-US" smtClean="0"/>
+              <a:rPr lang="en-US"/>
               <a:t>Third level</a:t>
             </a:r>
           </a:p>
           <a:p>
             <a:pPr lvl="3"/>
             <a:r>
-              <a:rPr lang="en-US" smtClean="0"/>
+              <a:rPr lang="en-US"/>
               <a:t>Fourth level</a:t>
             </a:r>
           </a:p>
           <a:p>
             <a:pPr lvl="4"/>
             <a:r>
-              <a:rPr lang="en-US" smtClean="0"/>
+              <a:rPr lang="en-US"/>
               <a:t>Fifth level</a:t>
             </a:r>
-            <a:endParaRPr lang="en-US"/>
           </a:p>
         </p:txBody>
       </p:sp>
@@ -1373,7 +1377,7 @@
           <a:p>
             <a:fld id="{5BCAD085-E8A6-8845-BD4E-CB4CCA059FC4}" type="datetimeFigureOut">
               <a:rPr lang="en-US" smtClean="0"/>
-              <a:t>1/27/13</a:t>
+              <a:t>8/22/2026</a:t>
             </a:fld>
             <a:endParaRPr lang="en-US"/>
           </a:p>
@@ -1471,10 +1475,9 @@
           </a:lstStyle>
           <a:p>
             <a:r>
-              <a:rPr lang="en-US" smtClean="0"/>
+              <a:rPr lang="en-US"/>
               <a:t>Click to edit Master title style</a:t>
             </a:r>
-            <a:endParaRPr lang="en-US"/>
           </a:p>
         </p:txBody>
       </p:sp>
@@ -1537,7 +1540,7 @@
           <a:p>
             <a:pPr lvl="0"/>
             <a:r>
-              <a:rPr lang="en-US" smtClean="0"/>
+              <a:rPr lang="en-US"/>
               <a:t>Click to edit Master text styles</a:t>
             </a:r>
           </a:p>
@@ -1593,38 +1596,37 @@
           <a:p>
             <a:pPr lvl="0"/>
             <a:r>
-              <a:rPr lang="en-US" smtClean="0"/>
+              <a:rPr lang="en-US"/>
               <a:t>Click to edit Master text styles</a:t>
             </a:r>
           </a:p>
           <a:p>
             <a:pPr lvl="1"/>
             <a:r>
-              <a:rPr lang="en-US" smtClean="0"/>
+              <a:rPr lang="en-US"/>
               <a:t>Second level</a:t>
             </a:r>
           </a:p>
           <a:p>
             <a:pPr lvl="2"/>
             <a:r>
-              <a:rPr lang="en-US" smtClean="0"/>
+              <a:rPr lang="en-US"/>
               <a:t>Third level</a:t>
             </a:r>
           </a:p>
           <a:p>
             <a:pPr lvl="3"/>
             <a:r>
-              <a:rPr lang="en-US" smtClean="0"/>
+              <a:rPr lang="en-US"/>
               <a:t>Fourth level</a:t>
             </a:r>
           </a:p>
           <a:p>
             <a:pPr lvl="4"/>
             <a:r>
-              <a:rPr lang="en-US" smtClean="0"/>
+              <a:rPr lang="en-US"/>
               <a:t>Fifth level</a:t>
             </a:r>
-            <a:endParaRPr lang="en-US"/>
           </a:p>
         </p:txBody>
       </p:sp>
@@ -1687,7 +1689,7 @@
           <a:p>
             <a:pPr lvl="0"/>
             <a:r>
-              <a:rPr lang="en-US" smtClean="0"/>
+              <a:rPr lang="en-US"/>
               <a:t>Click to edit Master text styles</a:t>
             </a:r>
           </a:p>
@@ -1743,38 +1745,37 @@
           <a:p>
             <a:pPr lvl="0"/>
             <a:r>
-              <a:rPr lang="en-US" smtClean="0"/>
+              <a:rPr lang="en-US"/>
               <a:t>Click to edit Master text styles</a:t>
             </a:r>
           </a:p>
           <a:p>
             <a:pPr lvl="1"/>
             <a:r>
-              <a:rPr lang="en-US" smtClean="0"/>
+              <a:rPr lang="en-US"/>
               <a:t>Second level</a:t>
             </a:r>
           </a:p>
           <a:p>
             <a:pPr lvl="2"/>
             <a:r>
-              <a:rPr lang="en-US" smtClean="0"/>
+              <a:rPr lang="en-US"/>
               <a:t>Third level</a:t>
             </a:r>
           </a:p>
           <a:p>
             <a:pPr lvl="3"/>
             <a:r>
-              <a:rPr lang="en-US" smtClean="0"/>
+              <a:rPr lang="en-US"/>
               <a:t>Fourth level</a:t>
             </a:r>
           </a:p>
           <a:p>
             <a:pPr lvl="4"/>
             <a:r>
-              <a:rPr lang="en-US" smtClean="0"/>
+              <a:rPr lang="en-US"/>
               <a:t>Fifth level</a:t>
             </a:r>
-            <a:endParaRPr lang="en-US"/>
           </a:p>
         </p:txBody>
       </p:sp>
@@ -1795,7 +1796,7 @@
           <a:p>
             <a:fld id="{5BCAD085-E8A6-8845-BD4E-CB4CCA059FC4}" type="datetimeFigureOut">
               <a:rPr lang="en-US" smtClean="0"/>
-              <a:t>1/27/13</a:t>
+              <a:t>8/22/2026</a:t>
             </a:fld>
             <a:endParaRPr lang="en-US"/>
           </a:p>
@@ -1889,10 +1890,9 @@
           <a:lstStyle/>
           <a:p>
             <a:r>
-              <a:rPr lang="en-US" smtClean="0"/>
+              <a:rPr lang="en-US"/>
               <a:t>Click to edit Master title style</a:t>
             </a:r>
-            <a:endParaRPr lang="en-US"/>
           </a:p>
         </p:txBody>
       </p:sp>
@@ -1913,7 +1913,7 @@
           <a:p>
             <a:fld id="{5BCAD085-E8A6-8845-BD4E-CB4CCA059FC4}" type="datetimeFigureOut">
               <a:rPr lang="en-US" smtClean="0"/>
-              <a:t>1/27/13</a:t>
+              <a:t>8/22/2026</a:t>
             </a:fld>
             <a:endParaRPr lang="en-US"/>
           </a:p>
@@ -2008,7 +2008,7 @@
           <a:p>
             <a:fld id="{5BCAD085-E8A6-8845-BD4E-CB4CCA059FC4}" type="datetimeFigureOut">
               <a:rPr lang="en-US" smtClean="0"/>
-              <a:t>1/27/13</a:t>
+              <a:t>8/22/2026</a:t>
             </a:fld>
             <a:endParaRPr lang="en-US"/>
           </a:p>
@@ -2111,10 +2111,9 @@
           </a:lstStyle>
           <a:p>
             <a:r>
-              <a:rPr lang="en-US" smtClean="0"/>
+              <a:rPr lang="en-US"/>
               <a:t>Click to edit Master title style</a:t>
             </a:r>
-            <a:endParaRPr lang="en-US"/>
           </a:p>
         </p:txBody>
       </p:sp>
@@ -2168,38 +2167,37 @@
           <a:p>
             <a:pPr lvl="0"/>
             <a:r>
-              <a:rPr lang="en-US" smtClean="0"/>
+              <a:rPr lang="en-US"/>
               <a:t>Click to edit Master text styles</a:t>
             </a:r>
           </a:p>
           <a:p>
             <a:pPr lvl="1"/>
             <a:r>
-              <a:rPr lang="en-US" smtClean="0"/>
+              <a:rPr lang="en-US"/>
               <a:t>Second level</a:t>
             </a:r>
           </a:p>
           <a:p>
             <a:pPr lvl="2"/>
             <a:r>
-              <a:rPr lang="en-US" smtClean="0"/>
+              <a:rPr lang="en-US"/>
               <a:t>Third level</a:t>
             </a:r>
           </a:p>
           <a:p>
             <a:pPr lvl="3"/>
             <a:r>
-              <a:rPr lang="en-US" smtClean="0"/>
+              <a:rPr lang="en-US"/>
               <a:t>Fourth level</a:t>
             </a:r>
           </a:p>
           <a:p>
             <a:pPr lvl="4"/>
             <a:r>
-              <a:rPr lang="en-US" smtClean="0"/>
+              <a:rPr lang="en-US"/>
               <a:t>Fifth level</a:t>
             </a:r>
-            <a:endParaRPr lang="en-US"/>
           </a:p>
         </p:txBody>
       </p:sp>
@@ -2262,7 +2260,7 @@
           <a:p>
             <a:pPr lvl="0"/>
             <a:r>
-              <a:rPr lang="en-US" smtClean="0"/>
+              <a:rPr lang="en-US"/>
               <a:t>Click to edit Master text styles</a:t>
             </a:r>
           </a:p>
@@ -2285,7 +2283,7 @@
           <a:p>
             <a:fld id="{5BCAD085-E8A6-8845-BD4E-CB4CCA059FC4}" type="datetimeFigureOut">
               <a:rPr lang="en-US" smtClean="0"/>
-              <a:t>1/27/13</a:t>
+              <a:t>8/22/2026</a:t>
             </a:fld>
             <a:endParaRPr lang="en-US"/>
           </a:p>
@@ -2388,10 +2386,9 @@
           </a:lstStyle>
           <a:p>
             <a:r>
-              <a:rPr lang="en-US" smtClean="0"/>
+              <a:rPr lang="en-US"/>
               <a:t>Click to edit Master title style</a:t>
             </a:r>
-            <a:endParaRPr lang="en-US"/>
           </a:p>
         </p:txBody>
       </p:sp>
@@ -2515,7 +2512,7 @@
           <a:p>
             <a:pPr lvl="0"/>
             <a:r>
-              <a:rPr lang="en-US" smtClean="0"/>
+              <a:rPr lang="en-US"/>
               <a:t>Click to edit Master text styles</a:t>
             </a:r>
           </a:p>
@@ -2538,7 +2535,7 @@
           <a:p>
             <a:fld id="{5BCAD085-E8A6-8845-BD4E-CB4CCA059FC4}" type="datetimeFigureOut">
               <a:rPr lang="en-US" smtClean="0"/>
-              <a:t>1/27/13</a:t>
+              <a:t>8/22/2026</a:t>
             </a:fld>
             <a:endParaRPr lang="en-US"/>
           </a:p>
@@ -2647,10 +2644,9 @@
           <a:lstStyle/>
           <a:p>
             <a:r>
-              <a:rPr lang="en-US" smtClean="0"/>
+              <a:rPr lang="en-US"/>
               <a:t>Click to edit Master title style</a:t>
             </a:r>
-            <a:endParaRPr lang="en-US"/>
           </a:p>
         </p:txBody>
       </p:sp>
@@ -2681,38 +2677,37 @@
           <a:p>
             <a:pPr lvl="0"/>
             <a:r>
-              <a:rPr lang="en-US" smtClean="0"/>
+              <a:rPr lang="en-US"/>
               <a:t>Click to edit Master text styles</a:t>
             </a:r>
           </a:p>
           <a:p>
             <a:pPr lvl="1"/>
             <a:r>
-              <a:rPr lang="en-US" smtClean="0"/>
+              <a:rPr lang="en-US"/>
               <a:t>Second level</a:t>
             </a:r>
           </a:p>
           <a:p>
             <a:pPr lvl="2"/>
             <a:r>
-              <a:rPr lang="en-US" smtClean="0"/>
+              <a:rPr lang="en-US"/>
               <a:t>Third level</a:t>
             </a:r>
           </a:p>
           <a:p>
             <a:pPr lvl="3"/>
             <a:r>
-              <a:rPr lang="en-US" smtClean="0"/>
+              <a:rPr lang="en-US"/>
               <a:t>Fourth level</a:t>
             </a:r>
           </a:p>
           <a:p>
             <a:pPr lvl="4"/>
             <a:r>
-              <a:rPr lang="en-US" smtClean="0"/>
+              <a:rPr lang="en-US"/>
               <a:t>Fifth level</a:t>
             </a:r>
-            <a:endParaRPr lang="en-US"/>
           </a:p>
         </p:txBody>
       </p:sp>
@@ -2751,7 +2746,7 @@
           <a:p>
             <a:fld id="{5BCAD085-E8A6-8845-BD4E-CB4CCA059FC4}" type="datetimeFigureOut">
               <a:rPr lang="en-US" smtClean="0"/>
-              <a:t>1/27/13</a:t>
+              <a:t>8/22/2026</a:t>
             </a:fld>
             <a:endParaRPr lang="en-US"/>
           </a:p>
@@ -3110,7 +3105,7 @@
 </file>
 
 <file path=ppt/slides/slide1.xml><?xml version="1.0" encoding="utf-8"?>
-<p:sld xmlns:a="http://schemas.openxmlformats.org/drawingml/2006/main" xmlns:p="http://schemas.openxmlformats.org/presentationml/2006/main" xmlns:r="http://schemas.openxmlformats.org/officeDocument/2006/relationships">
+<p:sld xmlns:a="http://schemas.openxmlformats.org/drawingml/2006/main" xmlns:r="http://schemas.openxmlformats.org/officeDocument/2006/relationships" xmlns:p="http://schemas.openxmlformats.org/presentationml/2006/main">
   <p:cSld>
     <p:bg>
       <p:bgPr>
@@ -3126,7 +3121,14 @@
         <p:cNvGrpSpPr/>
         <p:nvPr/>
       </p:nvGrpSpPr>
-      <p:grpSpPr/>
+      <p:grpSpPr>
+        <a:xfrm>
+          <a:off x="0" y="0"/>
+          <a:ext cx="0" cy="0"/>
+          <a:chOff x="0" y="0"/>
+          <a:chExt cx="0" cy="0"/>
+        </a:xfrm>
+      </p:grpSpPr>
       <p:sp>
         <p:nvSpPr>
           <p:cNvPr id="2" name="TextBox 1"/>
@@ -3269,6 +3271,7 @@
           <a:lstStyle/>
           <a:p>
             <a:pPr algn="ctr"/>
+            <a:endParaRPr/>
           </a:p>
         </p:txBody>
       </p:sp>
@@ -3295,7 +3298,7 @@
           <a:lstStyle/>
           <a:p>
             <a:r>
-              <a:rPr b="1" sz="1700">
+              <a:rPr sz="1700" b="1">
                 <a:solidFill>
                   <a:srgbClr val="38BDF8"/>
                 </a:solidFill>
@@ -3320,7 +3323,7 @@
               </a:spcBef>
             </a:pPr>
             <a:r>
-              <a:rPr b="1" sz="1700">
+              <a:rPr sz="1700" b="1">
                 <a:solidFill>
                   <a:srgbClr val="38BDF8"/>
                 </a:solidFill>
@@ -3363,7 +3366,7 @@
           <a:lstStyle/>
           <a:p>
             <a:r>
-              <a:rPr b="1" sz="1700">
+              <a:rPr sz="1700" b="1">
                 <a:solidFill>
                   <a:srgbClr val="38BDF8"/>
                 </a:solidFill>
@@ -3388,7 +3391,7 @@
               </a:spcBef>
             </a:pPr>
             <a:r>
-              <a:rPr b="1" sz="1700">
+              <a:rPr sz="1700" b="1">
                 <a:solidFill>
                   <a:srgbClr val="38BDF8"/>
                 </a:solidFill>
@@ -3432,7 +3435,7 @@
           <a:p>
             <a:pPr algn="ctr"/>
             <a:r>
-              <a:rPr b="1" sz="1700">
+              <a:rPr sz="1700" b="1">
                 <a:solidFill>
                   <a:srgbClr val="38BDF8"/>
                 </a:solidFill>
@@ -3450,7 +3453,7 @@
               <a:t>Computer Engineering     |     </a:t>
             </a:r>
             <a:r>
-              <a:rPr b="1" sz="1700">
+              <a:rPr sz="1700" b="1">
                 <a:solidFill>
                   <a:srgbClr val="38BDF8"/>
                 </a:solidFill>
@@ -3494,7 +3497,7 @@
           <a:p>
             <a:pPr algn="ctr"/>
             <a:r>
-              <a:rPr b="1" sz="1700">
+              <a:rPr sz="1700" b="1">
                 <a:solidFill>
                   <a:srgbClr val="38BDF8"/>
                 </a:solidFill>
@@ -3523,7 +3526,7 @@
 </file>
 
 <file path=ppt/slides/slide10.xml><?xml version="1.0" encoding="utf-8"?>
-<p:sld xmlns:a="http://schemas.openxmlformats.org/drawingml/2006/main" xmlns:p="http://schemas.openxmlformats.org/presentationml/2006/main" xmlns:r="http://schemas.openxmlformats.org/officeDocument/2006/relationships">
+<p:sld xmlns:a="http://schemas.openxmlformats.org/drawingml/2006/main" xmlns:r="http://schemas.openxmlformats.org/officeDocument/2006/relationships" xmlns:p="http://schemas.openxmlformats.org/presentationml/2006/main">
   <p:cSld>
     <p:bg>
       <p:bgPr>
@@ -3539,7 +3542,14 @@
         <p:cNvGrpSpPr/>
         <p:nvPr/>
       </p:nvGrpSpPr>
-      <p:grpSpPr/>
+      <p:grpSpPr>
+        <a:xfrm>
+          <a:off x="0" y="0"/>
+          <a:ext cx="0" cy="0"/>
+          <a:chOff x="0" y="0"/>
+          <a:chExt cx="0" cy="0"/>
+        </a:xfrm>
+      </p:grpSpPr>
       <p:sp>
         <p:nvSpPr>
           <p:cNvPr id="2" name="TextBox 1"/>
@@ -3688,7 +3698,7 @@
 </file>
 
 <file path=ppt/slides/slide11.xml><?xml version="1.0" encoding="utf-8"?>
-<p:sld xmlns:a="http://schemas.openxmlformats.org/drawingml/2006/main" xmlns:p="http://schemas.openxmlformats.org/presentationml/2006/main" xmlns:r="http://schemas.openxmlformats.org/officeDocument/2006/relationships">
+<p:sld xmlns:a="http://schemas.openxmlformats.org/drawingml/2006/main" xmlns:r="http://schemas.openxmlformats.org/officeDocument/2006/relationships" xmlns:p="http://schemas.openxmlformats.org/presentationml/2006/main">
   <p:cSld>
     <p:bg>
       <p:bgPr>
@@ -3704,7 +3714,14 @@
         <p:cNvGrpSpPr/>
         <p:nvPr/>
       </p:nvGrpSpPr>
-      <p:grpSpPr/>
+      <p:grpSpPr>
+        <a:xfrm>
+          <a:off x="0" y="0"/>
+          <a:ext cx="0" cy="0"/>
+          <a:chOff x="0" y="0"/>
+          <a:chExt cx="0" cy="0"/>
+        </a:xfrm>
+      </p:grpSpPr>
       <p:sp>
         <p:nvSpPr>
           <p:cNvPr id="2" name="TextBox 1"/>
@@ -3837,7 +3854,7 @@
 </file>
 
 <file path=ppt/slides/slide12.xml><?xml version="1.0" encoding="utf-8"?>
-<p:sld xmlns:a="http://schemas.openxmlformats.org/drawingml/2006/main" xmlns:p="http://schemas.openxmlformats.org/presentationml/2006/main" xmlns:r="http://schemas.openxmlformats.org/officeDocument/2006/relationships">
+<p:sld xmlns:a="http://schemas.openxmlformats.org/drawingml/2006/main" xmlns:r="http://schemas.openxmlformats.org/officeDocument/2006/relationships" xmlns:p="http://schemas.openxmlformats.org/presentationml/2006/main">
   <p:cSld>
     <p:bg>
       <p:bgPr>
@@ -3853,7 +3870,14 @@
         <p:cNvGrpSpPr/>
         <p:nvPr/>
       </p:nvGrpSpPr>
-      <p:grpSpPr/>
+      <p:grpSpPr>
+        <a:xfrm>
+          <a:off x="0" y="0"/>
+          <a:ext cx="0" cy="0"/>
+          <a:chOff x="0" y="0"/>
+          <a:chExt cx="0" cy="0"/>
+        </a:xfrm>
+      </p:grpSpPr>
       <p:sp>
         <p:nvSpPr>
           <p:cNvPr id="2" name="TextBox 1"/>
@@ -4002,7 +4026,7 @@
 </file>
 
 <file path=ppt/slides/slide13.xml><?xml version="1.0" encoding="utf-8"?>
-<p:sld xmlns:a="http://schemas.openxmlformats.org/drawingml/2006/main" xmlns:p="http://schemas.openxmlformats.org/presentationml/2006/main" xmlns:r="http://schemas.openxmlformats.org/officeDocument/2006/relationships">
+<p:sld xmlns:a="http://schemas.openxmlformats.org/drawingml/2006/main" xmlns:r="http://schemas.openxmlformats.org/officeDocument/2006/relationships" xmlns:p="http://schemas.openxmlformats.org/presentationml/2006/main">
   <p:cSld>
     <p:bg>
       <p:bgPr>
@@ -4018,7 +4042,14 @@
         <p:cNvGrpSpPr/>
         <p:nvPr/>
       </p:nvGrpSpPr>
-      <p:grpSpPr/>
+      <p:grpSpPr>
+        <a:xfrm>
+          <a:off x="0" y="0"/>
+          <a:ext cx="0" cy="0"/>
+          <a:chOff x="0" y="0"/>
+          <a:chExt cx="0" cy="0"/>
+        </a:xfrm>
+      </p:grpSpPr>
       <p:sp>
         <p:nvSpPr>
           <p:cNvPr id="2" name="TextBox 1"/>
@@ -4167,7 +4198,7 @@
 </file>
 
 <file path=ppt/slides/slide14.xml><?xml version="1.0" encoding="utf-8"?>
-<p:sld xmlns:a="http://schemas.openxmlformats.org/drawingml/2006/main" xmlns:p="http://schemas.openxmlformats.org/presentationml/2006/main" xmlns:r="http://schemas.openxmlformats.org/officeDocument/2006/relationships">
+<p:sld xmlns:a="http://schemas.openxmlformats.org/drawingml/2006/main" xmlns:r="http://schemas.openxmlformats.org/officeDocument/2006/relationships" xmlns:p="http://schemas.openxmlformats.org/presentationml/2006/main">
   <p:cSld>
     <p:bg>
       <p:bgPr>
@@ -4183,7 +4214,14 @@
         <p:cNvGrpSpPr/>
         <p:nvPr/>
       </p:nvGrpSpPr>
-      <p:grpSpPr/>
+      <p:grpSpPr>
+        <a:xfrm>
+          <a:off x="0" y="0"/>
+          <a:ext cx="0" cy="0"/>
+          <a:chOff x="0" y="0"/>
+          <a:chExt cx="0" cy="0"/>
+        </a:xfrm>
+      </p:grpSpPr>
       <p:sp>
         <p:nvSpPr>
           <p:cNvPr id="2" name="TextBox 1"/>
@@ -4356,7 +4394,7 @@
 </file>
 
 <file path=ppt/slides/slide15.xml><?xml version="1.0" encoding="utf-8"?>
-<p:sld xmlns:a="http://schemas.openxmlformats.org/drawingml/2006/main" xmlns:p="http://schemas.openxmlformats.org/presentationml/2006/main" xmlns:r="http://schemas.openxmlformats.org/officeDocument/2006/relationships">
+<p:sld xmlns:a="http://schemas.openxmlformats.org/drawingml/2006/main" xmlns:r="http://schemas.openxmlformats.org/officeDocument/2006/relationships" xmlns:p="http://schemas.openxmlformats.org/presentationml/2006/main">
   <p:cSld>
     <p:bg>
       <p:bgPr>
@@ -4372,7 +4410,14 @@
         <p:cNvGrpSpPr/>
         <p:nvPr/>
       </p:nvGrpSpPr>
-      <p:grpSpPr/>
+      <p:grpSpPr>
+        <a:xfrm>
+          <a:off x="0" y="0"/>
+          <a:ext cx="0" cy="0"/>
+          <a:chOff x="0" y="0"/>
+          <a:chExt cx="0" cy="0"/>
+        </a:xfrm>
+      </p:grpSpPr>
       <p:sp>
         <p:nvSpPr>
           <p:cNvPr id="2" name="TextBox 1"/>
@@ -4505,7 +4550,7 @@
 </file>
 
 <file path=ppt/slides/slide16.xml><?xml version="1.0" encoding="utf-8"?>
-<p:sld xmlns:a="http://schemas.openxmlformats.org/drawingml/2006/main" xmlns:p="http://schemas.openxmlformats.org/presentationml/2006/main" xmlns:r="http://schemas.openxmlformats.org/officeDocument/2006/relationships">
+<p:sld xmlns:a="http://schemas.openxmlformats.org/drawingml/2006/main" xmlns:r="http://schemas.openxmlformats.org/officeDocument/2006/relationships" xmlns:p="http://schemas.openxmlformats.org/presentationml/2006/main">
   <p:cSld>
     <p:bg>
       <p:bgPr>
@@ -4521,7 +4566,14 @@
         <p:cNvGrpSpPr/>
         <p:nvPr/>
       </p:nvGrpSpPr>
-      <p:grpSpPr/>
+      <p:grpSpPr>
+        <a:xfrm>
+          <a:off x="0" y="0"/>
+          <a:ext cx="0" cy="0"/>
+          <a:chOff x="0" y="0"/>
+          <a:chExt cx="0" cy="0"/>
+        </a:xfrm>
+      </p:grpSpPr>
       <p:sp>
         <p:nvSpPr>
           <p:cNvPr id="2" name="TextBox 1"/>
@@ -4654,7 +4706,7 @@
 </file>
 
 <file path=ppt/slides/slide17.xml><?xml version="1.0" encoding="utf-8"?>
-<p:sld xmlns:a="http://schemas.openxmlformats.org/drawingml/2006/main" xmlns:p="http://schemas.openxmlformats.org/presentationml/2006/main" xmlns:r="http://schemas.openxmlformats.org/officeDocument/2006/relationships">
+<p:sld xmlns:a="http://schemas.openxmlformats.org/drawingml/2006/main" xmlns:r="http://schemas.openxmlformats.org/officeDocument/2006/relationships" xmlns:p="http://schemas.openxmlformats.org/presentationml/2006/main">
   <p:cSld>
     <p:bg>
       <p:bgPr>
@@ -4670,7 +4722,14 @@
         <p:cNvGrpSpPr/>
         <p:nvPr/>
       </p:nvGrpSpPr>
-      <p:grpSpPr/>
+      <p:grpSpPr>
+        <a:xfrm>
+          <a:off x="0" y="0"/>
+          <a:ext cx="0" cy="0"/>
+          <a:chOff x="0" y="0"/>
+          <a:chExt cx="0" cy="0"/>
+        </a:xfrm>
+      </p:grpSpPr>
       <p:sp>
         <p:nvSpPr>
           <p:cNvPr id="2" name="TextBox 1"/>
@@ -4803,7 +4862,7 @@
 </file>
 
 <file path=ppt/slides/slide18.xml><?xml version="1.0" encoding="utf-8"?>
-<p:sld xmlns:a="http://schemas.openxmlformats.org/drawingml/2006/main" xmlns:p="http://schemas.openxmlformats.org/presentationml/2006/main" xmlns:r="http://schemas.openxmlformats.org/officeDocument/2006/relationships">
+<p:sld xmlns:a="http://schemas.openxmlformats.org/drawingml/2006/main" xmlns:r="http://schemas.openxmlformats.org/officeDocument/2006/relationships" xmlns:p="http://schemas.openxmlformats.org/presentationml/2006/main">
   <p:cSld>
     <p:bg>
       <p:bgPr>
@@ -4819,7 +4878,14 @@
         <p:cNvGrpSpPr/>
         <p:nvPr/>
       </p:nvGrpSpPr>
-      <p:grpSpPr/>
+      <p:grpSpPr>
+        <a:xfrm>
+          <a:off x="0" y="0"/>
+          <a:ext cx="0" cy="0"/>
+          <a:chOff x="0" y="0"/>
+          <a:chExt cx="0" cy="0"/>
+        </a:xfrm>
+      </p:grpSpPr>
       <p:sp>
         <p:nvSpPr>
           <p:cNvPr id="2" name="TextBox 1"/>
@@ -4952,7 +5018,7 @@
 </file>
 
 <file path=ppt/slides/slide19.xml><?xml version="1.0" encoding="utf-8"?>
-<p:sld xmlns:a="http://schemas.openxmlformats.org/drawingml/2006/main" xmlns:p="http://schemas.openxmlformats.org/presentationml/2006/main" xmlns:r="http://schemas.openxmlformats.org/officeDocument/2006/relationships">
+<p:sld xmlns:a="http://schemas.openxmlformats.org/drawingml/2006/main" xmlns:r="http://schemas.openxmlformats.org/officeDocument/2006/relationships" xmlns:p="http://schemas.openxmlformats.org/presentationml/2006/main">
   <p:cSld>
     <p:bg>
       <p:bgPr>
@@ -4968,7 +5034,14 @@
         <p:cNvGrpSpPr/>
         <p:nvPr/>
       </p:nvGrpSpPr>
-      <p:grpSpPr/>
+      <p:grpSpPr>
+        <a:xfrm>
+          <a:off x="0" y="0"/>
+          <a:ext cx="0" cy="0"/>
+          <a:chOff x="0" y="0"/>
+          <a:chExt cx="0" cy="0"/>
+        </a:xfrm>
+      </p:grpSpPr>
       <p:sp>
         <p:nvSpPr>
           <p:cNvPr id="2" name="TextBox 1"/>
@@ -5085,7 +5158,7 @@
 </file>
 
 <file path=ppt/slides/slide2.xml><?xml version="1.0" encoding="utf-8"?>
-<p:sld xmlns:a="http://schemas.openxmlformats.org/drawingml/2006/main" xmlns:p="http://schemas.openxmlformats.org/presentationml/2006/main" xmlns:r="http://schemas.openxmlformats.org/officeDocument/2006/relationships">
+<p:sld xmlns:a="http://schemas.openxmlformats.org/drawingml/2006/main" xmlns:r="http://schemas.openxmlformats.org/officeDocument/2006/relationships" xmlns:p="http://schemas.openxmlformats.org/presentationml/2006/main">
   <p:cSld>
     <p:bg>
       <p:bgPr>
@@ -5101,7 +5174,14 @@
         <p:cNvGrpSpPr/>
         <p:nvPr/>
       </p:nvGrpSpPr>
-      <p:grpSpPr/>
+      <p:grpSpPr>
+        <a:xfrm>
+          <a:off x="0" y="0"/>
+          <a:ext cx="0" cy="0"/>
+          <a:chOff x="0" y="0"/>
+          <a:chExt cx="0" cy="0"/>
+        </a:xfrm>
+      </p:grpSpPr>
       <p:sp>
         <p:nvSpPr>
           <p:cNvPr id="2" name="TextBox 1"/>
@@ -5250,7 +5330,7 @@
 </file>
 
 <file path=ppt/slides/slide20.xml><?xml version="1.0" encoding="utf-8"?>
-<p:sld xmlns:a="http://schemas.openxmlformats.org/drawingml/2006/main" xmlns:p="http://schemas.openxmlformats.org/presentationml/2006/main" xmlns:r="http://schemas.openxmlformats.org/officeDocument/2006/relationships">
+<p:sld xmlns:a="http://schemas.openxmlformats.org/drawingml/2006/main" xmlns:r="http://schemas.openxmlformats.org/officeDocument/2006/relationships" xmlns:p="http://schemas.openxmlformats.org/presentationml/2006/main">
   <p:cSld>
     <p:bg>
       <p:bgPr>
@@ -5266,7 +5346,14 @@
         <p:cNvGrpSpPr/>
         <p:nvPr/>
       </p:nvGrpSpPr>
-      <p:grpSpPr/>
+      <p:grpSpPr>
+        <a:xfrm>
+          <a:off x="0" y="0"/>
+          <a:ext cx="0" cy="0"/>
+          <a:chOff x="0" y="0"/>
+          <a:chExt cx="0" cy="0"/>
+        </a:xfrm>
+      </p:grpSpPr>
       <p:sp>
         <p:nvSpPr>
           <p:cNvPr id="2" name="TextBox 1"/>
@@ -5399,7 +5486,7 @@
 </file>
 
 <file path=ppt/slides/slide21.xml><?xml version="1.0" encoding="utf-8"?>
-<p:sld xmlns:a="http://schemas.openxmlformats.org/drawingml/2006/main" xmlns:p="http://schemas.openxmlformats.org/presentationml/2006/main" xmlns:r="http://schemas.openxmlformats.org/officeDocument/2006/relationships">
+<p:sld xmlns:a="http://schemas.openxmlformats.org/drawingml/2006/main" xmlns:r="http://schemas.openxmlformats.org/officeDocument/2006/relationships" xmlns:p="http://schemas.openxmlformats.org/presentationml/2006/main">
   <p:cSld>
     <p:bg>
       <p:bgPr>
@@ -5415,7 +5502,14 @@
         <p:cNvGrpSpPr/>
         <p:nvPr/>
       </p:nvGrpSpPr>
-      <p:grpSpPr/>
+      <p:grpSpPr>
+        <a:xfrm>
+          <a:off x="0" y="0"/>
+          <a:ext cx="0" cy="0"/>
+          <a:chOff x="0" y="0"/>
+          <a:chExt cx="0" cy="0"/>
+        </a:xfrm>
+      </p:grpSpPr>
       <p:sp>
         <p:nvSpPr>
           <p:cNvPr id="2" name="TextBox 1"/>
@@ -5593,7 +5687,7 @@
           </a:fontRef>
         </p:style>
         <p:txBody>
-          <a:bodyPr rtlCol="0" anchor="ctr" wrap="square" lIns="137160" tIns="137160" rIns="137160" bIns="137160"/>
+          <a:bodyPr wrap="square" lIns="137160" tIns="137160" rIns="137160" bIns="137160" rtlCol="0" anchor="ctr"/>
           <a:lstStyle/>
           <a:p>
             <a:pPr algn="ctr">
@@ -5633,16 +5727,279 @@
                 </a:solidFill>
                 <a:latin typeface="Consolas"/>
               </a:rPr>
+              <a:t> dotProduct = </a:t>
+            </a:r>
+            <a:r>
+              <a:rPr sz="1100">
+                <a:solidFill>
+                  <a:srgbClr val="818CF8"/>
+                </a:solidFill>
+                <a:latin typeface="Consolas"/>
+              </a:rPr>
+              <a:t>0</a:t>
+            </a:r>
+            <a:r>
+              <a:rPr sz="1100">
+                <a:solidFill>
+                  <a:srgbClr val="F1F5F9"/>
+                </a:solidFill>
+                <a:latin typeface="Consolas"/>
+              </a:rPr>
+              <a:t>;</a:t>
+            </a:r>
+          </a:p>
+          <a:p>
+            <a:pPr>
+              <a:spcAft>
+                <a:spcPts val="200"/>
+              </a:spcAft>
+            </a:pPr>
+            <a:r>
+              <a:rPr sz="1100" b="1">
+                <a:solidFill>
+                  <a:srgbClr val="F472B6"/>
+                </a:solidFill>
+                <a:latin typeface="Consolas"/>
+              </a:rPr>
+              <a:t>let</a:t>
+            </a:r>
+            <a:r>
+              <a:rPr sz="1100">
+                <a:solidFill>
+                  <a:srgbClr val="F1F5F9"/>
+                </a:solidFill>
+                <a:latin typeface="Consolas"/>
+              </a:rPr>
+              <a:t> mag1 = </a:t>
+            </a:r>
+            <a:r>
+              <a:rPr sz="1100">
+                <a:solidFill>
+                  <a:srgbClr val="818CF8"/>
+                </a:solidFill>
+                <a:latin typeface="Consolas"/>
+              </a:rPr>
+              <a:t>0</a:t>
+            </a:r>
+            <a:r>
+              <a:rPr sz="1100">
+                <a:solidFill>
+                  <a:srgbClr val="F1F5F9"/>
+                </a:solidFill>
+                <a:latin typeface="Consolas"/>
+              </a:rPr>
+              <a:t>;</a:t>
+            </a:r>
+          </a:p>
+          <a:p>
+            <a:pPr>
+              <a:spcAft>
+                <a:spcPts val="200"/>
+              </a:spcAft>
+            </a:pPr>
+            <a:r>
+              <a:rPr sz="1100" b="1">
+                <a:solidFill>
+                  <a:srgbClr val="F472B6"/>
+                </a:solidFill>
+                <a:latin typeface="Consolas"/>
+              </a:rPr>
+              <a:t>let</a:t>
+            </a:r>
+            <a:r>
+              <a:rPr sz="1100">
+                <a:solidFill>
+                  <a:srgbClr val="F1F5F9"/>
+                </a:solidFill>
+                <a:latin typeface="Consolas"/>
+              </a:rPr>
+              <a:t> mag2 = </a:t>
+            </a:r>
+            <a:r>
+              <a:rPr sz="1100">
+                <a:solidFill>
+                  <a:srgbClr val="818CF8"/>
+                </a:solidFill>
+                <a:latin typeface="Consolas"/>
+              </a:rPr>
+              <a:t>0</a:t>
+            </a:r>
+            <a:r>
+              <a:rPr sz="1100">
+                <a:solidFill>
+                  <a:srgbClr val="F1F5F9"/>
+                </a:solidFill>
+                <a:latin typeface="Consolas"/>
+              </a:rPr>
+              <a:t>;</a:t>
+            </a:r>
+          </a:p>
+          <a:p>
+            <a:pPr>
+              <a:spcAft>
+                <a:spcPts val="200"/>
+              </a:spcAft>
+            </a:pPr>
+            <a:r>
+              <a:rPr sz="1100">
+                <a:solidFill>
+                  <a:srgbClr val="F1F5F9"/>
+                </a:solidFill>
+                <a:latin typeface="Consolas"/>
+              </a:rPr>
+              <a:t>vocab.forEach(word =&gt; {</a:t>
+            </a:r>
+          </a:p>
+          <a:p>
+            <a:pPr>
+              <a:spcAft>
+                <a:spcPts val="200"/>
+              </a:spcAft>
+            </a:pPr>
+            <a:r>
+              <a:rPr sz="1100">
+                <a:solidFill>
+                  <a:srgbClr val="F1F5F9"/>
+                </a:solidFill>
+                <a:latin typeface="Consolas"/>
+              </a:rPr>
+              <a:t>    dotProduct += freq1[word] * freq2[word];</a:t>
+            </a:r>
+          </a:p>
+          <a:p>
+            <a:pPr>
+              <a:spcAft>
+                <a:spcPts val="200"/>
+              </a:spcAft>
+            </a:pPr>
+            <a:r>
+              <a:rPr sz="1100">
+                <a:solidFill>
+                  <a:srgbClr val="F1F5F9"/>
+                </a:solidFill>
+                <a:latin typeface="Consolas"/>
+              </a:rPr>
+              <a:t>    mag1 += freq1[word] * freq1[word];</a:t>
+            </a:r>
+          </a:p>
+          <a:p>
+            <a:pPr>
+              <a:spcAft>
+                <a:spcPts val="200"/>
+              </a:spcAft>
+            </a:pPr>
+            <a:r>
+              <a:rPr sz="1100">
+                <a:solidFill>
+                  <a:srgbClr val="F1F5F9"/>
+                </a:solidFill>
+                <a:latin typeface="Consolas"/>
+              </a:rPr>
+              <a:t>    mag2 += freq2[word] * freq2[word];</a:t>
+            </a:r>
+          </a:p>
+          <a:p>
+            <a:pPr>
+              <a:spcAft>
+                <a:spcPts val="200"/>
+              </a:spcAft>
+            </a:pPr>
+            <a:r>
+              <a:rPr sz="1100">
+                <a:solidFill>
+                  <a:srgbClr val="F1F5F9"/>
+                </a:solidFill>
+                <a:latin typeface="Consolas"/>
+              </a:rPr>
+              <a:t>});</a:t>
+            </a:r>
+          </a:p>
+          <a:p>
+            <a:pPr>
+              <a:spcAft>
+                <a:spcPts val="200"/>
+              </a:spcAft>
+            </a:pPr>
+            <a:r>
+              <a:rPr sz="1100" b="1">
+                <a:solidFill>
+                  <a:srgbClr val="F472B6"/>
+                </a:solidFill>
+                <a:latin typeface="Consolas"/>
+              </a:rPr>
+              <a:t>if</a:t>
+            </a:r>
+            <a:r>
+              <a:rPr sz="1100">
+                <a:solidFill>
+                  <a:srgbClr val="F1F5F9"/>
+                </a:solidFill>
+                <a:latin typeface="Consolas"/>
+              </a:rPr>
+              <a:t> (mag1 === </a:t>
+            </a:r>
+            <a:r>
+              <a:rPr sz="1100">
+                <a:solidFill>
+                  <a:srgbClr val="818CF8"/>
+                </a:solidFill>
+                <a:latin typeface="Consolas"/>
+              </a:rPr>
+              <a:t>0</a:t>
+            </a:r>
+            <a:r>
+              <a:rPr sz="1100">
+                <a:solidFill>
+                  <a:srgbClr val="F1F5F9"/>
+                </a:solidFill>
+                <a:latin typeface="Consolas"/>
+              </a:rPr>
+              <a:t> || mag2 === </a:t>
+            </a:r>
+            <a:r>
+              <a:rPr sz="1100">
+                <a:solidFill>
+                  <a:srgbClr val="818CF8"/>
+                </a:solidFill>
+                <a:latin typeface="Consolas"/>
+              </a:rPr>
+              <a:t>0</a:t>
+            </a:r>
+            <a:r>
+              <a:rPr sz="1100">
+                <a:solidFill>
+                  <a:srgbClr val="F1F5F9"/>
+                </a:solidFill>
+                <a:latin typeface="Consolas"/>
+              </a:rPr>
+              <a:t>) </a:t>
+            </a:r>
+            <a:r>
+              <a:rPr sz="1100" b="1">
+                <a:solidFill>
+                  <a:srgbClr val="F472B6"/>
+                </a:solidFill>
+                <a:latin typeface="Consolas"/>
+              </a:rPr>
+              <a:t>return</a:t>
+            </a:r>
+            <a:r>
+              <a:rPr sz="1100">
+                <a:solidFill>
+                  <a:srgbClr val="F1F5F9"/>
+                </a:solidFill>
+                <a:latin typeface="Consolas"/>
+              </a:rPr>
               <a:t> </a:t>
             </a:r>
             <a:r>
               <a:rPr sz="1100">
                 <a:solidFill>
-                  <a:srgbClr val="F1F5F9"/>
-                </a:solidFill>
-                <a:latin typeface="Consolas"/>
-              </a:rPr>
-              <a:t>dotProduct</a:t>
+                  <a:srgbClr val="818CF8"/>
+                </a:solidFill>
+                <a:latin typeface="Consolas"/>
+              </a:rPr>
+              <a:t>0</a:t>
             </a:r>
             <a:r>
               <a:rPr sz="1100">
@@ -5651,7 +6008,23 @@
                 </a:solidFill>
                 <a:latin typeface="Consolas"/>
               </a:rPr>
-              <a:t> </a:t>
+              <a:t>;</a:t>
+            </a:r>
+          </a:p>
+          <a:p>
+            <a:pPr>
+              <a:spcAft>
+                <a:spcPts val="200"/>
+              </a:spcAft>
+            </a:pPr>
+            <a:r>
+              <a:rPr sz="1100" b="1">
+                <a:solidFill>
+                  <a:srgbClr val="F472B6"/>
+                </a:solidFill>
+                <a:latin typeface="Consolas"/>
+              </a:rPr>
+              <a:t>return</a:t>
             </a:r>
             <a:r>
               <a:rPr sz="1100">
@@ -5660,1195 +6033,7 @@
                 </a:solidFill>
                 <a:latin typeface="Consolas"/>
               </a:rPr>
-              <a:t>=</a:t>
-            </a:r>
-            <a:r>
-              <a:rPr sz="1100">
-                <a:solidFill>
-                  <a:srgbClr val="F1F5F9"/>
-                </a:solidFill>
-                <a:latin typeface="Consolas"/>
-              </a:rPr>
-              <a:t> </a:t>
-            </a:r>
-            <a:r>
-              <a:rPr sz="1100">
-                <a:solidFill>
-                  <a:srgbClr val="818CF8"/>
-                </a:solidFill>
-                <a:latin typeface="Consolas"/>
-              </a:rPr>
-              <a:t>0</a:t>
-            </a:r>
-            <a:r>
-              <a:rPr sz="1100">
-                <a:solidFill>
-                  <a:srgbClr val="F1F5F9"/>
-                </a:solidFill>
-                <a:latin typeface="Consolas"/>
-              </a:rPr>
-              <a:t>;</a:t>
-            </a:r>
-          </a:p>
-          <a:p>
-            <a:pPr>
-              <a:spcAft>
-                <a:spcPts val="200"/>
-              </a:spcAft>
-            </a:pPr>
-            <a:r>
-              <a:rPr sz="1100" b="1">
-                <a:solidFill>
-                  <a:srgbClr val="F472B6"/>
-                </a:solidFill>
-                <a:latin typeface="Consolas"/>
-              </a:rPr>
-              <a:t>let</a:t>
-            </a:r>
-            <a:r>
-              <a:rPr sz="1100">
-                <a:solidFill>
-                  <a:srgbClr val="F1F5F9"/>
-                </a:solidFill>
-                <a:latin typeface="Consolas"/>
-              </a:rPr>
-              <a:t> </a:t>
-            </a:r>
-            <a:r>
-              <a:rPr sz="1100">
-                <a:solidFill>
-                  <a:srgbClr val="F1F5F9"/>
-                </a:solidFill>
-                <a:latin typeface="Consolas"/>
-              </a:rPr>
-              <a:t>mag1</a:t>
-            </a:r>
-            <a:r>
-              <a:rPr sz="1100">
-                <a:solidFill>
-                  <a:srgbClr val="F1F5F9"/>
-                </a:solidFill>
-                <a:latin typeface="Consolas"/>
-              </a:rPr>
-              <a:t> </a:t>
-            </a:r>
-            <a:r>
-              <a:rPr sz="1100">
-                <a:solidFill>
-                  <a:srgbClr val="F1F5F9"/>
-                </a:solidFill>
-                <a:latin typeface="Consolas"/>
-              </a:rPr>
-              <a:t>=</a:t>
-            </a:r>
-            <a:r>
-              <a:rPr sz="1100">
-                <a:solidFill>
-                  <a:srgbClr val="F1F5F9"/>
-                </a:solidFill>
-                <a:latin typeface="Consolas"/>
-              </a:rPr>
-              <a:t> </a:t>
-            </a:r>
-            <a:r>
-              <a:rPr sz="1100">
-                <a:solidFill>
-                  <a:srgbClr val="818CF8"/>
-                </a:solidFill>
-                <a:latin typeface="Consolas"/>
-              </a:rPr>
-              <a:t>0</a:t>
-            </a:r>
-            <a:r>
-              <a:rPr sz="1100">
-                <a:solidFill>
-                  <a:srgbClr val="F1F5F9"/>
-                </a:solidFill>
-                <a:latin typeface="Consolas"/>
-              </a:rPr>
-              <a:t>;</a:t>
-            </a:r>
-          </a:p>
-          <a:p>
-            <a:pPr>
-              <a:spcAft>
-                <a:spcPts val="200"/>
-              </a:spcAft>
-            </a:pPr>
-            <a:r>
-              <a:rPr sz="1100" b="1">
-                <a:solidFill>
-                  <a:srgbClr val="F472B6"/>
-                </a:solidFill>
-                <a:latin typeface="Consolas"/>
-              </a:rPr>
-              <a:t>let</a:t>
-            </a:r>
-            <a:r>
-              <a:rPr sz="1100">
-                <a:solidFill>
-                  <a:srgbClr val="F1F5F9"/>
-                </a:solidFill>
-                <a:latin typeface="Consolas"/>
-              </a:rPr>
-              <a:t> </a:t>
-            </a:r>
-            <a:r>
-              <a:rPr sz="1100">
-                <a:solidFill>
-                  <a:srgbClr val="F1F5F9"/>
-                </a:solidFill>
-                <a:latin typeface="Consolas"/>
-              </a:rPr>
-              <a:t>mag2</a:t>
-            </a:r>
-            <a:r>
-              <a:rPr sz="1100">
-                <a:solidFill>
-                  <a:srgbClr val="F1F5F9"/>
-                </a:solidFill>
-                <a:latin typeface="Consolas"/>
-              </a:rPr>
-              <a:t> </a:t>
-            </a:r>
-            <a:r>
-              <a:rPr sz="1100">
-                <a:solidFill>
-                  <a:srgbClr val="F1F5F9"/>
-                </a:solidFill>
-                <a:latin typeface="Consolas"/>
-              </a:rPr>
-              <a:t>=</a:t>
-            </a:r>
-            <a:r>
-              <a:rPr sz="1100">
-                <a:solidFill>
-                  <a:srgbClr val="F1F5F9"/>
-                </a:solidFill>
-                <a:latin typeface="Consolas"/>
-              </a:rPr>
-              <a:t> </a:t>
-            </a:r>
-            <a:r>
-              <a:rPr sz="1100">
-                <a:solidFill>
-                  <a:srgbClr val="818CF8"/>
-                </a:solidFill>
-                <a:latin typeface="Consolas"/>
-              </a:rPr>
-              <a:t>0</a:t>
-            </a:r>
-            <a:r>
-              <a:rPr sz="1100">
-                <a:solidFill>
-                  <a:srgbClr val="F1F5F9"/>
-                </a:solidFill>
-                <a:latin typeface="Consolas"/>
-              </a:rPr>
-              <a:t>;</a:t>
-            </a:r>
-          </a:p>
-          <a:p>
-            <a:pPr>
-              <a:spcAft>
-                <a:spcPts val="200"/>
-              </a:spcAft>
-            </a:pPr>
-            <a:r>
-              <a:rPr sz="1100">
-                <a:solidFill>
-                  <a:srgbClr val="F1F5F9"/>
-                </a:solidFill>
-                <a:latin typeface="Consolas"/>
-              </a:rPr>
-              <a:t>vocab</a:t>
-            </a:r>
-            <a:r>
-              <a:rPr sz="1100">
-                <a:solidFill>
-                  <a:srgbClr val="F1F5F9"/>
-                </a:solidFill>
-                <a:latin typeface="Consolas"/>
-              </a:rPr>
-              <a:t>.</a:t>
-            </a:r>
-            <a:r>
-              <a:rPr sz="1100">
-                <a:solidFill>
-                  <a:srgbClr val="F1F5F9"/>
-                </a:solidFill>
-                <a:latin typeface="Consolas"/>
-              </a:rPr>
-              <a:t>forEach</a:t>
-            </a:r>
-            <a:r>
-              <a:rPr sz="1100">
-                <a:solidFill>
-                  <a:srgbClr val="F1F5F9"/>
-                </a:solidFill>
-                <a:latin typeface="Consolas"/>
-              </a:rPr>
-              <a:t>(</a:t>
-            </a:r>
-            <a:r>
-              <a:rPr sz="1100">
-                <a:solidFill>
-                  <a:srgbClr val="F1F5F9"/>
-                </a:solidFill>
-                <a:latin typeface="Consolas"/>
-              </a:rPr>
-              <a:t>word</a:t>
-            </a:r>
-            <a:r>
-              <a:rPr sz="1100">
-                <a:solidFill>
-                  <a:srgbClr val="F1F5F9"/>
-                </a:solidFill>
-                <a:latin typeface="Consolas"/>
-              </a:rPr>
-              <a:t> </a:t>
-            </a:r>
-            <a:r>
-              <a:rPr sz="1100">
-                <a:solidFill>
-                  <a:srgbClr val="F1F5F9"/>
-                </a:solidFill>
-                <a:latin typeface="Consolas"/>
-              </a:rPr>
-              <a:t>=&gt;</a:t>
-            </a:r>
-            <a:r>
-              <a:rPr sz="1100">
-                <a:solidFill>
-                  <a:srgbClr val="F1F5F9"/>
-                </a:solidFill>
-                <a:latin typeface="Consolas"/>
-              </a:rPr>
-              <a:t> </a:t>
-            </a:r>
-            <a:r>
-              <a:rPr sz="1100">
-                <a:solidFill>
-                  <a:srgbClr val="F1F5F9"/>
-                </a:solidFill>
-                <a:latin typeface="Consolas"/>
-              </a:rPr>
-              <a:t>{</a:t>
-            </a:r>
-          </a:p>
-          <a:p>
-            <a:pPr>
-              <a:spcAft>
-                <a:spcPts val="200"/>
-              </a:spcAft>
-            </a:pPr>
-            <a:r>
-              <a:rPr sz="1100">
-                <a:solidFill>
-                  <a:srgbClr val="F1F5F9"/>
-                </a:solidFill>
-                <a:latin typeface="Consolas"/>
-              </a:rPr>
-              <a:t>    </a:t>
-            </a:r>
-            <a:r>
-              <a:rPr sz="1100">
-                <a:solidFill>
-                  <a:srgbClr val="F1F5F9"/>
-                </a:solidFill>
-                <a:latin typeface="Consolas"/>
-              </a:rPr>
-              <a:t>dotProduct</a:t>
-            </a:r>
-            <a:r>
-              <a:rPr sz="1100">
-                <a:solidFill>
-                  <a:srgbClr val="F1F5F9"/>
-                </a:solidFill>
-                <a:latin typeface="Consolas"/>
-              </a:rPr>
-              <a:t> </a:t>
-            </a:r>
-            <a:r>
-              <a:rPr sz="1100">
-                <a:solidFill>
-                  <a:srgbClr val="F1F5F9"/>
-                </a:solidFill>
-                <a:latin typeface="Consolas"/>
-              </a:rPr>
-              <a:t>+=</a:t>
-            </a:r>
-            <a:r>
-              <a:rPr sz="1100">
-                <a:solidFill>
-                  <a:srgbClr val="F1F5F9"/>
-                </a:solidFill>
-                <a:latin typeface="Consolas"/>
-              </a:rPr>
-              <a:t> </a:t>
-            </a:r>
-            <a:r>
-              <a:rPr sz="1100">
-                <a:solidFill>
-                  <a:srgbClr val="F1F5F9"/>
-                </a:solidFill>
-                <a:latin typeface="Consolas"/>
-              </a:rPr>
-              <a:t>freq1</a:t>
-            </a:r>
-            <a:r>
-              <a:rPr sz="1100">
-                <a:solidFill>
-                  <a:srgbClr val="F1F5F9"/>
-                </a:solidFill>
-                <a:latin typeface="Consolas"/>
-              </a:rPr>
-              <a:t>[</a:t>
-            </a:r>
-            <a:r>
-              <a:rPr sz="1100">
-                <a:solidFill>
-                  <a:srgbClr val="F1F5F9"/>
-                </a:solidFill>
-                <a:latin typeface="Consolas"/>
-              </a:rPr>
-              <a:t>word</a:t>
-            </a:r>
-            <a:r>
-              <a:rPr sz="1100">
-                <a:solidFill>
-                  <a:srgbClr val="F1F5F9"/>
-                </a:solidFill>
-                <a:latin typeface="Consolas"/>
-              </a:rPr>
-              <a:t>]</a:t>
-            </a:r>
-            <a:r>
-              <a:rPr sz="1100">
-                <a:solidFill>
-                  <a:srgbClr val="F1F5F9"/>
-                </a:solidFill>
-                <a:latin typeface="Consolas"/>
-              </a:rPr>
-              <a:t> </a:t>
-            </a:r>
-            <a:r>
-              <a:rPr sz="1100">
-                <a:solidFill>
-                  <a:srgbClr val="F1F5F9"/>
-                </a:solidFill>
-                <a:latin typeface="Consolas"/>
-              </a:rPr>
-              <a:t>*</a:t>
-            </a:r>
-            <a:r>
-              <a:rPr sz="1100">
-                <a:solidFill>
-                  <a:srgbClr val="F1F5F9"/>
-                </a:solidFill>
-                <a:latin typeface="Consolas"/>
-              </a:rPr>
-              <a:t> </a:t>
-            </a:r>
-            <a:r>
-              <a:rPr sz="1100">
-                <a:solidFill>
-                  <a:srgbClr val="F1F5F9"/>
-                </a:solidFill>
-                <a:latin typeface="Consolas"/>
-              </a:rPr>
-              <a:t>freq2</a:t>
-            </a:r>
-            <a:r>
-              <a:rPr sz="1100">
-                <a:solidFill>
-                  <a:srgbClr val="F1F5F9"/>
-                </a:solidFill>
-                <a:latin typeface="Consolas"/>
-              </a:rPr>
-              <a:t>[</a:t>
-            </a:r>
-            <a:r>
-              <a:rPr sz="1100">
-                <a:solidFill>
-                  <a:srgbClr val="F1F5F9"/>
-                </a:solidFill>
-                <a:latin typeface="Consolas"/>
-              </a:rPr>
-              <a:t>word</a:t>
-            </a:r>
-            <a:r>
-              <a:rPr sz="1100">
-                <a:solidFill>
-                  <a:srgbClr val="F1F5F9"/>
-                </a:solidFill>
-                <a:latin typeface="Consolas"/>
-              </a:rPr>
-              <a:t>];</a:t>
-            </a:r>
-          </a:p>
-          <a:p>
-            <a:pPr>
-              <a:spcAft>
-                <a:spcPts val="200"/>
-              </a:spcAft>
-            </a:pPr>
-            <a:r>
-              <a:rPr sz="1100">
-                <a:solidFill>
-                  <a:srgbClr val="F1F5F9"/>
-                </a:solidFill>
-                <a:latin typeface="Consolas"/>
-              </a:rPr>
-              <a:t>    </a:t>
-            </a:r>
-            <a:r>
-              <a:rPr sz="1100">
-                <a:solidFill>
-                  <a:srgbClr val="F1F5F9"/>
-                </a:solidFill>
-                <a:latin typeface="Consolas"/>
-              </a:rPr>
-              <a:t>mag1</a:t>
-            </a:r>
-            <a:r>
-              <a:rPr sz="1100">
-                <a:solidFill>
-                  <a:srgbClr val="F1F5F9"/>
-                </a:solidFill>
-                <a:latin typeface="Consolas"/>
-              </a:rPr>
-              <a:t> </a:t>
-            </a:r>
-            <a:r>
-              <a:rPr sz="1100">
-                <a:solidFill>
-                  <a:srgbClr val="F1F5F9"/>
-                </a:solidFill>
-                <a:latin typeface="Consolas"/>
-              </a:rPr>
-              <a:t>+=</a:t>
-            </a:r>
-            <a:r>
-              <a:rPr sz="1100">
-                <a:solidFill>
-                  <a:srgbClr val="F1F5F9"/>
-                </a:solidFill>
-                <a:latin typeface="Consolas"/>
-              </a:rPr>
-              <a:t> </a:t>
-            </a:r>
-            <a:r>
-              <a:rPr sz="1100">
-                <a:solidFill>
-                  <a:srgbClr val="F1F5F9"/>
-                </a:solidFill>
-                <a:latin typeface="Consolas"/>
-              </a:rPr>
-              <a:t>freq1</a:t>
-            </a:r>
-            <a:r>
-              <a:rPr sz="1100">
-                <a:solidFill>
-                  <a:srgbClr val="F1F5F9"/>
-                </a:solidFill>
-                <a:latin typeface="Consolas"/>
-              </a:rPr>
-              <a:t>[</a:t>
-            </a:r>
-            <a:r>
-              <a:rPr sz="1100">
-                <a:solidFill>
-                  <a:srgbClr val="F1F5F9"/>
-                </a:solidFill>
-                <a:latin typeface="Consolas"/>
-              </a:rPr>
-              <a:t>word</a:t>
-            </a:r>
-            <a:r>
-              <a:rPr sz="1100">
-                <a:solidFill>
-                  <a:srgbClr val="F1F5F9"/>
-                </a:solidFill>
-                <a:latin typeface="Consolas"/>
-              </a:rPr>
-              <a:t>]</a:t>
-            </a:r>
-            <a:r>
-              <a:rPr sz="1100">
-                <a:solidFill>
-                  <a:srgbClr val="F1F5F9"/>
-                </a:solidFill>
-                <a:latin typeface="Consolas"/>
-              </a:rPr>
-              <a:t> </a:t>
-            </a:r>
-            <a:r>
-              <a:rPr sz="1100">
-                <a:solidFill>
-                  <a:srgbClr val="F1F5F9"/>
-                </a:solidFill>
-                <a:latin typeface="Consolas"/>
-              </a:rPr>
-              <a:t>*</a:t>
-            </a:r>
-            <a:r>
-              <a:rPr sz="1100">
-                <a:solidFill>
-                  <a:srgbClr val="F1F5F9"/>
-                </a:solidFill>
-                <a:latin typeface="Consolas"/>
-              </a:rPr>
-              <a:t> </a:t>
-            </a:r>
-            <a:r>
-              <a:rPr sz="1100">
-                <a:solidFill>
-                  <a:srgbClr val="F1F5F9"/>
-                </a:solidFill>
-                <a:latin typeface="Consolas"/>
-              </a:rPr>
-              <a:t>freq1</a:t>
-            </a:r>
-            <a:r>
-              <a:rPr sz="1100">
-                <a:solidFill>
-                  <a:srgbClr val="F1F5F9"/>
-                </a:solidFill>
-                <a:latin typeface="Consolas"/>
-              </a:rPr>
-              <a:t>[</a:t>
-            </a:r>
-            <a:r>
-              <a:rPr sz="1100">
-                <a:solidFill>
-                  <a:srgbClr val="F1F5F9"/>
-                </a:solidFill>
-                <a:latin typeface="Consolas"/>
-              </a:rPr>
-              <a:t>word</a:t>
-            </a:r>
-            <a:r>
-              <a:rPr sz="1100">
-                <a:solidFill>
-                  <a:srgbClr val="F1F5F9"/>
-                </a:solidFill>
-                <a:latin typeface="Consolas"/>
-              </a:rPr>
-              <a:t>];</a:t>
-            </a:r>
-          </a:p>
-          <a:p>
-            <a:pPr>
-              <a:spcAft>
-                <a:spcPts val="200"/>
-              </a:spcAft>
-            </a:pPr>
-            <a:r>
-              <a:rPr sz="1100">
-                <a:solidFill>
-                  <a:srgbClr val="F1F5F9"/>
-                </a:solidFill>
-                <a:latin typeface="Consolas"/>
-              </a:rPr>
-              <a:t>    </a:t>
-            </a:r>
-            <a:r>
-              <a:rPr sz="1100">
-                <a:solidFill>
-                  <a:srgbClr val="F1F5F9"/>
-                </a:solidFill>
-                <a:latin typeface="Consolas"/>
-              </a:rPr>
-              <a:t>mag2</a:t>
-            </a:r>
-            <a:r>
-              <a:rPr sz="1100">
-                <a:solidFill>
-                  <a:srgbClr val="F1F5F9"/>
-                </a:solidFill>
-                <a:latin typeface="Consolas"/>
-              </a:rPr>
-              <a:t> </a:t>
-            </a:r>
-            <a:r>
-              <a:rPr sz="1100">
-                <a:solidFill>
-                  <a:srgbClr val="F1F5F9"/>
-                </a:solidFill>
-                <a:latin typeface="Consolas"/>
-              </a:rPr>
-              <a:t>+=</a:t>
-            </a:r>
-            <a:r>
-              <a:rPr sz="1100">
-                <a:solidFill>
-                  <a:srgbClr val="F1F5F9"/>
-                </a:solidFill>
-                <a:latin typeface="Consolas"/>
-              </a:rPr>
-              <a:t> </a:t>
-            </a:r>
-            <a:r>
-              <a:rPr sz="1100">
-                <a:solidFill>
-                  <a:srgbClr val="F1F5F9"/>
-                </a:solidFill>
-                <a:latin typeface="Consolas"/>
-              </a:rPr>
-              <a:t>freq2</a:t>
-            </a:r>
-            <a:r>
-              <a:rPr sz="1100">
-                <a:solidFill>
-                  <a:srgbClr val="F1F5F9"/>
-                </a:solidFill>
-                <a:latin typeface="Consolas"/>
-              </a:rPr>
-              <a:t>[</a:t>
-            </a:r>
-            <a:r>
-              <a:rPr sz="1100">
-                <a:solidFill>
-                  <a:srgbClr val="F1F5F9"/>
-                </a:solidFill>
-                <a:latin typeface="Consolas"/>
-              </a:rPr>
-              <a:t>word</a:t>
-            </a:r>
-            <a:r>
-              <a:rPr sz="1100">
-                <a:solidFill>
-                  <a:srgbClr val="F1F5F9"/>
-                </a:solidFill>
-                <a:latin typeface="Consolas"/>
-              </a:rPr>
-              <a:t>]</a:t>
-            </a:r>
-            <a:r>
-              <a:rPr sz="1100">
-                <a:solidFill>
-                  <a:srgbClr val="F1F5F9"/>
-                </a:solidFill>
-                <a:latin typeface="Consolas"/>
-              </a:rPr>
-              <a:t> </a:t>
-            </a:r>
-            <a:r>
-              <a:rPr sz="1100">
-                <a:solidFill>
-                  <a:srgbClr val="F1F5F9"/>
-                </a:solidFill>
-                <a:latin typeface="Consolas"/>
-              </a:rPr>
-              <a:t>*</a:t>
-            </a:r>
-            <a:r>
-              <a:rPr sz="1100">
-                <a:solidFill>
-                  <a:srgbClr val="F1F5F9"/>
-                </a:solidFill>
-                <a:latin typeface="Consolas"/>
-              </a:rPr>
-              <a:t> </a:t>
-            </a:r>
-            <a:r>
-              <a:rPr sz="1100">
-                <a:solidFill>
-                  <a:srgbClr val="F1F5F9"/>
-                </a:solidFill>
-                <a:latin typeface="Consolas"/>
-              </a:rPr>
-              <a:t>freq2</a:t>
-            </a:r>
-            <a:r>
-              <a:rPr sz="1100">
-                <a:solidFill>
-                  <a:srgbClr val="F1F5F9"/>
-                </a:solidFill>
-                <a:latin typeface="Consolas"/>
-              </a:rPr>
-              <a:t>[</a:t>
-            </a:r>
-            <a:r>
-              <a:rPr sz="1100">
-                <a:solidFill>
-                  <a:srgbClr val="F1F5F9"/>
-                </a:solidFill>
-                <a:latin typeface="Consolas"/>
-              </a:rPr>
-              <a:t>word</a:t>
-            </a:r>
-            <a:r>
-              <a:rPr sz="1100">
-                <a:solidFill>
-                  <a:srgbClr val="F1F5F9"/>
-                </a:solidFill>
-                <a:latin typeface="Consolas"/>
-              </a:rPr>
-              <a:t>];</a:t>
-            </a:r>
-          </a:p>
-          <a:p>
-            <a:pPr>
-              <a:spcAft>
-                <a:spcPts val="200"/>
-              </a:spcAft>
-            </a:pPr>
-            <a:r>
-              <a:rPr sz="1100">
-                <a:solidFill>
-                  <a:srgbClr val="F1F5F9"/>
-                </a:solidFill>
-                <a:latin typeface="Consolas"/>
-              </a:rPr>
-              <a:t>});</a:t>
-            </a:r>
-          </a:p>
-          <a:p>
-            <a:pPr>
-              <a:spcAft>
-                <a:spcPts val="200"/>
-              </a:spcAft>
-            </a:pPr>
-            <a:r>
-              <a:rPr sz="1100" b="1">
-                <a:solidFill>
-                  <a:srgbClr val="F472B6"/>
-                </a:solidFill>
-                <a:latin typeface="Consolas"/>
-              </a:rPr>
-              <a:t>if</a:t>
-            </a:r>
-            <a:r>
-              <a:rPr sz="1100">
-                <a:solidFill>
-                  <a:srgbClr val="F1F5F9"/>
-                </a:solidFill>
-                <a:latin typeface="Consolas"/>
-              </a:rPr>
-              <a:t> </a:t>
-            </a:r>
-            <a:r>
-              <a:rPr sz="1100">
-                <a:solidFill>
-                  <a:srgbClr val="F1F5F9"/>
-                </a:solidFill>
-                <a:latin typeface="Consolas"/>
-              </a:rPr>
-              <a:t>(</a:t>
-            </a:r>
-            <a:r>
-              <a:rPr sz="1100">
-                <a:solidFill>
-                  <a:srgbClr val="F1F5F9"/>
-                </a:solidFill>
-                <a:latin typeface="Consolas"/>
-              </a:rPr>
-              <a:t>mag1</a:t>
-            </a:r>
-            <a:r>
-              <a:rPr sz="1100">
-                <a:solidFill>
-                  <a:srgbClr val="F1F5F9"/>
-                </a:solidFill>
-                <a:latin typeface="Consolas"/>
-              </a:rPr>
-              <a:t> </a:t>
-            </a:r>
-            <a:r>
-              <a:rPr sz="1100">
-                <a:solidFill>
-                  <a:srgbClr val="F1F5F9"/>
-                </a:solidFill>
-                <a:latin typeface="Consolas"/>
-              </a:rPr>
-              <a:t>===</a:t>
-            </a:r>
-            <a:r>
-              <a:rPr sz="1100">
-                <a:solidFill>
-                  <a:srgbClr val="F1F5F9"/>
-                </a:solidFill>
-                <a:latin typeface="Consolas"/>
-              </a:rPr>
-              <a:t> </a:t>
-            </a:r>
-            <a:r>
-              <a:rPr sz="1100">
-                <a:solidFill>
-                  <a:srgbClr val="818CF8"/>
-                </a:solidFill>
-                <a:latin typeface="Consolas"/>
-              </a:rPr>
-              <a:t>0</a:t>
-            </a:r>
-            <a:r>
-              <a:rPr sz="1100">
-                <a:solidFill>
-                  <a:srgbClr val="F1F5F9"/>
-                </a:solidFill>
-                <a:latin typeface="Consolas"/>
-              </a:rPr>
-              <a:t> </a:t>
-            </a:r>
-            <a:r>
-              <a:rPr sz="1100">
-                <a:solidFill>
-                  <a:srgbClr val="F1F5F9"/>
-                </a:solidFill>
-                <a:latin typeface="Consolas"/>
-              </a:rPr>
-              <a:t>||</a:t>
-            </a:r>
-            <a:r>
-              <a:rPr sz="1100">
-                <a:solidFill>
-                  <a:srgbClr val="F1F5F9"/>
-                </a:solidFill>
-                <a:latin typeface="Consolas"/>
-              </a:rPr>
-              <a:t> </a:t>
-            </a:r>
-            <a:r>
-              <a:rPr sz="1100">
-                <a:solidFill>
-                  <a:srgbClr val="F1F5F9"/>
-                </a:solidFill>
-                <a:latin typeface="Consolas"/>
-              </a:rPr>
-              <a:t>mag2</a:t>
-            </a:r>
-            <a:r>
-              <a:rPr sz="1100">
-                <a:solidFill>
-                  <a:srgbClr val="F1F5F9"/>
-                </a:solidFill>
-                <a:latin typeface="Consolas"/>
-              </a:rPr>
-              <a:t> </a:t>
-            </a:r>
-            <a:r>
-              <a:rPr sz="1100">
-                <a:solidFill>
-                  <a:srgbClr val="F1F5F9"/>
-                </a:solidFill>
-                <a:latin typeface="Consolas"/>
-              </a:rPr>
-              <a:t>===</a:t>
-            </a:r>
-            <a:r>
-              <a:rPr sz="1100">
-                <a:solidFill>
-                  <a:srgbClr val="F1F5F9"/>
-                </a:solidFill>
-                <a:latin typeface="Consolas"/>
-              </a:rPr>
-              <a:t> </a:t>
-            </a:r>
-            <a:r>
-              <a:rPr sz="1100">
-                <a:solidFill>
-                  <a:srgbClr val="818CF8"/>
-                </a:solidFill>
-                <a:latin typeface="Consolas"/>
-              </a:rPr>
-              <a:t>0</a:t>
-            </a:r>
-            <a:r>
-              <a:rPr sz="1100">
-                <a:solidFill>
-                  <a:srgbClr val="F1F5F9"/>
-                </a:solidFill>
-                <a:latin typeface="Consolas"/>
-              </a:rPr>
-              <a:t>)</a:t>
-            </a:r>
-            <a:r>
-              <a:rPr sz="1100">
-                <a:solidFill>
-                  <a:srgbClr val="F1F5F9"/>
-                </a:solidFill>
-                <a:latin typeface="Consolas"/>
-              </a:rPr>
-              <a:t> </a:t>
-            </a:r>
-            <a:r>
-              <a:rPr sz="1100" b="1">
-                <a:solidFill>
-                  <a:srgbClr val="F472B6"/>
-                </a:solidFill>
-                <a:latin typeface="Consolas"/>
-              </a:rPr>
-              <a:t>return</a:t>
-            </a:r>
-            <a:r>
-              <a:rPr sz="1100">
-                <a:solidFill>
-                  <a:srgbClr val="F1F5F9"/>
-                </a:solidFill>
-                <a:latin typeface="Consolas"/>
-              </a:rPr>
-              <a:t> </a:t>
-            </a:r>
-            <a:r>
-              <a:rPr sz="1100">
-                <a:solidFill>
-                  <a:srgbClr val="818CF8"/>
-                </a:solidFill>
-                <a:latin typeface="Consolas"/>
-              </a:rPr>
-              <a:t>0</a:t>
-            </a:r>
-            <a:r>
-              <a:rPr sz="1100">
-                <a:solidFill>
-                  <a:srgbClr val="F1F5F9"/>
-                </a:solidFill>
-                <a:latin typeface="Consolas"/>
-              </a:rPr>
-              <a:t>;</a:t>
-            </a:r>
-          </a:p>
-          <a:p>
-            <a:pPr>
-              <a:spcAft>
-                <a:spcPts val="200"/>
-              </a:spcAft>
-            </a:pPr>
-            <a:r>
-              <a:rPr sz="1100" b="1">
-                <a:solidFill>
-                  <a:srgbClr val="F472B6"/>
-                </a:solidFill>
-                <a:latin typeface="Consolas"/>
-              </a:rPr>
-              <a:t>return</a:t>
-            </a:r>
-            <a:r>
-              <a:rPr sz="1100">
-                <a:solidFill>
-                  <a:srgbClr val="F1F5F9"/>
-                </a:solidFill>
-                <a:latin typeface="Consolas"/>
-              </a:rPr>
-              <a:t> </a:t>
-            </a:r>
-            <a:r>
-              <a:rPr sz="1100">
-                <a:solidFill>
-                  <a:srgbClr val="F1F5F9"/>
-                </a:solidFill>
-                <a:latin typeface="Consolas"/>
-              </a:rPr>
-              <a:t>(</a:t>
-            </a:r>
-            <a:r>
-              <a:rPr sz="1100">
-                <a:solidFill>
-                  <a:srgbClr val="F1F5F9"/>
-                </a:solidFill>
-                <a:latin typeface="Consolas"/>
-              </a:rPr>
-              <a:t>dotProduct</a:t>
-            </a:r>
-            <a:r>
-              <a:rPr sz="1100">
-                <a:solidFill>
-                  <a:srgbClr val="F1F5F9"/>
-                </a:solidFill>
-                <a:latin typeface="Consolas"/>
-              </a:rPr>
-              <a:t> </a:t>
-            </a:r>
-            <a:r>
-              <a:rPr sz="1100">
-                <a:solidFill>
-                  <a:srgbClr val="F1F5F9"/>
-                </a:solidFill>
-                <a:latin typeface="Consolas"/>
-              </a:rPr>
-              <a:t>/</a:t>
-            </a:r>
-            <a:r>
-              <a:rPr sz="1100">
-                <a:solidFill>
-                  <a:srgbClr val="F1F5F9"/>
-                </a:solidFill>
-                <a:latin typeface="Consolas"/>
-              </a:rPr>
-              <a:t> </a:t>
-            </a:r>
-            <a:r>
-              <a:rPr sz="1100">
-                <a:solidFill>
-                  <a:srgbClr val="F1F5F9"/>
-                </a:solidFill>
-                <a:latin typeface="Consolas"/>
-              </a:rPr>
-              <a:t>(</a:t>
-            </a:r>
-            <a:r>
-              <a:rPr sz="1100">
-                <a:solidFill>
-                  <a:srgbClr val="F1F5F9"/>
-                </a:solidFill>
-                <a:latin typeface="Consolas"/>
-              </a:rPr>
-              <a:t>Math</a:t>
-            </a:r>
-            <a:r>
-              <a:rPr sz="1100">
-                <a:solidFill>
-                  <a:srgbClr val="F1F5F9"/>
-                </a:solidFill>
-                <a:latin typeface="Consolas"/>
-              </a:rPr>
-              <a:t>.</a:t>
-            </a:r>
-            <a:r>
-              <a:rPr sz="1100">
-                <a:solidFill>
-                  <a:srgbClr val="F1F5F9"/>
-                </a:solidFill>
-                <a:latin typeface="Consolas"/>
-              </a:rPr>
-              <a:t>sqrt</a:t>
-            </a:r>
-            <a:r>
-              <a:rPr sz="1100">
-                <a:solidFill>
-                  <a:srgbClr val="F1F5F9"/>
-                </a:solidFill>
-                <a:latin typeface="Consolas"/>
-              </a:rPr>
-              <a:t>(</a:t>
-            </a:r>
-            <a:r>
-              <a:rPr sz="1100">
-                <a:solidFill>
-                  <a:srgbClr val="F1F5F9"/>
-                </a:solidFill>
-                <a:latin typeface="Consolas"/>
-              </a:rPr>
-              <a:t>mag1</a:t>
-            </a:r>
-            <a:r>
-              <a:rPr sz="1100">
-                <a:solidFill>
-                  <a:srgbClr val="F1F5F9"/>
-                </a:solidFill>
-                <a:latin typeface="Consolas"/>
-              </a:rPr>
-              <a:t>)</a:t>
-            </a:r>
-            <a:r>
-              <a:rPr sz="1100">
-                <a:solidFill>
-                  <a:srgbClr val="F1F5F9"/>
-                </a:solidFill>
-                <a:latin typeface="Consolas"/>
-              </a:rPr>
-              <a:t> </a:t>
-            </a:r>
-            <a:r>
-              <a:rPr sz="1100">
-                <a:solidFill>
-                  <a:srgbClr val="F1F5F9"/>
-                </a:solidFill>
-                <a:latin typeface="Consolas"/>
-              </a:rPr>
-              <a:t>*</a:t>
-            </a:r>
-            <a:r>
-              <a:rPr sz="1100">
-                <a:solidFill>
-                  <a:srgbClr val="F1F5F9"/>
-                </a:solidFill>
-                <a:latin typeface="Consolas"/>
-              </a:rPr>
-              <a:t> </a:t>
-            </a:r>
-            <a:r>
-              <a:rPr sz="1100">
-                <a:solidFill>
-                  <a:srgbClr val="F1F5F9"/>
-                </a:solidFill>
-                <a:latin typeface="Consolas"/>
-              </a:rPr>
-              <a:t>Math</a:t>
-            </a:r>
-            <a:r>
-              <a:rPr sz="1100">
-                <a:solidFill>
-                  <a:srgbClr val="F1F5F9"/>
-                </a:solidFill>
-                <a:latin typeface="Consolas"/>
-              </a:rPr>
-              <a:t>.</a:t>
-            </a:r>
-            <a:r>
-              <a:rPr sz="1100">
-                <a:solidFill>
-                  <a:srgbClr val="F1F5F9"/>
-                </a:solidFill>
-                <a:latin typeface="Consolas"/>
-              </a:rPr>
-              <a:t>sqrt</a:t>
-            </a:r>
-            <a:r>
-              <a:rPr sz="1100">
-                <a:solidFill>
-                  <a:srgbClr val="F1F5F9"/>
-                </a:solidFill>
-                <a:latin typeface="Consolas"/>
-              </a:rPr>
-              <a:t>(</a:t>
-            </a:r>
-            <a:r>
-              <a:rPr sz="1100">
-                <a:solidFill>
-                  <a:srgbClr val="F1F5F9"/>
-                </a:solidFill>
-                <a:latin typeface="Consolas"/>
-              </a:rPr>
-              <a:t>mag2</a:t>
-            </a:r>
-            <a:r>
-              <a:rPr sz="1100">
-                <a:solidFill>
-                  <a:srgbClr val="F1F5F9"/>
-                </a:solidFill>
-                <a:latin typeface="Consolas"/>
-              </a:rPr>
-              <a:t>)))</a:t>
-            </a:r>
-            <a:r>
-              <a:rPr sz="1100">
-                <a:solidFill>
-                  <a:srgbClr val="F1F5F9"/>
-                </a:solidFill>
-                <a:latin typeface="Consolas"/>
-              </a:rPr>
-              <a:t> </a:t>
-            </a:r>
-            <a:r>
-              <a:rPr sz="1100">
-                <a:solidFill>
-                  <a:srgbClr val="F1F5F9"/>
-                </a:solidFill>
-                <a:latin typeface="Consolas"/>
-              </a:rPr>
-              <a:t>*</a:t>
-            </a:r>
-            <a:r>
-              <a:rPr sz="1100">
-                <a:solidFill>
-                  <a:srgbClr val="F1F5F9"/>
-                </a:solidFill>
-                <a:latin typeface="Consolas"/>
-              </a:rPr>
-              <a:t> </a:t>
+              <a:t> (dotProduct / (Math.sqrt(mag1) * Math.sqrt(mag2))) * </a:t>
             </a:r>
             <a:r>
               <a:rPr sz="1100">
@@ -6880,7 +6065,7 @@
 </file>
 
 <file path=ppt/slides/slide22.xml><?xml version="1.0" encoding="utf-8"?>
-<p:sld xmlns:a="http://schemas.openxmlformats.org/drawingml/2006/main" xmlns:p="http://schemas.openxmlformats.org/presentationml/2006/main" xmlns:r="http://schemas.openxmlformats.org/officeDocument/2006/relationships">
+<p:sld xmlns:a="http://schemas.openxmlformats.org/drawingml/2006/main" xmlns:r="http://schemas.openxmlformats.org/officeDocument/2006/relationships" xmlns:p="http://schemas.openxmlformats.org/presentationml/2006/main">
   <p:cSld>
     <p:bg>
       <p:bgPr>
@@ -6896,7 +6081,14 @@
         <p:cNvGrpSpPr/>
         <p:nvPr/>
       </p:nvGrpSpPr>
-      <p:grpSpPr/>
+      <p:grpSpPr>
+        <a:xfrm>
+          <a:off x="0" y="0"/>
+          <a:ext cx="0" cy="0"/>
+          <a:chOff x="0" y="0"/>
+          <a:chExt cx="0" cy="0"/>
+        </a:xfrm>
+      </p:grpSpPr>
       <p:sp>
         <p:nvSpPr>
           <p:cNvPr id="2" name="TextBox 1"/>
@@ -7090,16 +6282,16 @@
           </a:fontRef>
         </p:style>
         <p:txBody>
-          <a:bodyPr rtlCol="0" anchor="ctr" wrap="square" lIns="137160" tIns="137160" rIns="137160" bIns="137160"/>
-          <a:lstStyle/>
-          <a:p>
-            <a:pPr algn="ctr">
+          <a:bodyPr wrap="square" lIns="137160" tIns="137160" rIns="137160" bIns="137160" rtlCol="0" anchor="ctr"/>
+          <a:lstStyle/>
+          <a:p>
+            <a:pPr>
               <a:spcAft>
                 <a:spcPts val="200"/>
               </a:spcAft>
             </a:pPr>
             <a:r>
-              <a:rPr sz="1050" b="1">
+              <a:rPr sz="1050" b="1" dirty="0">
                 <a:solidFill>
                   <a:srgbClr val="F472B6"/>
                 </a:solidFill>
@@ -7108,7 +6300,7 @@
               <a:t>function</a:t>
             </a:r>
             <a:r>
-              <a:rPr sz="1050">
+              <a:rPr sz="1050" dirty="0">
                 <a:solidFill>
                   <a:srgbClr val="F1F5F9"/>
                 </a:solidFill>
@@ -7117,7 +6309,7 @@
               <a:t> </a:t>
             </a:r>
             <a:r>
-              <a:rPr sz="1050">
+              <a:rPr sz="1050" dirty="0" err="1">
                 <a:solidFill>
                   <a:srgbClr val="F1F5F9"/>
                 </a:solidFill>
@@ -7126,34 +6318,163 @@
               <a:t>calculateJaccard</a:t>
             </a:r>
             <a:r>
-              <a:rPr sz="1050">
-                <a:solidFill>
-                  <a:srgbClr val="F1F5F9"/>
-                </a:solidFill>
-                <a:latin typeface="Consolas"/>
-              </a:rPr>
-              <a:t>(</a:t>
-            </a:r>
-            <a:r>
-              <a:rPr sz="1050">
-                <a:solidFill>
-                  <a:srgbClr val="F1F5F9"/>
-                </a:solidFill>
-                <a:latin typeface="Consolas"/>
-              </a:rPr>
-              <a:t>text1</a:t>
-            </a:r>
-            <a:r>
-              <a:rPr sz="1050">
-                <a:solidFill>
-                  <a:srgbClr val="F1F5F9"/>
-                </a:solidFill>
-                <a:latin typeface="Consolas"/>
-              </a:rPr>
-              <a:t>,</a:t>
-            </a:r>
-            <a:r>
-              <a:rPr sz="1050">
+              <a:rPr sz="1050" dirty="0">
+                <a:solidFill>
+                  <a:srgbClr val="F1F5F9"/>
+                </a:solidFill>
+                <a:latin typeface="Consolas"/>
+              </a:rPr>
+              <a:t>(text1, text2) {</a:t>
+            </a:r>
+          </a:p>
+          <a:p>
+            <a:pPr>
+              <a:spcAft>
+                <a:spcPts val="200"/>
+              </a:spcAft>
+            </a:pPr>
+            <a:r>
+              <a:rPr sz="1050" dirty="0">
+                <a:solidFill>
+                  <a:srgbClr val="F1F5F9"/>
+                </a:solidFill>
+                <a:latin typeface="Consolas"/>
+              </a:rPr>
+              <a:t>    </a:t>
+            </a:r>
+            <a:r>
+              <a:rPr sz="1050" b="1" dirty="0">
+                <a:solidFill>
+                  <a:srgbClr val="F472B6"/>
+                </a:solidFill>
+                <a:latin typeface="Consolas"/>
+              </a:rPr>
+              <a:t>const</a:t>
+            </a:r>
+            <a:r>
+              <a:rPr sz="1050" dirty="0">
+                <a:solidFill>
+                  <a:srgbClr val="F1F5F9"/>
+                </a:solidFill>
+                <a:latin typeface="Consolas"/>
+              </a:rPr>
+              <a:t> t1 = </a:t>
+            </a:r>
+            <a:r>
+              <a:rPr sz="1050" dirty="0" err="1">
+                <a:solidFill>
+                  <a:srgbClr val="F1F5F9"/>
+                </a:solidFill>
+                <a:latin typeface="Consolas"/>
+              </a:rPr>
+              <a:t>cleanText</a:t>
+            </a:r>
+            <a:r>
+              <a:rPr sz="1050" dirty="0">
+                <a:solidFill>
+                  <a:srgbClr val="F1F5F9"/>
+                </a:solidFill>
+                <a:latin typeface="Consolas"/>
+              </a:rPr>
+              <a:t>(text1);</a:t>
+            </a:r>
+          </a:p>
+          <a:p>
+            <a:pPr>
+              <a:spcAft>
+                <a:spcPts val="200"/>
+              </a:spcAft>
+            </a:pPr>
+            <a:r>
+              <a:rPr sz="1050" dirty="0">
+                <a:solidFill>
+                  <a:srgbClr val="F1F5F9"/>
+                </a:solidFill>
+                <a:latin typeface="Consolas"/>
+              </a:rPr>
+              <a:t>    </a:t>
+            </a:r>
+            <a:r>
+              <a:rPr sz="1050" b="1" dirty="0">
+                <a:solidFill>
+                  <a:srgbClr val="F472B6"/>
+                </a:solidFill>
+                <a:latin typeface="Consolas"/>
+              </a:rPr>
+              <a:t>const</a:t>
+            </a:r>
+            <a:r>
+              <a:rPr sz="1050" dirty="0">
+                <a:solidFill>
+                  <a:srgbClr val="F1F5F9"/>
+                </a:solidFill>
+                <a:latin typeface="Consolas"/>
+              </a:rPr>
+              <a:t> t2 = </a:t>
+            </a:r>
+            <a:r>
+              <a:rPr sz="1050" dirty="0" err="1">
+                <a:solidFill>
+                  <a:srgbClr val="F1F5F9"/>
+                </a:solidFill>
+                <a:latin typeface="Consolas"/>
+              </a:rPr>
+              <a:t>cleanText</a:t>
+            </a:r>
+            <a:r>
+              <a:rPr sz="1050" dirty="0">
+                <a:solidFill>
+                  <a:srgbClr val="F1F5F9"/>
+                </a:solidFill>
+                <a:latin typeface="Consolas"/>
+              </a:rPr>
+              <a:t>(text2);</a:t>
+            </a:r>
+          </a:p>
+          <a:p>
+            <a:pPr>
+              <a:spcAft>
+                <a:spcPts val="200"/>
+              </a:spcAft>
+            </a:pPr>
+            <a:r>
+              <a:rPr sz="1050" dirty="0">
+                <a:solidFill>
+                  <a:srgbClr val="F1F5F9"/>
+                </a:solidFill>
+                <a:latin typeface="Consolas"/>
+              </a:rPr>
+              <a:t>    </a:t>
+            </a:r>
+            <a:r>
+              <a:rPr sz="1050" b="1" dirty="0">
+                <a:solidFill>
+                  <a:srgbClr val="F472B6"/>
+                </a:solidFill>
+                <a:latin typeface="Consolas"/>
+              </a:rPr>
+              <a:t>if</a:t>
+            </a:r>
+            <a:r>
+              <a:rPr sz="1050" dirty="0">
+                <a:solidFill>
+                  <a:srgbClr val="F1F5F9"/>
+                </a:solidFill>
+                <a:latin typeface="Consolas"/>
+              </a:rPr>
+              <a:t> (!t1 || !t2) </a:t>
+            </a:r>
+            <a:r>
+              <a:rPr sz="1050" b="1" dirty="0">
+                <a:solidFill>
+                  <a:srgbClr val="F472B6"/>
+                </a:solidFill>
+                <a:latin typeface="Consolas"/>
+              </a:rPr>
+              <a:t>return</a:t>
+            </a:r>
+            <a:r>
+              <a:rPr sz="1050" dirty="0">
                 <a:solidFill>
                   <a:srgbClr val="F1F5F9"/>
                 </a:solidFill>
@@ -7162,25 +6483,344 @@
               <a:t> </a:t>
             </a:r>
             <a:r>
-              <a:rPr sz="1050">
-                <a:solidFill>
-                  <a:srgbClr val="F1F5F9"/>
-                </a:solidFill>
-                <a:latin typeface="Consolas"/>
-              </a:rPr>
-              <a:t>text2</a:t>
-            </a:r>
-            <a:r>
-              <a:rPr sz="1050">
-                <a:solidFill>
-                  <a:srgbClr val="F1F5F9"/>
-                </a:solidFill>
-                <a:latin typeface="Consolas"/>
-              </a:rPr>
-              <a:t>)</a:t>
-            </a:r>
-            <a:r>
-              <a:rPr sz="1050">
+              <a:rPr sz="1050" dirty="0">
+                <a:solidFill>
+                  <a:srgbClr val="818CF8"/>
+                </a:solidFill>
+                <a:latin typeface="Consolas"/>
+              </a:rPr>
+              <a:t>0</a:t>
+            </a:r>
+            <a:r>
+              <a:rPr sz="1050" dirty="0">
+                <a:solidFill>
+                  <a:srgbClr val="F1F5F9"/>
+                </a:solidFill>
+                <a:latin typeface="Consolas"/>
+              </a:rPr>
+              <a:t>;</a:t>
+            </a:r>
+          </a:p>
+          <a:p>
+            <a:pPr>
+              <a:spcAft>
+                <a:spcPts val="200"/>
+              </a:spcAft>
+            </a:pPr>
+            <a:r>
+              <a:rPr sz="1050" dirty="0">
+                <a:solidFill>
+                  <a:srgbClr val="F1F5F9"/>
+                </a:solidFill>
+                <a:latin typeface="Consolas"/>
+              </a:rPr>
+              <a:t>    </a:t>
+            </a:r>
+            <a:r>
+              <a:rPr sz="1050" b="1" dirty="0">
+                <a:solidFill>
+                  <a:srgbClr val="F472B6"/>
+                </a:solidFill>
+                <a:latin typeface="Consolas"/>
+              </a:rPr>
+              <a:t>const</a:t>
+            </a:r>
+            <a:r>
+              <a:rPr sz="1050" dirty="0">
+                <a:solidFill>
+                  <a:srgbClr val="F1F5F9"/>
+                </a:solidFill>
+                <a:latin typeface="Consolas"/>
+              </a:rPr>
+              <a:t> words1 = </a:t>
+            </a:r>
+            <a:r>
+              <a:rPr sz="1050" b="1" dirty="0">
+                <a:solidFill>
+                  <a:srgbClr val="F472B6"/>
+                </a:solidFill>
+                <a:latin typeface="Consolas"/>
+              </a:rPr>
+              <a:t>new</a:t>
+            </a:r>
+            <a:r>
+              <a:rPr sz="1050" dirty="0">
+                <a:solidFill>
+                  <a:srgbClr val="F1F5F9"/>
+                </a:solidFill>
+                <a:latin typeface="Consolas"/>
+              </a:rPr>
+              <a:t> Set(t1.split(/\s+/));</a:t>
+            </a:r>
+          </a:p>
+          <a:p>
+            <a:pPr>
+              <a:spcAft>
+                <a:spcPts val="200"/>
+              </a:spcAft>
+            </a:pPr>
+            <a:r>
+              <a:rPr sz="1050" dirty="0">
+                <a:solidFill>
+                  <a:srgbClr val="F1F5F9"/>
+                </a:solidFill>
+                <a:latin typeface="Consolas"/>
+              </a:rPr>
+              <a:t>    </a:t>
+            </a:r>
+            <a:r>
+              <a:rPr sz="1050" b="1" dirty="0">
+                <a:solidFill>
+                  <a:srgbClr val="F472B6"/>
+                </a:solidFill>
+                <a:latin typeface="Consolas"/>
+              </a:rPr>
+              <a:t>const</a:t>
+            </a:r>
+            <a:r>
+              <a:rPr sz="1050" dirty="0">
+                <a:solidFill>
+                  <a:srgbClr val="F1F5F9"/>
+                </a:solidFill>
+                <a:latin typeface="Consolas"/>
+              </a:rPr>
+              <a:t> words2 = </a:t>
+            </a:r>
+            <a:r>
+              <a:rPr sz="1050" b="1" dirty="0">
+                <a:solidFill>
+                  <a:srgbClr val="F472B6"/>
+                </a:solidFill>
+                <a:latin typeface="Consolas"/>
+              </a:rPr>
+              <a:t>new</a:t>
+            </a:r>
+            <a:r>
+              <a:rPr sz="1050" dirty="0">
+                <a:solidFill>
+                  <a:srgbClr val="F1F5F9"/>
+                </a:solidFill>
+                <a:latin typeface="Consolas"/>
+              </a:rPr>
+              <a:t> Set(t2.split(/\s+/));</a:t>
+            </a:r>
+          </a:p>
+          <a:p>
+            <a:pPr>
+              <a:spcAft>
+                <a:spcPts val="200"/>
+              </a:spcAft>
+            </a:pPr>
+            <a:r>
+              <a:rPr sz="1050" dirty="0">
+                <a:solidFill>
+                  <a:srgbClr val="F1F5F9"/>
+                </a:solidFill>
+                <a:latin typeface="Consolas"/>
+              </a:rPr>
+              <a:t>    </a:t>
+            </a:r>
+            <a:r>
+              <a:rPr sz="1050" b="1" dirty="0">
+                <a:solidFill>
+                  <a:srgbClr val="F472B6"/>
+                </a:solidFill>
+                <a:latin typeface="Consolas"/>
+              </a:rPr>
+              <a:t>const</a:t>
+            </a:r>
+            <a:r>
+              <a:rPr sz="1050" dirty="0">
+                <a:solidFill>
+                  <a:srgbClr val="F1F5F9"/>
+                </a:solidFill>
+                <a:latin typeface="Consolas"/>
+              </a:rPr>
+              <a:t> intersection = </a:t>
+            </a:r>
+            <a:r>
+              <a:rPr sz="1050" b="1" dirty="0">
+                <a:solidFill>
+                  <a:srgbClr val="F472B6"/>
+                </a:solidFill>
+                <a:latin typeface="Consolas"/>
+              </a:rPr>
+              <a:t>new</a:t>
+            </a:r>
+            <a:r>
+              <a:rPr sz="1050" dirty="0">
+                <a:solidFill>
+                  <a:srgbClr val="F1F5F9"/>
+                </a:solidFill>
+                <a:latin typeface="Consolas"/>
+              </a:rPr>
+              <a:t> Set(</a:t>
+            </a:r>
+          </a:p>
+          <a:p>
+            <a:pPr>
+              <a:spcAft>
+                <a:spcPts val="200"/>
+              </a:spcAft>
+            </a:pPr>
+            <a:r>
+              <a:rPr sz="1050" dirty="0">
+                <a:solidFill>
+                  <a:srgbClr val="F1F5F9"/>
+                </a:solidFill>
+                <a:latin typeface="Consolas"/>
+              </a:rPr>
+              <a:t>        [...words1].filter(x =&gt; words2.has(x))</a:t>
+            </a:r>
+          </a:p>
+          <a:p>
+            <a:pPr>
+              <a:spcAft>
+                <a:spcPts val="200"/>
+              </a:spcAft>
+            </a:pPr>
+            <a:r>
+              <a:rPr sz="1050" dirty="0">
+                <a:solidFill>
+                  <a:srgbClr val="F1F5F9"/>
+                </a:solidFill>
+                <a:latin typeface="Consolas"/>
+              </a:rPr>
+              <a:t>    );</a:t>
+            </a:r>
+          </a:p>
+          <a:p>
+            <a:pPr>
+              <a:spcAft>
+                <a:spcPts val="200"/>
+              </a:spcAft>
+            </a:pPr>
+            <a:r>
+              <a:rPr sz="1050" dirty="0">
+                <a:solidFill>
+                  <a:srgbClr val="F1F5F9"/>
+                </a:solidFill>
+                <a:latin typeface="Consolas"/>
+              </a:rPr>
+              <a:t>    </a:t>
+            </a:r>
+            <a:r>
+              <a:rPr sz="1050" b="1" dirty="0">
+                <a:solidFill>
+                  <a:srgbClr val="F472B6"/>
+                </a:solidFill>
+                <a:latin typeface="Consolas"/>
+              </a:rPr>
+              <a:t>const</a:t>
+            </a:r>
+            <a:r>
+              <a:rPr sz="1050" dirty="0">
+                <a:solidFill>
+                  <a:srgbClr val="F1F5F9"/>
+                </a:solidFill>
+                <a:latin typeface="Consolas"/>
+              </a:rPr>
+              <a:t> union = </a:t>
+            </a:r>
+            <a:r>
+              <a:rPr sz="1050" b="1" dirty="0">
+                <a:solidFill>
+                  <a:srgbClr val="F472B6"/>
+                </a:solidFill>
+                <a:latin typeface="Consolas"/>
+              </a:rPr>
+              <a:t>new</a:t>
+            </a:r>
+            <a:r>
+              <a:rPr sz="1050" dirty="0">
+                <a:solidFill>
+                  <a:srgbClr val="F1F5F9"/>
+                </a:solidFill>
+                <a:latin typeface="Consolas"/>
+              </a:rPr>
+              <a:t> Set([...words1, ...words2]);</a:t>
+            </a:r>
+          </a:p>
+          <a:p>
+            <a:pPr>
+              <a:spcAft>
+                <a:spcPts val="200"/>
+              </a:spcAft>
+            </a:pPr>
+            <a:r>
+              <a:rPr sz="1050" dirty="0">
+                <a:solidFill>
+                  <a:srgbClr val="F1F5F9"/>
+                </a:solidFill>
+                <a:latin typeface="Consolas"/>
+              </a:rPr>
+              <a:t>    </a:t>
+            </a:r>
+            <a:r>
+              <a:rPr sz="1050" b="1" dirty="0">
+                <a:solidFill>
+                  <a:srgbClr val="F472B6"/>
+                </a:solidFill>
+                <a:latin typeface="Consolas"/>
+              </a:rPr>
+              <a:t>if</a:t>
+            </a:r>
+            <a:r>
+              <a:rPr sz="1050" dirty="0">
+                <a:solidFill>
+                  <a:srgbClr val="F1F5F9"/>
+                </a:solidFill>
+                <a:latin typeface="Consolas"/>
+              </a:rPr>
+              <a:t> (</a:t>
+            </a:r>
+            <a:r>
+              <a:rPr sz="1050" dirty="0" err="1">
+                <a:solidFill>
+                  <a:srgbClr val="F1F5F9"/>
+                </a:solidFill>
+                <a:latin typeface="Consolas"/>
+              </a:rPr>
+              <a:t>union.size</a:t>
+            </a:r>
+            <a:r>
+              <a:rPr sz="1050" dirty="0">
+                <a:solidFill>
+                  <a:srgbClr val="F1F5F9"/>
+                </a:solidFill>
+                <a:latin typeface="Consolas"/>
+              </a:rPr>
+              <a:t> === </a:t>
+            </a:r>
+            <a:r>
+              <a:rPr sz="1050" dirty="0">
+                <a:solidFill>
+                  <a:srgbClr val="818CF8"/>
+                </a:solidFill>
+                <a:latin typeface="Consolas"/>
+              </a:rPr>
+              <a:t>0</a:t>
+            </a:r>
+            <a:r>
+              <a:rPr sz="1050" dirty="0">
+                <a:solidFill>
+                  <a:srgbClr val="F1F5F9"/>
+                </a:solidFill>
+                <a:latin typeface="Consolas"/>
+              </a:rPr>
+              <a:t>) </a:t>
+            </a:r>
+            <a:r>
+              <a:rPr sz="1050" b="1" dirty="0">
+                <a:solidFill>
+                  <a:srgbClr val="F472B6"/>
+                </a:solidFill>
+                <a:latin typeface="Consolas"/>
+              </a:rPr>
+              <a:t>return</a:t>
+            </a:r>
+            <a:r>
+              <a:rPr sz="1050" dirty="0">
                 <a:solidFill>
                   <a:srgbClr val="F1F5F9"/>
                 </a:solidFill>
@@ -7189,13 +6829,22 @@
               <a:t> </a:t>
             </a:r>
             <a:r>
-              <a:rPr sz="1050">
-                <a:solidFill>
-                  <a:srgbClr val="F1F5F9"/>
-                </a:solidFill>
-                <a:latin typeface="Consolas"/>
-              </a:rPr>
-              <a:t>{</a:t>
+              <a:rPr sz="1050" dirty="0">
+                <a:solidFill>
+                  <a:srgbClr val="818CF8"/>
+                </a:solidFill>
+                <a:latin typeface="Consolas"/>
+              </a:rPr>
+              <a:t>0</a:t>
+            </a:r>
+            <a:r>
+              <a:rPr sz="1050" dirty="0">
+                <a:solidFill>
+                  <a:srgbClr val="F1F5F9"/>
+                </a:solidFill>
+                <a:latin typeface="Consolas"/>
+              </a:rPr>
+              <a:t>;</a:t>
             </a:r>
           </a:p>
           <a:p>
@@ -7205,7 +6854,7 @@
               </a:spcAft>
             </a:pPr>
             <a:r>
-              <a:rPr sz="1050">
+              <a:rPr sz="1050" dirty="0">
                 <a:solidFill>
                   <a:srgbClr val="F1F5F9"/>
                 </a:solidFill>
@@ -7214,94 +6863,76 @@
               <a:t>    </a:t>
             </a:r>
             <a:r>
-              <a:rPr sz="1050" b="1">
+              <a:rPr sz="1050" b="1" dirty="0">
                 <a:solidFill>
                   <a:srgbClr val="F472B6"/>
                 </a:solidFill>
                 <a:latin typeface="Consolas"/>
               </a:rPr>
-              <a:t>const</a:t>
-            </a:r>
-            <a:r>
-              <a:rPr sz="1050">
-                <a:solidFill>
-                  <a:srgbClr val="F1F5F9"/>
-                </a:solidFill>
-                <a:latin typeface="Consolas"/>
-              </a:rPr>
-              <a:t> </a:t>
-            </a:r>
-            <a:r>
-              <a:rPr sz="1050">
-                <a:solidFill>
-                  <a:srgbClr val="F1F5F9"/>
-                </a:solidFill>
-                <a:latin typeface="Consolas"/>
-              </a:rPr>
-              <a:t>t1</a:t>
-            </a:r>
-            <a:r>
-              <a:rPr sz="1050">
-                <a:solidFill>
-                  <a:srgbClr val="F1F5F9"/>
-                </a:solidFill>
-                <a:latin typeface="Consolas"/>
-              </a:rPr>
-              <a:t> </a:t>
-            </a:r>
-            <a:r>
-              <a:rPr sz="1050">
-                <a:solidFill>
-                  <a:srgbClr val="F1F5F9"/>
-                </a:solidFill>
-                <a:latin typeface="Consolas"/>
-              </a:rPr>
-              <a:t>=</a:t>
-            </a:r>
-            <a:r>
-              <a:rPr sz="1050">
-                <a:solidFill>
-                  <a:srgbClr val="F1F5F9"/>
-                </a:solidFill>
-                <a:latin typeface="Consolas"/>
-              </a:rPr>
-              <a:t> </a:t>
-            </a:r>
-            <a:r>
-              <a:rPr sz="1050">
-                <a:solidFill>
-                  <a:srgbClr val="F1F5F9"/>
-                </a:solidFill>
-                <a:latin typeface="Consolas"/>
-              </a:rPr>
-              <a:t>cleanText</a:t>
-            </a:r>
-            <a:r>
-              <a:rPr sz="1050">
-                <a:solidFill>
-                  <a:srgbClr val="F1F5F9"/>
-                </a:solidFill>
-                <a:latin typeface="Consolas"/>
-              </a:rPr>
-              <a:t>(</a:t>
-            </a:r>
-            <a:r>
-              <a:rPr sz="1050">
-                <a:solidFill>
-                  <a:srgbClr val="F1F5F9"/>
-                </a:solidFill>
-                <a:latin typeface="Consolas"/>
-              </a:rPr>
-              <a:t>text1</a:t>
-            </a:r>
-            <a:r>
-              <a:rPr sz="1050">
-                <a:solidFill>
-                  <a:srgbClr val="F1F5F9"/>
-                </a:solidFill>
-                <a:latin typeface="Consolas"/>
-              </a:rPr>
-              <a:t>);</a:t>
+              <a:t>return</a:t>
+            </a:r>
+            <a:r>
+              <a:rPr sz="1050" dirty="0">
+                <a:solidFill>
+                  <a:srgbClr val="F1F5F9"/>
+                </a:solidFill>
+                <a:latin typeface="Consolas"/>
+              </a:rPr>
+              <a:t> (</a:t>
+            </a:r>
+            <a:r>
+              <a:rPr sz="1050" dirty="0" err="1">
+                <a:solidFill>
+                  <a:srgbClr val="F1F5F9"/>
+                </a:solidFill>
+                <a:latin typeface="Consolas"/>
+              </a:rPr>
+              <a:t>intersection.size</a:t>
+            </a:r>
+            <a:r>
+              <a:rPr sz="1050" dirty="0">
+                <a:solidFill>
+                  <a:srgbClr val="F1F5F9"/>
+                </a:solidFill>
+                <a:latin typeface="Consolas"/>
+              </a:rPr>
+              <a:t> / </a:t>
+            </a:r>
+            <a:r>
+              <a:rPr sz="1050" dirty="0" err="1">
+                <a:solidFill>
+                  <a:srgbClr val="F1F5F9"/>
+                </a:solidFill>
+                <a:latin typeface="Consolas"/>
+              </a:rPr>
+              <a:t>union.size</a:t>
+            </a:r>
+            <a:r>
+              <a:rPr sz="1050" dirty="0">
+                <a:solidFill>
+                  <a:srgbClr val="F1F5F9"/>
+                </a:solidFill>
+                <a:latin typeface="Consolas"/>
+              </a:rPr>
+              <a:t>) * </a:t>
+            </a:r>
+            <a:r>
+              <a:rPr sz="1050" dirty="0">
+                <a:solidFill>
+                  <a:srgbClr val="818CF8"/>
+                </a:solidFill>
+                <a:latin typeface="Consolas"/>
+              </a:rPr>
+              <a:t>100</a:t>
+            </a:r>
+            <a:r>
+              <a:rPr sz="1050" dirty="0">
+                <a:solidFill>
+                  <a:srgbClr val="F1F5F9"/>
+                </a:solidFill>
+                <a:latin typeface="Consolas"/>
+              </a:rPr>
+              <a:t>;</a:t>
             </a:r>
           </a:p>
           <a:p>
@@ -7311,1364 +6942,7 @@
               </a:spcAft>
             </a:pPr>
             <a:r>
-              <a:rPr sz="1050">
-                <a:solidFill>
-                  <a:srgbClr val="F1F5F9"/>
-                </a:solidFill>
-                <a:latin typeface="Consolas"/>
-              </a:rPr>
-              <a:t>    </a:t>
-            </a:r>
-            <a:r>
-              <a:rPr sz="1050" b="1">
-                <a:solidFill>
-                  <a:srgbClr val="F472B6"/>
-                </a:solidFill>
-                <a:latin typeface="Consolas"/>
-              </a:rPr>
-              <a:t>const</a:t>
-            </a:r>
-            <a:r>
-              <a:rPr sz="1050">
-                <a:solidFill>
-                  <a:srgbClr val="F1F5F9"/>
-                </a:solidFill>
-                <a:latin typeface="Consolas"/>
-              </a:rPr>
-              <a:t> </a:t>
-            </a:r>
-            <a:r>
-              <a:rPr sz="1050">
-                <a:solidFill>
-                  <a:srgbClr val="F1F5F9"/>
-                </a:solidFill>
-                <a:latin typeface="Consolas"/>
-              </a:rPr>
-              <a:t>t2</a:t>
-            </a:r>
-            <a:r>
-              <a:rPr sz="1050">
-                <a:solidFill>
-                  <a:srgbClr val="F1F5F9"/>
-                </a:solidFill>
-                <a:latin typeface="Consolas"/>
-              </a:rPr>
-              <a:t> </a:t>
-            </a:r>
-            <a:r>
-              <a:rPr sz="1050">
-                <a:solidFill>
-                  <a:srgbClr val="F1F5F9"/>
-                </a:solidFill>
-                <a:latin typeface="Consolas"/>
-              </a:rPr>
-              <a:t>=</a:t>
-            </a:r>
-            <a:r>
-              <a:rPr sz="1050">
-                <a:solidFill>
-                  <a:srgbClr val="F1F5F9"/>
-                </a:solidFill>
-                <a:latin typeface="Consolas"/>
-              </a:rPr>
-              <a:t> </a:t>
-            </a:r>
-            <a:r>
-              <a:rPr sz="1050">
-                <a:solidFill>
-                  <a:srgbClr val="F1F5F9"/>
-                </a:solidFill>
-                <a:latin typeface="Consolas"/>
-              </a:rPr>
-              <a:t>cleanText</a:t>
-            </a:r>
-            <a:r>
-              <a:rPr sz="1050">
-                <a:solidFill>
-                  <a:srgbClr val="F1F5F9"/>
-                </a:solidFill>
-                <a:latin typeface="Consolas"/>
-              </a:rPr>
-              <a:t>(</a:t>
-            </a:r>
-            <a:r>
-              <a:rPr sz="1050">
-                <a:solidFill>
-                  <a:srgbClr val="F1F5F9"/>
-                </a:solidFill>
-                <a:latin typeface="Consolas"/>
-              </a:rPr>
-              <a:t>text2</a:t>
-            </a:r>
-            <a:r>
-              <a:rPr sz="1050">
-                <a:solidFill>
-                  <a:srgbClr val="F1F5F9"/>
-                </a:solidFill>
-                <a:latin typeface="Consolas"/>
-              </a:rPr>
-              <a:t>);</a:t>
-            </a:r>
-          </a:p>
-          <a:p>
-            <a:pPr>
-              <a:spcAft>
-                <a:spcPts val="200"/>
-              </a:spcAft>
-            </a:pPr>
-            <a:r>
-              <a:rPr sz="1050">
-                <a:solidFill>
-                  <a:srgbClr val="F1F5F9"/>
-                </a:solidFill>
-                <a:latin typeface="Consolas"/>
-              </a:rPr>
-              <a:t>    </a:t>
-            </a:r>
-            <a:r>
-              <a:rPr sz="1050" b="1">
-                <a:solidFill>
-                  <a:srgbClr val="F472B6"/>
-                </a:solidFill>
-                <a:latin typeface="Consolas"/>
-              </a:rPr>
-              <a:t>if</a:t>
-            </a:r>
-            <a:r>
-              <a:rPr sz="1050">
-                <a:solidFill>
-                  <a:srgbClr val="F1F5F9"/>
-                </a:solidFill>
-                <a:latin typeface="Consolas"/>
-              </a:rPr>
-              <a:t> </a:t>
-            </a:r>
-            <a:r>
-              <a:rPr sz="1050">
-                <a:solidFill>
-                  <a:srgbClr val="F1F5F9"/>
-                </a:solidFill>
-                <a:latin typeface="Consolas"/>
-              </a:rPr>
-              <a:t>(!</a:t>
-            </a:r>
-            <a:r>
-              <a:rPr sz="1050">
-                <a:solidFill>
-                  <a:srgbClr val="F1F5F9"/>
-                </a:solidFill>
-                <a:latin typeface="Consolas"/>
-              </a:rPr>
-              <a:t>t1</a:t>
-            </a:r>
-            <a:r>
-              <a:rPr sz="1050">
-                <a:solidFill>
-                  <a:srgbClr val="F1F5F9"/>
-                </a:solidFill>
-                <a:latin typeface="Consolas"/>
-              </a:rPr>
-              <a:t> </a:t>
-            </a:r>
-            <a:r>
-              <a:rPr sz="1050">
-                <a:solidFill>
-                  <a:srgbClr val="F1F5F9"/>
-                </a:solidFill>
-                <a:latin typeface="Consolas"/>
-              </a:rPr>
-              <a:t>||</a:t>
-            </a:r>
-            <a:r>
-              <a:rPr sz="1050">
-                <a:solidFill>
-                  <a:srgbClr val="F1F5F9"/>
-                </a:solidFill>
-                <a:latin typeface="Consolas"/>
-              </a:rPr>
-              <a:t> </a:t>
-            </a:r>
-            <a:r>
-              <a:rPr sz="1050">
-                <a:solidFill>
-                  <a:srgbClr val="F1F5F9"/>
-                </a:solidFill>
-                <a:latin typeface="Consolas"/>
-              </a:rPr>
-              <a:t>!</a:t>
-            </a:r>
-            <a:r>
-              <a:rPr sz="1050">
-                <a:solidFill>
-                  <a:srgbClr val="F1F5F9"/>
-                </a:solidFill>
-                <a:latin typeface="Consolas"/>
-              </a:rPr>
-              <a:t>t2</a:t>
-            </a:r>
-            <a:r>
-              <a:rPr sz="1050">
-                <a:solidFill>
-                  <a:srgbClr val="F1F5F9"/>
-                </a:solidFill>
-                <a:latin typeface="Consolas"/>
-              </a:rPr>
-              <a:t>)</a:t>
-            </a:r>
-            <a:r>
-              <a:rPr sz="1050">
-                <a:solidFill>
-                  <a:srgbClr val="F1F5F9"/>
-                </a:solidFill>
-                <a:latin typeface="Consolas"/>
-              </a:rPr>
-              <a:t> </a:t>
-            </a:r>
-            <a:r>
-              <a:rPr sz="1050" b="1">
-                <a:solidFill>
-                  <a:srgbClr val="F472B6"/>
-                </a:solidFill>
-                <a:latin typeface="Consolas"/>
-              </a:rPr>
-              <a:t>return</a:t>
-            </a:r>
-            <a:r>
-              <a:rPr sz="1050">
-                <a:solidFill>
-                  <a:srgbClr val="F1F5F9"/>
-                </a:solidFill>
-                <a:latin typeface="Consolas"/>
-              </a:rPr>
-              <a:t> </a:t>
-            </a:r>
-            <a:r>
-              <a:rPr sz="1050">
-                <a:solidFill>
-                  <a:srgbClr val="818CF8"/>
-                </a:solidFill>
-                <a:latin typeface="Consolas"/>
-              </a:rPr>
-              <a:t>0</a:t>
-            </a:r>
-            <a:r>
-              <a:rPr sz="1050">
-                <a:solidFill>
-                  <a:srgbClr val="F1F5F9"/>
-                </a:solidFill>
-                <a:latin typeface="Consolas"/>
-              </a:rPr>
-              <a:t>;</a:t>
-            </a:r>
-          </a:p>
-          <a:p>
-            <a:pPr>
-              <a:spcAft>
-                <a:spcPts val="200"/>
-              </a:spcAft>
-            </a:pPr>
-            <a:r>
-              <a:rPr sz="1050">
-                <a:solidFill>
-                  <a:srgbClr val="F1F5F9"/>
-                </a:solidFill>
-                <a:latin typeface="Consolas"/>
-              </a:rPr>
-              <a:t>    </a:t>
-            </a:r>
-            <a:r>
-              <a:rPr sz="1050" b="1">
-                <a:solidFill>
-                  <a:srgbClr val="F472B6"/>
-                </a:solidFill>
-                <a:latin typeface="Consolas"/>
-              </a:rPr>
-              <a:t>const</a:t>
-            </a:r>
-            <a:r>
-              <a:rPr sz="1050">
-                <a:solidFill>
-                  <a:srgbClr val="F1F5F9"/>
-                </a:solidFill>
-                <a:latin typeface="Consolas"/>
-              </a:rPr>
-              <a:t> </a:t>
-            </a:r>
-            <a:r>
-              <a:rPr sz="1050">
-                <a:solidFill>
-                  <a:srgbClr val="F1F5F9"/>
-                </a:solidFill>
-                <a:latin typeface="Consolas"/>
-              </a:rPr>
-              <a:t>words1</a:t>
-            </a:r>
-            <a:r>
-              <a:rPr sz="1050">
-                <a:solidFill>
-                  <a:srgbClr val="F1F5F9"/>
-                </a:solidFill>
-                <a:latin typeface="Consolas"/>
-              </a:rPr>
-              <a:t> </a:t>
-            </a:r>
-            <a:r>
-              <a:rPr sz="1050">
-                <a:solidFill>
-                  <a:srgbClr val="F1F5F9"/>
-                </a:solidFill>
-                <a:latin typeface="Consolas"/>
-              </a:rPr>
-              <a:t>=</a:t>
-            </a:r>
-            <a:r>
-              <a:rPr sz="1050">
-                <a:solidFill>
-                  <a:srgbClr val="F1F5F9"/>
-                </a:solidFill>
-                <a:latin typeface="Consolas"/>
-              </a:rPr>
-              <a:t> </a:t>
-            </a:r>
-            <a:r>
-              <a:rPr sz="1050" b="1">
-                <a:solidFill>
-                  <a:srgbClr val="F472B6"/>
-                </a:solidFill>
-                <a:latin typeface="Consolas"/>
-              </a:rPr>
-              <a:t>new</a:t>
-            </a:r>
-            <a:r>
-              <a:rPr sz="1050">
-                <a:solidFill>
-                  <a:srgbClr val="F1F5F9"/>
-                </a:solidFill>
-                <a:latin typeface="Consolas"/>
-              </a:rPr>
-              <a:t> </a:t>
-            </a:r>
-            <a:r>
-              <a:rPr sz="1050">
-                <a:solidFill>
-                  <a:srgbClr val="F1F5F9"/>
-                </a:solidFill>
-                <a:latin typeface="Consolas"/>
-              </a:rPr>
-              <a:t>Set</a:t>
-            </a:r>
-            <a:r>
-              <a:rPr sz="1050">
-                <a:solidFill>
-                  <a:srgbClr val="F1F5F9"/>
-                </a:solidFill>
-                <a:latin typeface="Consolas"/>
-              </a:rPr>
-              <a:t>(</a:t>
-            </a:r>
-            <a:r>
-              <a:rPr sz="1050">
-                <a:solidFill>
-                  <a:srgbClr val="F1F5F9"/>
-                </a:solidFill>
-                <a:latin typeface="Consolas"/>
-              </a:rPr>
-              <a:t>t1</a:t>
-            </a:r>
-            <a:r>
-              <a:rPr sz="1050">
-                <a:solidFill>
-                  <a:srgbClr val="F1F5F9"/>
-                </a:solidFill>
-                <a:latin typeface="Consolas"/>
-              </a:rPr>
-              <a:t>.</a:t>
-            </a:r>
-            <a:r>
-              <a:rPr sz="1050">
-                <a:solidFill>
-                  <a:srgbClr val="F1F5F9"/>
-                </a:solidFill>
-                <a:latin typeface="Consolas"/>
-              </a:rPr>
-              <a:t>split</a:t>
-            </a:r>
-            <a:r>
-              <a:rPr sz="1050">
-                <a:solidFill>
-                  <a:srgbClr val="F1F5F9"/>
-                </a:solidFill>
-                <a:latin typeface="Consolas"/>
-              </a:rPr>
-              <a:t>(/\</a:t>
-            </a:r>
-            <a:r>
-              <a:rPr sz="1050">
-                <a:solidFill>
-                  <a:srgbClr val="F1F5F9"/>
-                </a:solidFill>
-                <a:latin typeface="Consolas"/>
-              </a:rPr>
-              <a:t>s</a:t>
-            </a:r>
-            <a:r>
-              <a:rPr sz="1050">
-                <a:solidFill>
-                  <a:srgbClr val="F1F5F9"/>
-                </a:solidFill>
-                <a:latin typeface="Consolas"/>
-              </a:rPr>
-              <a:t>+/));</a:t>
-            </a:r>
-          </a:p>
-          <a:p>
-            <a:pPr>
-              <a:spcAft>
-                <a:spcPts val="200"/>
-              </a:spcAft>
-            </a:pPr>
-            <a:r>
-              <a:rPr sz="1050">
-                <a:solidFill>
-                  <a:srgbClr val="F1F5F9"/>
-                </a:solidFill>
-                <a:latin typeface="Consolas"/>
-              </a:rPr>
-              <a:t>    </a:t>
-            </a:r>
-            <a:r>
-              <a:rPr sz="1050" b="1">
-                <a:solidFill>
-                  <a:srgbClr val="F472B6"/>
-                </a:solidFill>
-                <a:latin typeface="Consolas"/>
-              </a:rPr>
-              <a:t>const</a:t>
-            </a:r>
-            <a:r>
-              <a:rPr sz="1050">
-                <a:solidFill>
-                  <a:srgbClr val="F1F5F9"/>
-                </a:solidFill>
-                <a:latin typeface="Consolas"/>
-              </a:rPr>
-              <a:t> </a:t>
-            </a:r>
-            <a:r>
-              <a:rPr sz="1050">
-                <a:solidFill>
-                  <a:srgbClr val="F1F5F9"/>
-                </a:solidFill>
-                <a:latin typeface="Consolas"/>
-              </a:rPr>
-              <a:t>words2</a:t>
-            </a:r>
-            <a:r>
-              <a:rPr sz="1050">
-                <a:solidFill>
-                  <a:srgbClr val="F1F5F9"/>
-                </a:solidFill>
-                <a:latin typeface="Consolas"/>
-              </a:rPr>
-              <a:t> </a:t>
-            </a:r>
-            <a:r>
-              <a:rPr sz="1050">
-                <a:solidFill>
-                  <a:srgbClr val="F1F5F9"/>
-                </a:solidFill>
-                <a:latin typeface="Consolas"/>
-              </a:rPr>
-              <a:t>=</a:t>
-            </a:r>
-            <a:r>
-              <a:rPr sz="1050">
-                <a:solidFill>
-                  <a:srgbClr val="F1F5F9"/>
-                </a:solidFill>
-                <a:latin typeface="Consolas"/>
-              </a:rPr>
-              <a:t> </a:t>
-            </a:r>
-            <a:r>
-              <a:rPr sz="1050" b="1">
-                <a:solidFill>
-                  <a:srgbClr val="F472B6"/>
-                </a:solidFill>
-                <a:latin typeface="Consolas"/>
-              </a:rPr>
-              <a:t>new</a:t>
-            </a:r>
-            <a:r>
-              <a:rPr sz="1050">
-                <a:solidFill>
-                  <a:srgbClr val="F1F5F9"/>
-                </a:solidFill>
-                <a:latin typeface="Consolas"/>
-              </a:rPr>
-              <a:t> </a:t>
-            </a:r>
-            <a:r>
-              <a:rPr sz="1050">
-                <a:solidFill>
-                  <a:srgbClr val="F1F5F9"/>
-                </a:solidFill>
-                <a:latin typeface="Consolas"/>
-              </a:rPr>
-              <a:t>Set</a:t>
-            </a:r>
-            <a:r>
-              <a:rPr sz="1050">
-                <a:solidFill>
-                  <a:srgbClr val="F1F5F9"/>
-                </a:solidFill>
-                <a:latin typeface="Consolas"/>
-              </a:rPr>
-              <a:t>(</a:t>
-            </a:r>
-            <a:r>
-              <a:rPr sz="1050">
-                <a:solidFill>
-                  <a:srgbClr val="F1F5F9"/>
-                </a:solidFill>
-                <a:latin typeface="Consolas"/>
-              </a:rPr>
-              <a:t>t2</a:t>
-            </a:r>
-            <a:r>
-              <a:rPr sz="1050">
-                <a:solidFill>
-                  <a:srgbClr val="F1F5F9"/>
-                </a:solidFill>
-                <a:latin typeface="Consolas"/>
-              </a:rPr>
-              <a:t>.</a:t>
-            </a:r>
-            <a:r>
-              <a:rPr sz="1050">
-                <a:solidFill>
-                  <a:srgbClr val="F1F5F9"/>
-                </a:solidFill>
-                <a:latin typeface="Consolas"/>
-              </a:rPr>
-              <a:t>split</a:t>
-            </a:r>
-            <a:r>
-              <a:rPr sz="1050">
-                <a:solidFill>
-                  <a:srgbClr val="F1F5F9"/>
-                </a:solidFill>
-                <a:latin typeface="Consolas"/>
-              </a:rPr>
-              <a:t>(/\</a:t>
-            </a:r>
-            <a:r>
-              <a:rPr sz="1050">
-                <a:solidFill>
-                  <a:srgbClr val="F1F5F9"/>
-                </a:solidFill>
-                <a:latin typeface="Consolas"/>
-              </a:rPr>
-              <a:t>s</a:t>
-            </a:r>
-            <a:r>
-              <a:rPr sz="1050">
-                <a:solidFill>
-                  <a:srgbClr val="F1F5F9"/>
-                </a:solidFill>
-                <a:latin typeface="Consolas"/>
-              </a:rPr>
-              <a:t>+/));</a:t>
-            </a:r>
-          </a:p>
-          <a:p>
-            <a:pPr>
-              <a:spcAft>
-                <a:spcPts val="200"/>
-              </a:spcAft>
-            </a:pPr>
-            <a:r>
-              <a:rPr sz="1050">
-                <a:solidFill>
-                  <a:srgbClr val="F1F5F9"/>
-                </a:solidFill>
-                <a:latin typeface="Consolas"/>
-              </a:rPr>
-              <a:t>    </a:t>
-            </a:r>
-            <a:r>
-              <a:rPr sz="1050" b="1">
-                <a:solidFill>
-                  <a:srgbClr val="F472B6"/>
-                </a:solidFill>
-                <a:latin typeface="Consolas"/>
-              </a:rPr>
-              <a:t>const</a:t>
-            </a:r>
-            <a:r>
-              <a:rPr sz="1050">
-                <a:solidFill>
-                  <a:srgbClr val="F1F5F9"/>
-                </a:solidFill>
-                <a:latin typeface="Consolas"/>
-              </a:rPr>
-              <a:t> </a:t>
-            </a:r>
-            <a:r>
-              <a:rPr sz="1050">
-                <a:solidFill>
-                  <a:srgbClr val="F1F5F9"/>
-                </a:solidFill>
-                <a:latin typeface="Consolas"/>
-              </a:rPr>
-              <a:t>intersection</a:t>
-            </a:r>
-            <a:r>
-              <a:rPr sz="1050">
-                <a:solidFill>
-                  <a:srgbClr val="F1F5F9"/>
-                </a:solidFill>
-                <a:latin typeface="Consolas"/>
-              </a:rPr>
-              <a:t> </a:t>
-            </a:r>
-            <a:r>
-              <a:rPr sz="1050">
-                <a:solidFill>
-                  <a:srgbClr val="F1F5F9"/>
-                </a:solidFill>
-                <a:latin typeface="Consolas"/>
-              </a:rPr>
-              <a:t>=</a:t>
-            </a:r>
-            <a:r>
-              <a:rPr sz="1050">
-                <a:solidFill>
-                  <a:srgbClr val="F1F5F9"/>
-                </a:solidFill>
-                <a:latin typeface="Consolas"/>
-              </a:rPr>
-              <a:t> </a:t>
-            </a:r>
-            <a:r>
-              <a:rPr sz="1050" b="1">
-                <a:solidFill>
-                  <a:srgbClr val="F472B6"/>
-                </a:solidFill>
-                <a:latin typeface="Consolas"/>
-              </a:rPr>
-              <a:t>new</a:t>
-            </a:r>
-            <a:r>
-              <a:rPr sz="1050">
-                <a:solidFill>
-                  <a:srgbClr val="F1F5F9"/>
-                </a:solidFill>
-                <a:latin typeface="Consolas"/>
-              </a:rPr>
-              <a:t> </a:t>
-            </a:r>
-            <a:r>
-              <a:rPr sz="1050">
-                <a:solidFill>
-                  <a:srgbClr val="F1F5F9"/>
-                </a:solidFill>
-                <a:latin typeface="Consolas"/>
-              </a:rPr>
-              <a:t>Set</a:t>
-            </a:r>
-            <a:r>
-              <a:rPr sz="1050">
-                <a:solidFill>
-                  <a:srgbClr val="F1F5F9"/>
-                </a:solidFill>
-                <a:latin typeface="Consolas"/>
-              </a:rPr>
-              <a:t>(</a:t>
-            </a:r>
-          </a:p>
-          <a:p>
-            <a:pPr>
-              <a:spcAft>
-                <a:spcPts val="200"/>
-              </a:spcAft>
-            </a:pPr>
-            <a:r>
-              <a:rPr sz="1050">
-                <a:solidFill>
-                  <a:srgbClr val="F1F5F9"/>
-                </a:solidFill>
-                <a:latin typeface="Consolas"/>
-              </a:rPr>
-              <a:t>        </a:t>
-            </a:r>
-            <a:r>
-              <a:rPr sz="1050">
-                <a:solidFill>
-                  <a:srgbClr val="F1F5F9"/>
-                </a:solidFill>
-                <a:latin typeface="Consolas"/>
-              </a:rPr>
-              <a:t>[...</a:t>
-            </a:r>
-            <a:r>
-              <a:rPr sz="1050">
-                <a:solidFill>
-                  <a:srgbClr val="F1F5F9"/>
-                </a:solidFill>
-                <a:latin typeface="Consolas"/>
-              </a:rPr>
-              <a:t>words1</a:t>
-            </a:r>
-            <a:r>
-              <a:rPr sz="1050">
-                <a:solidFill>
-                  <a:srgbClr val="F1F5F9"/>
-                </a:solidFill>
-                <a:latin typeface="Consolas"/>
-              </a:rPr>
-              <a:t>].</a:t>
-            </a:r>
-            <a:r>
-              <a:rPr sz="1050">
-                <a:solidFill>
-                  <a:srgbClr val="F1F5F9"/>
-                </a:solidFill>
-                <a:latin typeface="Consolas"/>
-              </a:rPr>
-              <a:t>filter</a:t>
-            </a:r>
-            <a:r>
-              <a:rPr sz="1050">
-                <a:solidFill>
-                  <a:srgbClr val="F1F5F9"/>
-                </a:solidFill>
-                <a:latin typeface="Consolas"/>
-              </a:rPr>
-              <a:t>(</a:t>
-            </a:r>
-            <a:r>
-              <a:rPr sz="1050">
-                <a:solidFill>
-                  <a:srgbClr val="F1F5F9"/>
-                </a:solidFill>
-                <a:latin typeface="Consolas"/>
-              </a:rPr>
-              <a:t>x</a:t>
-            </a:r>
-            <a:r>
-              <a:rPr sz="1050">
-                <a:solidFill>
-                  <a:srgbClr val="F1F5F9"/>
-                </a:solidFill>
-                <a:latin typeface="Consolas"/>
-              </a:rPr>
-              <a:t> </a:t>
-            </a:r>
-            <a:r>
-              <a:rPr sz="1050">
-                <a:solidFill>
-                  <a:srgbClr val="F1F5F9"/>
-                </a:solidFill>
-                <a:latin typeface="Consolas"/>
-              </a:rPr>
-              <a:t>=&gt;</a:t>
-            </a:r>
-            <a:r>
-              <a:rPr sz="1050">
-                <a:solidFill>
-                  <a:srgbClr val="F1F5F9"/>
-                </a:solidFill>
-                <a:latin typeface="Consolas"/>
-              </a:rPr>
-              <a:t> </a:t>
-            </a:r>
-            <a:r>
-              <a:rPr sz="1050">
-                <a:solidFill>
-                  <a:srgbClr val="F1F5F9"/>
-                </a:solidFill>
-                <a:latin typeface="Consolas"/>
-              </a:rPr>
-              <a:t>words2</a:t>
-            </a:r>
-            <a:r>
-              <a:rPr sz="1050">
-                <a:solidFill>
-                  <a:srgbClr val="F1F5F9"/>
-                </a:solidFill>
-                <a:latin typeface="Consolas"/>
-              </a:rPr>
-              <a:t>.</a:t>
-            </a:r>
-            <a:r>
-              <a:rPr sz="1050">
-                <a:solidFill>
-                  <a:srgbClr val="F1F5F9"/>
-                </a:solidFill>
-                <a:latin typeface="Consolas"/>
-              </a:rPr>
-              <a:t>has</a:t>
-            </a:r>
-            <a:r>
-              <a:rPr sz="1050">
-                <a:solidFill>
-                  <a:srgbClr val="F1F5F9"/>
-                </a:solidFill>
-                <a:latin typeface="Consolas"/>
-              </a:rPr>
-              <a:t>(</a:t>
-            </a:r>
-            <a:r>
-              <a:rPr sz="1050">
-                <a:solidFill>
-                  <a:srgbClr val="F1F5F9"/>
-                </a:solidFill>
-                <a:latin typeface="Consolas"/>
-              </a:rPr>
-              <a:t>x</a:t>
-            </a:r>
-            <a:r>
-              <a:rPr sz="1050">
-                <a:solidFill>
-                  <a:srgbClr val="F1F5F9"/>
-                </a:solidFill>
-                <a:latin typeface="Consolas"/>
-              </a:rPr>
-              <a:t>))</a:t>
-            </a:r>
-          </a:p>
-          <a:p>
-            <a:pPr>
-              <a:spcAft>
-                <a:spcPts val="200"/>
-              </a:spcAft>
-            </a:pPr>
-            <a:r>
-              <a:rPr sz="1050">
-                <a:solidFill>
-                  <a:srgbClr val="F1F5F9"/>
-                </a:solidFill>
-                <a:latin typeface="Consolas"/>
-              </a:rPr>
-              <a:t>    </a:t>
-            </a:r>
-            <a:r>
-              <a:rPr sz="1050">
-                <a:solidFill>
-                  <a:srgbClr val="F1F5F9"/>
-                </a:solidFill>
-                <a:latin typeface="Consolas"/>
-              </a:rPr>
-              <a:t>);</a:t>
-            </a:r>
-          </a:p>
-          <a:p>
-            <a:pPr>
-              <a:spcAft>
-                <a:spcPts val="200"/>
-              </a:spcAft>
-            </a:pPr>
-            <a:r>
-              <a:rPr sz="1050">
-                <a:solidFill>
-                  <a:srgbClr val="F1F5F9"/>
-                </a:solidFill>
-                <a:latin typeface="Consolas"/>
-              </a:rPr>
-              <a:t>    </a:t>
-            </a:r>
-            <a:r>
-              <a:rPr sz="1050" b="1">
-                <a:solidFill>
-                  <a:srgbClr val="F472B6"/>
-                </a:solidFill>
-                <a:latin typeface="Consolas"/>
-              </a:rPr>
-              <a:t>const</a:t>
-            </a:r>
-            <a:r>
-              <a:rPr sz="1050">
-                <a:solidFill>
-                  <a:srgbClr val="F1F5F9"/>
-                </a:solidFill>
-                <a:latin typeface="Consolas"/>
-              </a:rPr>
-              <a:t> </a:t>
-            </a:r>
-            <a:r>
-              <a:rPr sz="1050">
-                <a:solidFill>
-                  <a:srgbClr val="F1F5F9"/>
-                </a:solidFill>
-                <a:latin typeface="Consolas"/>
-              </a:rPr>
-              <a:t>union</a:t>
-            </a:r>
-            <a:r>
-              <a:rPr sz="1050">
-                <a:solidFill>
-                  <a:srgbClr val="F1F5F9"/>
-                </a:solidFill>
-                <a:latin typeface="Consolas"/>
-              </a:rPr>
-              <a:t> </a:t>
-            </a:r>
-            <a:r>
-              <a:rPr sz="1050">
-                <a:solidFill>
-                  <a:srgbClr val="F1F5F9"/>
-                </a:solidFill>
-                <a:latin typeface="Consolas"/>
-              </a:rPr>
-              <a:t>=</a:t>
-            </a:r>
-            <a:r>
-              <a:rPr sz="1050">
-                <a:solidFill>
-                  <a:srgbClr val="F1F5F9"/>
-                </a:solidFill>
-                <a:latin typeface="Consolas"/>
-              </a:rPr>
-              <a:t> </a:t>
-            </a:r>
-            <a:r>
-              <a:rPr sz="1050" b="1">
-                <a:solidFill>
-                  <a:srgbClr val="F472B6"/>
-                </a:solidFill>
-                <a:latin typeface="Consolas"/>
-              </a:rPr>
-              <a:t>new</a:t>
-            </a:r>
-            <a:r>
-              <a:rPr sz="1050">
-                <a:solidFill>
-                  <a:srgbClr val="F1F5F9"/>
-                </a:solidFill>
-                <a:latin typeface="Consolas"/>
-              </a:rPr>
-              <a:t> </a:t>
-            </a:r>
-            <a:r>
-              <a:rPr sz="1050">
-                <a:solidFill>
-                  <a:srgbClr val="F1F5F9"/>
-                </a:solidFill>
-                <a:latin typeface="Consolas"/>
-              </a:rPr>
-              <a:t>Set</a:t>
-            </a:r>
-            <a:r>
-              <a:rPr sz="1050">
-                <a:solidFill>
-                  <a:srgbClr val="F1F5F9"/>
-                </a:solidFill>
-                <a:latin typeface="Consolas"/>
-              </a:rPr>
-              <a:t>([...</a:t>
-            </a:r>
-            <a:r>
-              <a:rPr sz="1050">
-                <a:solidFill>
-                  <a:srgbClr val="F1F5F9"/>
-                </a:solidFill>
-                <a:latin typeface="Consolas"/>
-              </a:rPr>
-              <a:t>words1</a:t>
-            </a:r>
-            <a:r>
-              <a:rPr sz="1050">
-                <a:solidFill>
-                  <a:srgbClr val="F1F5F9"/>
-                </a:solidFill>
-                <a:latin typeface="Consolas"/>
-              </a:rPr>
-              <a:t>,</a:t>
-            </a:r>
-            <a:r>
-              <a:rPr sz="1050">
-                <a:solidFill>
-                  <a:srgbClr val="F1F5F9"/>
-                </a:solidFill>
-                <a:latin typeface="Consolas"/>
-              </a:rPr>
-              <a:t> </a:t>
-            </a:r>
-            <a:r>
-              <a:rPr sz="1050">
-                <a:solidFill>
-                  <a:srgbClr val="F1F5F9"/>
-                </a:solidFill>
-                <a:latin typeface="Consolas"/>
-              </a:rPr>
-              <a:t>...</a:t>
-            </a:r>
-            <a:r>
-              <a:rPr sz="1050">
-                <a:solidFill>
-                  <a:srgbClr val="F1F5F9"/>
-                </a:solidFill>
-                <a:latin typeface="Consolas"/>
-              </a:rPr>
-              <a:t>words2</a:t>
-            </a:r>
-            <a:r>
-              <a:rPr sz="1050">
-                <a:solidFill>
-                  <a:srgbClr val="F1F5F9"/>
-                </a:solidFill>
-                <a:latin typeface="Consolas"/>
-              </a:rPr>
-              <a:t>]);</a:t>
-            </a:r>
-          </a:p>
-          <a:p>
-            <a:pPr>
-              <a:spcAft>
-                <a:spcPts val="200"/>
-              </a:spcAft>
-            </a:pPr>
-            <a:r>
-              <a:rPr sz="1050">
-                <a:solidFill>
-                  <a:srgbClr val="F1F5F9"/>
-                </a:solidFill>
-                <a:latin typeface="Consolas"/>
-              </a:rPr>
-              <a:t>    </a:t>
-            </a:r>
-            <a:r>
-              <a:rPr sz="1050" b="1">
-                <a:solidFill>
-                  <a:srgbClr val="F472B6"/>
-                </a:solidFill>
-                <a:latin typeface="Consolas"/>
-              </a:rPr>
-              <a:t>if</a:t>
-            </a:r>
-            <a:r>
-              <a:rPr sz="1050">
-                <a:solidFill>
-                  <a:srgbClr val="F1F5F9"/>
-                </a:solidFill>
-                <a:latin typeface="Consolas"/>
-              </a:rPr>
-              <a:t> </a:t>
-            </a:r>
-            <a:r>
-              <a:rPr sz="1050">
-                <a:solidFill>
-                  <a:srgbClr val="F1F5F9"/>
-                </a:solidFill>
-                <a:latin typeface="Consolas"/>
-              </a:rPr>
-              <a:t>(</a:t>
-            </a:r>
-            <a:r>
-              <a:rPr sz="1050">
-                <a:solidFill>
-                  <a:srgbClr val="F1F5F9"/>
-                </a:solidFill>
-                <a:latin typeface="Consolas"/>
-              </a:rPr>
-              <a:t>union</a:t>
-            </a:r>
-            <a:r>
-              <a:rPr sz="1050">
-                <a:solidFill>
-                  <a:srgbClr val="F1F5F9"/>
-                </a:solidFill>
-                <a:latin typeface="Consolas"/>
-              </a:rPr>
-              <a:t>.</a:t>
-            </a:r>
-            <a:r>
-              <a:rPr sz="1050">
-                <a:solidFill>
-                  <a:srgbClr val="F1F5F9"/>
-                </a:solidFill>
-                <a:latin typeface="Consolas"/>
-              </a:rPr>
-              <a:t>size</a:t>
-            </a:r>
-            <a:r>
-              <a:rPr sz="1050">
-                <a:solidFill>
-                  <a:srgbClr val="F1F5F9"/>
-                </a:solidFill>
-                <a:latin typeface="Consolas"/>
-              </a:rPr>
-              <a:t> </a:t>
-            </a:r>
-            <a:r>
-              <a:rPr sz="1050">
-                <a:solidFill>
-                  <a:srgbClr val="F1F5F9"/>
-                </a:solidFill>
-                <a:latin typeface="Consolas"/>
-              </a:rPr>
-              <a:t>===</a:t>
-            </a:r>
-            <a:r>
-              <a:rPr sz="1050">
-                <a:solidFill>
-                  <a:srgbClr val="F1F5F9"/>
-                </a:solidFill>
-                <a:latin typeface="Consolas"/>
-              </a:rPr>
-              <a:t> </a:t>
-            </a:r>
-            <a:r>
-              <a:rPr sz="1050">
-                <a:solidFill>
-                  <a:srgbClr val="818CF8"/>
-                </a:solidFill>
-                <a:latin typeface="Consolas"/>
-              </a:rPr>
-              <a:t>0</a:t>
-            </a:r>
-            <a:r>
-              <a:rPr sz="1050">
-                <a:solidFill>
-                  <a:srgbClr val="F1F5F9"/>
-                </a:solidFill>
-                <a:latin typeface="Consolas"/>
-              </a:rPr>
-              <a:t>)</a:t>
-            </a:r>
-            <a:r>
-              <a:rPr sz="1050">
-                <a:solidFill>
-                  <a:srgbClr val="F1F5F9"/>
-                </a:solidFill>
-                <a:latin typeface="Consolas"/>
-              </a:rPr>
-              <a:t> </a:t>
-            </a:r>
-            <a:r>
-              <a:rPr sz="1050" b="1">
-                <a:solidFill>
-                  <a:srgbClr val="F472B6"/>
-                </a:solidFill>
-                <a:latin typeface="Consolas"/>
-              </a:rPr>
-              <a:t>return</a:t>
-            </a:r>
-            <a:r>
-              <a:rPr sz="1050">
-                <a:solidFill>
-                  <a:srgbClr val="F1F5F9"/>
-                </a:solidFill>
-                <a:latin typeface="Consolas"/>
-              </a:rPr>
-              <a:t> </a:t>
-            </a:r>
-            <a:r>
-              <a:rPr sz="1050">
-                <a:solidFill>
-                  <a:srgbClr val="818CF8"/>
-                </a:solidFill>
-                <a:latin typeface="Consolas"/>
-              </a:rPr>
-              <a:t>0</a:t>
-            </a:r>
-            <a:r>
-              <a:rPr sz="1050">
-                <a:solidFill>
-                  <a:srgbClr val="F1F5F9"/>
-                </a:solidFill>
-                <a:latin typeface="Consolas"/>
-              </a:rPr>
-              <a:t>;</a:t>
-            </a:r>
-          </a:p>
-          <a:p>
-            <a:pPr>
-              <a:spcAft>
-                <a:spcPts val="200"/>
-              </a:spcAft>
-            </a:pPr>
-            <a:r>
-              <a:rPr sz="1050">
-                <a:solidFill>
-                  <a:srgbClr val="F1F5F9"/>
-                </a:solidFill>
-                <a:latin typeface="Consolas"/>
-              </a:rPr>
-              <a:t>    </a:t>
-            </a:r>
-            <a:r>
-              <a:rPr sz="1050" b="1">
-                <a:solidFill>
-                  <a:srgbClr val="F472B6"/>
-                </a:solidFill>
-                <a:latin typeface="Consolas"/>
-              </a:rPr>
-              <a:t>return</a:t>
-            </a:r>
-            <a:r>
-              <a:rPr sz="1050">
-                <a:solidFill>
-                  <a:srgbClr val="F1F5F9"/>
-                </a:solidFill>
-                <a:latin typeface="Consolas"/>
-              </a:rPr>
-              <a:t> </a:t>
-            </a:r>
-            <a:r>
-              <a:rPr sz="1050">
-                <a:solidFill>
-                  <a:srgbClr val="F1F5F9"/>
-                </a:solidFill>
-                <a:latin typeface="Consolas"/>
-              </a:rPr>
-              <a:t>(</a:t>
-            </a:r>
-            <a:r>
-              <a:rPr sz="1050">
-                <a:solidFill>
-                  <a:srgbClr val="F1F5F9"/>
-                </a:solidFill>
-                <a:latin typeface="Consolas"/>
-              </a:rPr>
-              <a:t>intersection</a:t>
-            </a:r>
-            <a:r>
-              <a:rPr sz="1050">
-                <a:solidFill>
-                  <a:srgbClr val="F1F5F9"/>
-                </a:solidFill>
-                <a:latin typeface="Consolas"/>
-              </a:rPr>
-              <a:t>.</a:t>
-            </a:r>
-            <a:r>
-              <a:rPr sz="1050">
-                <a:solidFill>
-                  <a:srgbClr val="F1F5F9"/>
-                </a:solidFill>
-                <a:latin typeface="Consolas"/>
-              </a:rPr>
-              <a:t>size</a:t>
-            </a:r>
-            <a:r>
-              <a:rPr sz="1050">
-                <a:solidFill>
-                  <a:srgbClr val="F1F5F9"/>
-                </a:solidFill>
-                <a:latin typeface="Consolas"/>
-              </a:rPr>
-              <a:t> </a:t>
-            </a:r>
-            <a:r>
-              <a:rPr sz="1050">
-                <a:solidFill>
-                  <a:srgbClr val="F1F5F9"/>
-                </a:solidFill>
-                <a:latin typeface="Consolas"/>
-              </a:rPr>
-              <a:t>/</a:t>
-            </a:r>
-            <a:r>
-              <a:rPr sz="1050">
-                <a:solidFill>
-                  <a:srgbClr val="F1F5F9"/>
-                </a:solidFill>
-                <a:latin typeface="Consolas"/>
-              </a:rPr>
-              <a:t> </a:t>
-            </a:r>
-            <a:r>
-              <a:rPr sz="1050">
-                <a:solidFill>
-                  <a:srgbClr val="F1F5F9"/>
-                </a:solidFill>
-                <a:latin typeface="Consolas"/>
-              </a:rPr>
-              <a:t>union</a:t>
-            </a:r>
-            <a:r>
-              <a:rPr sz="1050">
-                <a:solidFill>
-                  <a:srgbClr val="F1F5F9"/>
-                </a:solidFill>
-                <a:latin typeface="Consolas"/>
-              </a:rPr>
-              <a:t>.</a:t>
-            </a:r>
-            <a:r>
-              <a:rPr sz="1050">
-                <a:solidFill>
-                  <a:srgbClr val="F1F5F9"/>
-                </a:solidFill>
-                <a:latin typeface="Consolas"/>
-              </a:rPr>
-              <a:t>size</a:t>
-            </a:r>
-            <a:r>
-              <a:rPr sz="1050">
-                <a:solidFill>
-                  <a:srgbClr val="F1F5F9"/>
-                </a:solidFill>
-                <a:latin typeface="Consolas"/>
-              </a:rPr>
-              <a:t>)</a:t>
-            </a:r>
-            <a:r>
-              <a:rPr sz="1050">
-                <a:solidFill>
-                  <a:srgbClr val="F1F5F9"/>
-                </a:solidFill>
-                <a:latin typeface="Consolas"/>
-              </a:rPr>
-              <a:t> </a:t>
-            </a:r>
-            <a:r>
-              <a:rPr sz="1050">
-                <a:solidFill>
-                  <a:srgbClr val="F1F5F9"/>
-                </a:solidFill>
-                <a:latin typeface="Consolas"/>
-              </a:rPr>
-              <a:t>*</a:t>
-            </a:r>
-            <a:r>
-              <a:rPr sz="1050">
-                <a:solidFill>
-                  <a:srgbClr val="F1F5F9"/>
-                </a:solidFill>
-                <a:latin typeface="Consolas"/>
-              </a:rPr>
-              <a:t> </a:t>
-            </a:r>
-            <a:r>
-              <a:rPr sz="1050">
-                <a:solidFill>
-                  <a:srgbClr val="818CF8"/>
-                </a:solidFill>
-                <a:latin typeface="Consolas"/>
-              </a:rPr>
-              <a:t>100</a:t>
-            </a:r>
-            <a:r>
-              <a:rPr sz="1050">
-                <a:solidFill>
-                  <a:srgbClr val="F1F5F9"/>
-                </a:solidFill>
-                <a:latin typeface="Consolas"/>
-              </a:rPr>
-              <a:t>;</a:t>
-            </a:r>
-          </a:p>
-          <a:p>
-            <a:pPr>
-              <a:spcAft>
-                <a:spcPts val="200"/>
-              </a:spcAft>
-            </a:pPr>
-            <a:r>
-              <a:rPr sz="1050">
+              <a:rPr sz="1050" dirty="0">
                 <a:solidFill>
                   <a:srgbClr val="F1F5F9"/>
                 </a:solidFill>
@@ -8688,7 +6962,7 @@
 </file>
 
 <file path=ppt/slides/slide23.xml><?xml version="1.0" encoding="utf-8"?>
-<p:sld xmlns:a="http://schemas.openxmlformats.org/drawingml/2006/main" xmlns:p="http://schemas.openxmlformats.org/presentationml/2006/main" xmlns:r="http://schemas.openxmlformats.org/officeDocument/2006/relationships">
+<p:sld xmlns:a="http://schemas.openxmlformats.org/drawingml/2006/main" xmlns:r="http://schemas.openxmlformats.org/officeDocument/2006/relationships" xmlns:p="http://schemas.openxmlformats.org/presentationml/2006/main">
   <p:cSld>
     <p:bg>
       <p:bgPr>
@@ -8704,7 +6978,14 @@
         <p:cNvGrpSpPr/>
         <p:nvPr/>
       </p:nvGrpSpPr>
-      <p:grpSpPr/>
+      <p:grpSpPr>
+        <a:xfrm>
+          <a:off x="0" y="0"/>
+          <a:ext cx="0" cy="0"/>
+          <a:chOff x="0" y="0"/>
+          <a:chExt cx="0" cy="0"/>
+        </a:xfrm>
+      </p:grpSpPr>
       <p:sp>
         <p:nvSpPr>
           <p:cNvPr id="2" name="TextBox 1"/>
@@ -8885,7 +7166,7 @@
 </file>
 
 <file path=ppt/slides/slide24.xml><?xml version="1.0" encoding="utf-8"?>
-<p:sld xmlns:a="http://schemas.openxmlformats.org/drawingml/2006/main" xmlns:p="http://schemas.openxmlformats.org/presentationml/2006/main" xmlns:r="http://schemas.openxmlformats.org/officeDocument/2006/relationships">
+<p:sld xmlns:a="http://schemas.openxmlformats.org/drawingml/2006/main" xmlns:r="http://schemas.openxmlformats.org/officeDocument/2006/relationships" xmlns:p="http://schemas.openxmlformats.org/presentationml/2006/main">
   <p:cSld>
     <p:bg>
       <p:bgPr>
@@ -8901,7 +7182,14 @@
         <p:cNvGrpSpPr/>
         <p:nvPr/>
       </p:nvGrpSpPr>
-      <p:grpSpPr/>
+      <p:grpSpPr>
+        <a:xfrm>
+          <a:off x="0" y="0"/>
+          <a:ext cx="0" cy="0"/>
+          <a:chOff x="0" y="0"/>
+          <a:chExt cx="0" cy="0"/>
+        </a:xfrm>
+      </p:grpSpPr>
       <p:sp>
         <p:nvSpPr>
           <p:cNvPr id="2" name="TextBox 1"/>
@@ -9058,7 +7346,7 @@
 </file>
 
 <file path=ppt/slides/slide25.xml><?xml version="1.0" encoding="utf-8"?>
-<p:sld xmlns:a="http://schemas.openxmlformats.org/drawingml/2006/main" xmlns:p="http://schemas.openxmlformats.org/presentationml/2006/main" xmlns:r="http://schemas.openxmlformats.org/officeDocument/2006/relationships">
+<p:sld xmlns:a="http://schemas.openxmlformats.org/drawingml/2006/main" xmlns:r="http://schemas.openxmlformats.org/officeDocument/2006/relationships" xmlns:p="http://schemas.openxmlformats.org/presentationml/2006/main">
   <p:cSld>
     <p:bg>
       <p:bgPr>
@@ -9074,7 +7362,14 @@
         <p:cNvGrpSpPr/>
         <p:nvPr/>
       </p:nvGrpSpPr>
-      <p:grpSpPr/>
+      <p:grpSpPr>
+        <a:xfrm>
+          <a:off x="0" y="0"/>
+          <a:ext cx="0" cy="0"/>
+          <a:chOff x="0" y="0"/>
+          <a:chExt cx="0" cy="0"/>
+        </a:xfrm>
+      </p:grpSpPr>
       <p:sp>
         <p:nvSpPr>
           <p:cNvPr id="2" name="TextBox 1"/>
@@ -9231,7 +7526,7 @@
 </file>
 
 <file path=ppt/slides/slide26.xml><?xml version="1.0" encoding="utf-8"?>
-<p:sld xmlns:a="http://schemas.openxmlformats.org/drawingml/2006/main" xmlns:p="http://schemas.openxmlformats.org/presentationml/2006/main" xmlns:r="http://schemas.openxmlformats.org/officeDocument/2006/relationships">
+<p:sld xmlns:a="http://schemas.openxmlformats.org/drawingml/2006/main" xmlns:r="http://schemas.openxmlformats.org/officeDocument/2006/relationships" xmlns:p="http://schemas.openxmlformats.org/presentationml/2006/main">
   <p:cSld>
     <p:bg>
       <p:bgPr>
@@ -9247,7 +7542,14 @@
         <p:cNvGrpSpPr/>
         <p:nvPr/>
       </p:nvGrpSpPr>
-      <p:grpSpPr/>
+      <p:grpSpPr>
+        <a:xfrm>
+          <a:off x="0" y="0"/>
+          <a:ext cx="0" cy="0"/>
+          <a:chOff x="0" y="0"/>
+          <a:chExt cx="0" cy="0"/>
+        </a:xfrm>
+      </p:grpSpPr>
       <p:sp>
         <p:nvSpPr>
           <p:cNvPr id="2" name="TextBox 1"/>
@@ -9425,7 +7727,7 @@
           </a:fontRef>
         </p:style>
         <p:txBody>
-          <a:bodyPr rtlCol="0" anchor="ctr" wrap="square" lIns="137160" tIns="137160" rIns="137160" bIns="137160"/>
+          <a:bodyPr wrap="square" lIns="137160" tIns="137160" rIns="137160" bIns="137160" rtlCol="0" anchor="ctr"/>
           <a:lstStyle/>
           <a:p>
             <a:pPr algn="ctr">
@@ -9483,16 +7785,240 @@
                 </a:solidFill>
                 <a:latin typeface="Consolas"/>
               </a:rPr>
+              <a:t> = </a:t>
+            </a:r>
+            <a:r>
+              <a:rPr sz="1200">
+                <a:solidFill>
+                  <a:srgbClr val="38BDF8"/>
+                </a:solidFill>
+                <a:latin typeface="Consolas"/>
+              </a:rPr>
+              <a:t>document</a:t>
+            </a:r>
+            <a:r>
+              <a:rPr sz="1200">
+                <a:solidFill>
+                  <a:srgbClr val="F1F5F9"/>
+                </a:solidFill>
+                <a:latin typeface="Consolas"/>
+              </a:rPr>
+              <a:t>.getElementById('radial-bar</a:t>
+            </a:r>
+            <a:r>
+              <a:rPr sz="1200">
+                <a:solidFill>
+                  <a:srgbClr val="FDBA74"/>
+                </a:solidFill>
+                <a:latin typeface="Consolas"/>
+              </a:rPr>
+              <a:t>');</a:t>
+            </a:r>
+          </a:p>
+          <a:p>
+            <a:pPr>
+              <a:spcAft>
+                <a:spcPts val="200"/>
+              </a:spcAft>
+            </a:pPr>
+            <a:r>
+              <a:rPr sz="1200" b="1">
+                <a:solidFill>
+                  <a:srgbClr val="F472B6"/>
+                </a:solidFill>
+                <a:latin typeface="Consolas"/>
+              </a:rPr>
+              <a:t>const</a:t>
+            </a:r>
+            <a:r>
+              <a:rPr sz="1200">
+                <a:solidFill>
+                  <a:srgbClr val="F1F5F9"/>
+                </a:solidFill>
+                <a:latin typeface="Consolas"/>
+              </a:rPr>
+              <a:t> circumference = </a:t>
+            </a:r>
+            <a:r>
+              <a:rPr sz="1200">
+                <a:solidFill>
+                  <a:srgbClr val="818CF8"/>
+                </a:solidFill>
+                <a:latin typeface="Consolas"/>
+              </a:rPr>
+              <a:t>326</a:t>
+            </a:r>
+            <a:r>
+              <a:rPr sz="1200">
+                <a:solidFill>
+                  <a:srgbClr val="F1F5F9"/>
+                </a:solidFill>
+                <a:latin typeface="Consolas"/>
+              </a:rPr>
+              <a:t>.</a:t>
+            </a:r>
+            <a:r>
+              <a:rPr sz="1200">
+                <a:solidFill>
+                  <a:srgbClr val="818CF8"/>
+                </a:solidFill>
+                <a:latin typeface="Consolas"/>
+              </a:rPr>
+              <a:t>7</a:t>
+            </a:r>
+            <a:r>
+              <a:rPr sz="1200">
+                <a:solidFill>
+                  <a:srgbClr val="F1F5F9"/>
+                </a:solidFill>
+                <a:latin typeface="Consolas"/>
+              </a:rPr>
+              <a:t>;</a:t>
+            </a:r>
+          </a:p>
+          <a:p>
+            <a:pPr>
+              <a:spcAft>
+                <a:spcPts val="200"/>
+              </a:spcAft>
+            </a:pPr>
+            <a:r>
+              <a:rPr sz="1200" b="1">
+                <a:solidFill>
+                  <a:srgbClr val="F472B6"/>
+                </a:solidFill>
+                <a:latin typeface="Consolas"/>
+              </a:rPr>
+              <a:t>const</a:t>
+            </a:r>
+            <a:r>
+              <a:rPr sz="1200">
+                <a:solidFill>
+                  <a:srgbClr val="F1F5F9"/>
+                </a:solidFill>
+                <a:latin typeface="Consolas"/>
+              </a:rPr>
+              <a:t> offset = circumference - (circumference * scoreInt / </a:t>
+            </a:r>
+            <a:r>
+              <a:rPr sz="1200">
+                <a:solidFill>
+                  <a:srgbClr val="818CF8"/>
+                </a:solidFill>
+                <a:latin typeface="Consolas"/>
+              </a:rPr>
+              <a:t>100</a:t>
+            </a:r>
+            <a:r>
+              <a:rPr sz="1200">
+                <a:solidFill>
+                  <a:srgbClr val="F1F5F9"/>
+                </a:solidFill>
+                <a:latin typeface="Consolas"/>
+              </a:rPr>
+              <a:t>);</a:t>
+            </a:r>
+          </a:p>
+          <a:p>
+            <a:pPr>
+              <a:spcAft>
+                <a:spcPts val="200"/>
+              </a:spcAft>
+            </a:pPr>
+            <a:r>
+              <a:rPr sz="1200">
+                <a:solidFill>
+                  <a:srgbClr val="38BDF8"/>
+                </a:solidFill>
+                <a:latin typeface="Consolas"/>
+              </a:rPr>
+              <a:t>circle</a:t>
+            </a:r>
+            <a:r>
+              <a:rPr sz="1200">
+                <a:solidFill>
+                  <a:srgbClr val="F1F5F9"/>
+                </a:solidFill>
+                <a:latin typeface="Consolas"/>
+              </a:rPr>
+              <a:t>.style.strokeDashoffset = offset;</a:t>
+            </a:r>
+          </a:p>
+          <a:p>
+            <a:pPr>
+              <a:spcAft>
+                <a:spcPts val="200"/>
+              </a:spcAft>
+            </a:pPr>
+            <a:r>
+              <a:rPr sz="1200">
+                <a:solidFill>
+                  <a:srgbClr val="38BDF8"/>
+                </a:solidFill>
+                <a:latin typeface="Consolas"/>
+              </a:rPr>
+              <a:t>circle</a:t>
+            </a:r>
+            <a:r>
+              <a:rPr sz="1200">
+                <a:solidFill>
+                  <a:srgbClr val="F1F5F9"/>
+                </a:solidFill>
+                <a:latin typeface="Consolas"/>
+              </a:rPr>
+              <a:t>.style.stroke = color;</a:t>
+            </a:r>
+          </a:p>
+          <a:p>
+            <a:pPr>
+              <a:spcAft>
+                <a:spcPts val="200"/>
+              </a:spcAft>
+            </a:pPr>
+            <a:r>
+              <a:rPr sz="1200">
+                <a:solidFill>
+                  <a:srgbClr val="38BDF8"/>
+                </a:solidFill>
+                <a:latin typeface="Consolas"/>
+              </a:rPr>
+              <a:t>circle</a:t>
+            </a:r>
+            <a:r>
+              <a:rPr sz="1200">
+                <a:solidFill>
+                  <a:srgbClr val="F1F5F9"/>
+                </a:solidFill>
+                <a:latin typeface="Consolas"/>
+              </a:rPr>
+              <a:t>.style.filter = `drop-shadow(</a:t>
+            </a:r>
+            <a:r>
+              <a:rPr sz="1200">
+                <a:solidFill>
+                  <a:srgbClr val="818CF8"/>
+                </a:solidFill>
+                <a:latin typeface="Consolas"/>
+              </a:rPr>
+              <a:t>0</a:t>
+            </a:r>
+            <a:r>
+              <a:rPr sz="1200">
+                <a:solidFill>
+                  <a:srgbClr val="F1F5F9"/>
+                </a:solidFill>
+                <a:latin typeface="Consolas"/>
+              </a:rPr>
               <a:t> </a:t>
             </a:r>
             <a:r>
               <a:rPr sz="1200">
                 <a:solidFill>
-                  <a:srgbClr val="F1F5F9"/>
-                </a:solidFill>
-                <a:latin typeface="Consolas"/>
-              </a:rPr>
-              <a:t>=</a:t>
+                  <a:srgbClr val="818CF8"/>
+                </a:solidFill>
+                <a:latin typeface="Consolas"/>
+              </a:rPr>
+              <a:t>0</a:t>
             </a:r>
             <a:r>
               <a:rPr sz="1200">
@@ -9501,771 +8027,7 @@
                 </a:solidFill>
                 <a:latin typeface="Consolas"/>
               </a:rPr>
-              <a:t> </a:t>
-            </a:r>
-            <a:r>
-              <a:rPr sz="1200">
-                <a:solidFill>
-                  <a:srgbClr val="38BDF8"/>
-                </a:solidFill>
-                <a:latin typeface="Consolas"/>
-              </a:rPr>
-              <a:t>document</a:t>
-            </a:r>
-            <a:r>
-              <a:rPr sz="1200">
-                <a:solidFill>
-                  <a:srgbClr val="F1F5F9"/>
-                </a:solidFill>
-                <a:latin typeface="Consolas"/>
-              </a:rPr>
-              <a:t>.</a:t>
-            </a:r>
-            <a:r>
-              <a:rPr sz="1200">
-                <a:solidFill>
-                  <a:srgbClr val="F1F5F9"/>
-                </a:solidFill>
-                <a:latin typeface="Consolas"/>
-              </a:rPr>
-              <a:t>getElementById</a:t>
-            </a:r>
-            <a:r>
-              <a:rPr sz="1200">
-                <a:solidFill>
-                  <a:srgbClr val="F1F5F9"/>
-                </a:solidFill>
-                <a:latin typeface="Consolas"/>
-              </a:rPr>
-              <a:t>('</a:t>
-            </a:r>
-            <a:r>
-              <a:rPr sz="1200">
-                <a:solidFill>
-                  <a:srgbClr val="F1F5F9"/>
-                </a:solidFill>
-                <a:latin typeface="Consolas"/>
-              </a:rPr>
-              <a:t>radial</a:t>
-            </a:r>
-            <a:r>
-              <a:rPr sz="1200">
-                <a:solidFill>
-                  <a:srgbClr val="F1F5F9"/>
-                </a:solidFill>
-                <a:latin typeface="Consolas"/>
-              </a:rPr>
-              <a:t>-</a:t>
-            </a:r>
-            <a:r>
-              <a:rPr sz="1200">
-                <a:solidFill>
-                  <a:srgbClr val="F1F5F9"/>
-                </a:solidFill>
-                <a:latin typeface="Consolas"/>
-              </a:rPr>
-              <a:t>bar</a:t>
-            </a:r>
-            <a:r>
-              <a:rPr sz="1200">
-                <a:solidFill>
-                  <a:srgbClr val="FDBA74"/>
-                </a:solidFill>
-                <a:latin typeface="Consolas"/>
-              </a:rPr>
-              <a:t>');</a:t>
-            </a:r>
-          </a:p>
-          <a:p>
-            <a:pPr>
-              <a:spcAft>
-                <a:spcPts val="200"/>
-              </a:spcAft>
-            </a:pPr>
-            <a:r>
-              <a:rPr sz="1200" b="1">
-                <a:solidFill>
-                  <a:srgbClr val="F472B6"/>
-                </a:solidFill>
-                <a:latin typeface="Consolas"/>
-              </a:rPr>
-              <a:t>const</a:t>
-            </a:r>
-            <a:r>
-              <a:rPr sz="1200">
-                <a:solidFill>
-                  <a:srgbClr val="F1F5F9"/>
-                </a:solidFill>
-                <a:latin typeface="Consolas"/>
-              </a:rPr>
-              <a:t> </a:t>
-            </a:r>
-            <a:r>
-              <a:rPr sz="1200">
-                <a:solidFill>
-                  <a:srgbClr val="F1F5F9"/>
-                </a:solidFill>
-                <a:latin typeface="Consolas"/>
-              </a:rPr>
-              <a:t>circumference</a:t>
-            </a:r>
-            <a:r>
-              <a:rPr sz="1200">
-                <a:solidFill>
-                  <a:srgbClr val="F1F5F9"/>
-                </a:solidFill>
-                <a:latin typeface="Consolas"/>
-              </a:rPr>
-              <a:t> </a:t>
-            </a:r>
-            <a:r>
-              <a:rPr sz="1200">
-                <a:solidFill>
-                  <a:srgbClr val="F1F5F9"/>
-                </a:solidFill>
-                <a:latin typeface="Consolas"/>
-              </a:rPr>
-              <a:t>=</a:t>
-            </a:r>
-            <a:r>
-              <a:rPr sz="1200">
-                <a:solidFill>
-                  <a:srgbClr val="F1F5F9"/>
-                </a:solidFill>
-                <a:latin typeface="Consolas"/>
-              </a:rPr>
-              <a:t> </a:t>
-            </a:r>
-            <a:r>
-              <a:rPr sz="1200">
-                <a:solidFill>
-                  <a:srgbClr val="818CF8"/>
-                </a:solidFill>
-                <a:latin typeface="Consolas"/>
-              </a:rPr>
-              <a:t>326</a:t>
-            </a:r>
-            <a:r>
-              <a:rPr sz="1200">
-                <a:solidFill>
-                  <a:srgbClr val="F1F5F9"/>
-                </a:solidFill>
-                <a:latin typeface="Consolas"/>
-              </a:rPr>
-              <a:t>.</a:t>
-            </a:r>
-            <a:r>
-              <a:rPr sz="1200">
-                <a:solidFill>
-                  <a:srgbClr val="818CF8"/>
-                </a:solidFill>
-                <a:latin typeface="Consolas"/>
-              </a:rPr>
-              <a:t>7</a:t>
-            </a:r>
-            <a:r>
-              <a:rPr sz="1200">
-                <a:solidFill>
-                  <a:srgbClr val="F1F5F9"/>
-                </a:solidFill>
-                <a:latin typeface="Consolas"/>
-              </a:rPr>
-              <a:t>;</a:t>
-            </a:r>
-          </a:p>
-          <a:p>
-            <a:pPr>
-              <a:spcAft>
-                <a:spcPts val="200"/>
-              </a:spcAft>
-            </a:pPr>
-            <a:r>
-              <a:rPr sz="1200" b="1">
-                <a:solidFill>
-                  <a:srgbClr val="F472B6"/>
-                </a:solidFill>
-                <a:latin typeface="Consolas"/>
-              </a:rPr>
-              <a:t>const</a:t>
-            </a:r>
-            <a:r>
-              <a:rPr sz="1200">
-                <a:solidFill>
-                  <a:srgbClr val="F1F5F9"/>
-                </a:solidFill>
-                <a:latin typeface="Consolas"/>
-              </a:rPr>
-              <a:t> </a:t>
-            </a:r>
-            <a:r>
-              <a:rPr sz="1200">
-                <a:solidFill>
-                  <a:srgbClr val="F1F5F9"/>
-                </a:solidFill>
-                <a:latin typeface="Consolas"/>
-              </a:rPr>
-              <a:t>offset</a:t>
-            </a:r>
-            <a:r>
-              <a:rPr sz="1200">
-                <a:solidFill>
-                  <a:srgbClr val="F1F5F9"/>
-                </a:solidFill>
-                <a:latin typeface="Consolas"/>
-              </a:rPr>
-              <a:t> </a:t>
-            </a:r>
-            <a:r>
-              <a:rPr sz="1200">
-                <a:solidFill>
-                  <a:srgbClr val="F1F5F9"/>
-                </a:solidFill>
-                <a:latin typeface="Consolas"/>
-              </a:rPr>
-              <a:t>=</a:t>
-            </a:r>
-            <a:r>
-              <a:rPr sz="1200">
-                <a:solidFill>
-                  <a:srgbClr val="F1F5F9"/>
-                </a:solidFill>
-                <a:latin typeface="Consolas"/>
-              </a:rPr>
-              <a:t> </a:t>
-            </a:r>
-            <a:r>
-              <a:rPr sz="1200">
-                <a:solidFill>
-                  <a:srgbClr val="F1F5F9"/>
-                </a:solidFill>
-                <a:latin typeface="Consolas"/>
-              </a:rPr>
-              <a:t>circumference</a:t>
-            </a:r>
-            <a:r>
-              <a:rPr sz="1200">
-                <a:solidFill>
-                  <a:srgbClr val="F1F5F9"/>
-                </a:solidFill>
-                <a:latin typeface="Consolas"/>
-              </a:rPr>
-              <a:t> </a:t>
-            </a:r>
-            <a:r>
-              <a:rPr sz="1200">
-                <a:solidFill>
-                  <a:srgbClr val="F1F5F9"/>
-                </a:solidFill>
-                <a:latin typeface="Consolas"/>
-              </a:rPr>
-              <a:t>-</a:t>
-            </a:r>
-            <a:r>
-              <a:rPr sz="1200">
-                <a:solidFill>
-                  <a:srgbClr val="F1F5F9"/>
-                </a:solidFill>
-                <a:latin typeface="Consolas"/>
-              </a:rPr>
-              <a:t> </a:t>
-            </a:r>
-            <a:r>
-              <a:rPr sz="1200">
-                <a:solidFill>
-                  <a:srgbClr val="F1F5F9"/>
-                </a:solidFill>
-                <a:latin typeface="Consolas"/>
-              </a:rPr>
-              <a:t>(</a:t>
-            </a:r>
-            <a:r>
-              <a:rPr sz="1200">
-                <a:solidFill>
-                  <a:srgbClr val="F1F5F9"/>
-                </a:solidFill>
-                <a:latin typeface="Consolas"/>
-              </a:rPr>
-              <a:t>circumference</a:t>
-            </a:r>
-            <a:r>
-              <a:rPr sz="1200">
-                <a:solidFill>
-                  <a:srgbClr val="F1F5F9"/>
-                </a:solidFill>
-                <a:latin typeface="Consolas"/>
-              </a:rPr>
-              <a:t> </a:t>
-            </a:r>
-            <a:r>
-              <a:rPr sz="1200">
-                <a:solidFill>
-                  <a:srgbClr val="F1F5F9"/>
-                </a:solidFill>
-                <a:latin typeface="Consolas"/>
-              </a:rPr>
-              <a:t>*</a:t>
-            </a:r>
-            <a:r>
-              <a:rPr sz="1200">
-                <a:solidFill>
-                  <a:srgbClr val="F1F5F9"/>
-                </a:solidFill>
-                <a:latin typeface="Consolas"/>
-              </a:rPr>
-              <a:t> </a:t>
-            </a:r>
-            <a:r>
-              <a:rPr sz="1200">
-                <a:solidFill>
-                  <a:srgbClr val="F1F5F9"/>
-                </a:solidFill>
-                <a:latin typeface="Consolas"/>
-              </a:rPr>
-              <a:t>scoreInt</a:t>
-            </a:r>
-            <a:r>
-              <a:rPr sz="1200">
-                <a:solidFill>
-                  <a:srgbClr val="F1F5F9"/>
-                </a:solidFill>
-                <a:latin typeface="Consolas"/>
-              </a:rPr>
-              <a:t> </a:t>
-            </a:r>
-            <a:r>
-              <a:rPr sz="1200">
-                <a:solidFill>
-                  <a:srgbClr val="F1F5F9"/>
-                </a:solidFill>
-                <a:latin typeface="Consolas"/>
-              </a:rPr>
-              <a:t>/</a:t>
-            </a:r>
-            <a:r>
-              <a:rPr sz="1200">
-                <a:solidFill>
-                  <a:srgbClr val="F1F5F9"/>
-                </a:solidFill>
-                <a:latin typeface="Consolas"/>
-              </a:rPr>
-              <a:t> </a:t>
-            </a:r>
-            <a:r>
-              <a:rPr sz="1200">
-                <a:solidFill>
-                  <a:srgbClr val="818CF8"/>
-                </a:solidFill>
-                <a:latin typeface="Consolas"/>
-              </a:rPr>
-              <a:t>100</a:t>
-            </a:r>
-            <a:r>
-              <a:rPr sz="1200">
-                <a:solidFill>
-                  <a:srgbClr val="F1F5F9"/>
-                </a:solidFill>
-                <a:latin typeface="Consolas"/>
-              </a:rPr>
-              <a:t>);</a:t>
-            </a:r>
-          </a:p>
-          <a:p>
-            <a:pPr>
-              <a:spcAft>
-                <a:spcPts val="200"/>
-              </a:spcAft>
-            </a:pPr>
-            <a:r>
-              <a:rPr sz="1200">
-                <a:solidFill>
-                  <a:srgbClr val="38BDF8"/>
-                </a:solidFill>
-                <a:latin typeface="Consolas"/>
-              </a:rPr>
-              <a:t>circle</a:t>
-            </a:r>
-            <a:r>
-              <a:rPr sz="1200">
-                <a:solidFill>
-                  <a:srgbClr val="F1F5F9"/>
-                </a:solidFill>
-                <a:latin typeface="Consolas"/>
-              </a:rPr>
-              <a:t>.</a:t>
-            </a:r>
-            <a:r>
-              <a:rPr sz="1200">
-                <a:solidFill>
-                  <a:srgbClr val="F1F5F9"/>
-                </a:solidFill>
-                <a:latin typeface="Consolas"/>
-              </a:rPr>
-              <a:t>style</a:t>
-            </a:r>
-            <a:r>
-              <a:rPr sz="1200">
-                <a:solidFill>
-                  <a:srgbClr val="F1F5F9"/>
-                </a:solidFill>
-                <a:latin typeface="Consolas"/>
-              </a:rPr>
-              <a:t>.</a:t>
-            </a:r>
-            <a:r>
-              <a:rPr sz="1200">
-                <a:solidFill>
-                  <a:srgbClr val="F1F5F9"/>
-                </a:solidFill>
-                <a:latin typeface="Consolas"/>
-              </a:rPr>
-              <a:t>strokeDashoffset</a:t>
-            </a:r>
-            <a:r>
-              <a:rPr sz="1200">
-                <a:solidFill>
-                  <a:srgbClr val="F1F5F9"/>
-                </a:solidFill>
-                <a:latin typeface="Consolas"/>
-              </a:rPr>
-              <a:t> </a:t>
-            </a:r>
-            <a:r>
-              <a:rPr sz="1200">
-                <a:solidFill>
-                  <a:srgbClr val="F1F5F9"/>
-                </a:solidFill>
-                <a:latin typeface="Consolas"/>
-              </a:rPr>
-              <a:t>=</a:t>
-            </a:r>
-            <a:r>
-              <a:rPr sz="1200">
-                <a:solidFill>
-                  <a:srgbClr val="F1F5F9"/>
-                </a:solidFill>
-                <a:latin typeface="Consolas"/>
-              </a:rPr>
-              <a:t> </a:t>
-            </a:r>
-            <a:r>
-              <a:rPr sz="1200">
-                <a:solidFill>
-                  <a:srgbClr val="F1F5F9"/>
-                </a:solidFill>
-                <a:latin typeface="Consolas"/>
-              </a:rPr>
-              <a:t>offset</a:t>
-            </a:r>
-            <a:r>
-              <a:rPr sz="1200">
-                <a:solidFill>
-                  <a:srgbClr val="F1F5F9"/>
-                </a:solidFill>
-                <a:latin typeface="Consolas"/>
-              </a:rPr>
-              <a:t>;</a:t>
-            </a:r>
-          </a:p>
-          <a:p>
-            <a:pPr>
-              <a:spcAft>
-                <a:spcPts val="200"/>
-              </a:spcAft>
-            </a:pPr>
-            <a:r>
-              <a:rPr sz="1200">
-                <a:solidFill>
-                  <a:srgbClr val="38BDF8"/>
-                </a:solidFill>
-                <a:latin typeface="Consolas"/>
-              </a:rPr>
-              <a:t>circle</a:t>
-            </a:r>
-            <a:r>
-              <a:rPr sz="1200">
-                <a:solidFill>
-                  <a:srgbClr val="F1F5F9"/>
-                </a:solidFill>
-                <a:latin typeface="Consolas"/>
-              </a:rPr>
-              <a:t>.</a:t>
-            </a:r>
-            <a:r>
-              <a:rPr sz="1200">
-                <a:solidFill>
-                  <a:srgbClr val="F1F5F9"/>
-                </a:solidFill>
-                <a:latin typeface="Consolas"/>
-              </a:rPr>
-              <a:t>style</a:t>
-            </a:r>
-            <a:r>
-              <a:rPr sz="1200">
-                <a:solidFill>
-                  <a:srgbClr val="F1F5F9"/>
-                </a:solidFill>
-                <a:latin typeface="Consolas"/>
-              </a:rPr>
-              <a:t>.</a:t>
-            </a:r>
-            <a:r>
-              <a:rPr sz="1200">
-                <a:solidFill>
-                  <a:srgbClr val="F1F5F9"/>
-                </a:solidFill>
-                <a:latin typeface="Consolas"/>
-              </a:rPr>
-              <a:t>stroke</a:t>
-            </a:r>
-            <a:r>
-              <a:rPr sz="1200">
-                <a:solidFill>
-                  <a:srgbClr val="F1F5F9"/>
-                </a:solidFill>
-                <a:latin typeface="Consolas"/>
-              </a:rPr>
-              <a:t> </a:t>
-            </a:r>
-            <a:r>
-              <a:rPr sz="1200">
-                <a:solidFill>
-                  <a:srgbClr val="F1F5F9"/>
-                </a:solidFill>
-                <a:latin typeface="Consolas"/>
-              </a:rPr>
-              <a:t>=</a:t>
-            </a:r>
-            <a:r>
-              <a:rPr sz="1200">
-                <a:solidFill>
-                  <a:srgbClr val="F1F5F9"/>
-                </a:solidFill>
-                <a:latin typeface="Consolas"/>
-              </a:rPr>
-              <a:t> </a:t>
-            </a:r>
-            <a:r>
-              <a:rPr sz="1200">
-                <a:solidFill>
-                  <a:srgbClr val="F1F5F9"/>
-                </a:solidFill>
-                <a:latin typeface="Consolas"/>
-              </a:rPr>
-              <a:t>color</a:t>
-            </a:r>
-            <a:r>
-              <a:rPr sz="1200">
-                <a:solidFill>
-                  <a:srgbClr val="F1F5F9"/>
-                </a:solidFill>
-                <a:latin typeface="Consolas"/>
-              </a:rPr>
-              <a:t>;</a:t>
-            </a:r>
-          </a:p>
-          <a:p>
-            <a:pPr>
-              <a:spcAft>
-                <a:spcPts val="200"/>
-              </a:spcAft>
-            </a:pPr>
-            <a:r>
-              <a:rPr sz="1200">
-                <a:solidFill>
-                  <a:srgbClr val="38BDF8"/>
-                </a:solidFill>
-                <a:latin typeface="Consolas"/>
-              </a:rPr>
-              <a:t>circle</a:t>
-            </a:r>
-            <a:r>
-              <a:rPr sz="1200">
-                <a:solidFill>
-                  <a:srgbClr val="F1F5F9"/>
-                </a:solidFill>
-                <a:latin typeface="Consolas"/>
-              </a:rPr>
-              <a:t>.</a:t>
-            </a:r>
-            <a:r>
-              <a:rPr sz="1200">
-                <a:solidFill>
-                  <a:srgbClr val="F1F5F9"/>
-                </a:solidFill>
-                <a:latin typeface="Consolas"/>
-              </a:rPr>
-              <a:t>style</a:t>
-            </a:r>
-            <a:r>
-              <a:rPr sz="1200">
-                <a:solidFill>
-                  <a:srgbClr val="F1F5F9"/>
-                </a:solidFill>
-                <a:latin typeface="Consolas"/>
-              </a:rPr>
-              <a:t>.</a:t>
-            </a:r>
-            <a:r>
-              <a:rPr sz="1200">
-                <a:solidFill>
-                  <a:srgbClr val="F1F5F9"/>
-                </a:solidFill>
-                <a:latin typeface="Consolas"/>
-              </a:rPr>
-              <a:t>filter</a:t>
-            </a:r>
-            <a:r>
-              <a:rPr sz="1200">
-                <a:solidFill>
-                  <a:srgbClr val="F1F5F9"/>
-                </a:solidFill>
-                <a:latin typeface="Consolas"/>
-              </a:rPr>
-              <a:t> </a:t>
-            </a:r>
-            <a:r>
-              <a:rPr sz="1200">
-                <a:solidFill>
-                  <a:srgbClr val="F1F5F9"/>
-                </a:solidFill>
-                <a:latin typeface="Consolas"/>
-              </a:rPr>
-              <a:t>=</a:t>
-            </a:r>
-            <a:r>
-              <a:rPr sz="1200">
-                <a:solidFill>
-                  <a:srgbClr val="F1F5F9"/>
-                </a:solidFill>
-                <a:latin typeface="Consolas"/>
-              </a:rPr>
-              <a:t> </a:t>
-            </a:r>
-            <a:r>
-              <a:rPr sz="1200">
-                <a:solidFill>
-                  <a:srgbClr val="F1F5F9"/>
-                </a:solidFill>
-                <a:latin typeface="Consolas"/>
-              </a:rPr>
-              <a:t>`</a:t>
-            </a:r>
-            <a:r>
-              <a:rPr sz="1200">
-                <a:solidFill>
-                  <a:srgbClr val="F1F5F9"/>
-                </a:solidFill>
-                <a:latin typeface="Consolas"/>
-              </a:rPr>
-              <a:t>drop</a:t>
-            </a:r>
-            <a:r>
-              <a:rPr sz="1200">
-                <a:solidFill>
-                  <a:srgbClr val="F1F5F9"/>
-                </a:solidFill>
-                <a:latin typeface="Consolas"/>
-              </a:rPr>
-              <a:t>-</a:t>
-            </a:r>
-            <a:r>
-              <a:rPr sz="1200">
-                <a:solidFill>
-                  <a:srgbClr val="F1F5F9"/>
-                </a:solidFill>
-                <a:latin typeface="Consolas"/>
-              </a:rPr>
-              <a:t>shadow</a:t>
-            </a:r>
-            <a:r>
-              <a:rPr sz="1200">
-                <a:solidFill>
-                  <a:srgbClr val="F1F5F9"/>
-                </a:solidFill>
-                <a:latin typeface="Consolas"/>
-              </a:rPr>
-              <a:t>(</a:t>
-            </a:r>
-            <a:r>
-              <a:rPr sz="1200">
-                <a:solidFill>
-                  <a:srgbClr val="818CF8"/>
-                </a:solidFill>
-                <a:latin typeface="Consolas"/>
-              </a:rPr>
-              <a:t>0</a:t>
-            </a:r>
-            <a:r>
-              <a:rPr sz="1200">
-                <a:solidFill>
-                  <a:srgbClr val="F1F5F9"/>
-                </a:solidFill>
-                <a:latin typeface="Consolas"/>
-              </a:rPr>
-              <a:t> </a:t>
-            </a:r>
-            <a:r>
-              <a:rPr sz="1200">
-                <a:solidFill>
-                  <a:srgbClr val="818CF8"/>
-                </a:solidFill>
-                <a:latin typeface="Consolas"/>
-              </a:rPr>
-              <a:t>0</a:t>
-            </a:r>
-            <a:r>
-              <a:rPr sz="1200">
-                <a:solidFill>
-                  <a:srgbClr val="F1F5F9"/>
-                </a:solidFill>
-                <a:latin typeface="Consolas"/>
-              </a:rPr>
-              <a:t> </a:t>
-            </a:r>
-            <a:r>
-              <a:rPr sz="1200">
-                <a:solidFill>
-                  <a:srgbClr val="F1F5F9"/>
-                </a:solidFill>
-                <a:latin typeface="Consolas"/>
-              </a:rPr>
-              <a:t>8px</a:t>
-            </a:r>
-            <a:r>
-              <a:rPr sz="1200">
-                <a:solidFill>
-                  <a:srgbClr val="F1F5F9"/>
-                </a:solidFill>
-                <a:latin typeface="Consolas"/>
-              </a:rPr>
-              <a:t> </a:t>
-            </a:r>
-            <a:r>
-              <a:rPr sz="1200">
-                <a:solidFill>
-                  <a:srgbClr val="F1F5F9"/>
-                </a:solidFill>
-                <a:latin typeface="Consolas"/>
-              </a:rPr>
-              <a:t>${</a:t>
-            </a:r>
-            <a:r>
-              <a:rPr sz="1200">
-                <a:solidFill>
-                  <a:srgbClr val="F1F5F9"/>
-                </a:solidFill>
-                <a:latin typeface="Consolas"/>
-              </a:rPr>
-              <a:t>color</a:t>
-            </a:r>
-            <a:r>
-              <a:rPr sz="1200">
-                <a:solidFill>
-                  <a:srgbClr val="F1F5F9"/>
-                </a:solidFill>
-                <a:latin typeface="Consolas"/>
-              </a:rPr>
-              <a:t>}</a:t>
+              <a:t> 8px ${color}</a:t>
             </a:r>
             <a:r>
               <a:rPr sz="1200">
@@ -10297,7 +8059,7 @@
 </file>
 
 <file path=ppt/slides/slide27.xml><?xml version="1.0" encoding="utf-8"?>
-<p:sld xmlns:a="http://schemas.openxmlformats.org/drawingml/2006/main" xmlns:p="http://schemas.openxmlformats.org/presentationml/2006/main" xmlns:r="http://schemas.openxmlformats.org/officeDocument/2006/relationships">
+<p:sld xmlns:a="http://schemas.openxmlformats.org/drawingml/2006/main" xmlns:r="http://schemas.openxmlformats.org/officeDocument/2006/relationships" xmlns:p="http://schemas.openxmlformats.org/presentationml/2006/main">
   <p:cSld>
     <p:bg>
       <p:bgPr>
@@ -10313,7 +8075,14 @@
         <p:cNvGrpSpPr/>
         <p:nvPr/>
       </p:nvGrpSpPr>
-      <p:grpSpPr/>
+      <p:grpSpPr>
+        <a:xfrm>
+          <a:off x="0" y="0"/>
+          <a:ext cx="0" cy="0"/>
+          <a:chOff x="0" y="0"/>
+          <a:chExt cx="0" cy="0"/>
+        </a:xfrm>
+      </p:grpSpPr>
       <p:sp>
         <p:nvSpPr>
           <p:cNvPr id="2" name="TextBox 1"/>
@@ -10486,7 +8255,7 @@
 </file>
 
 <file path=ppt/slides/slide28.xml><?xml version="1.0" encoding="utf-8"?>
-<p:sld xmlns:a="http://schemas.openxmlformats.org/drawingml/2006/main" xmlns:p="http://schemas.openxmlformats.org/presentationml/2006/main" xmlns:r="http://schemas.openxmlformats.org/officeDocument/2006/relationships">
+<p:sld xmlns:a="http://schemas.openxmlformats.org/drawingml/2006/main" xmlns:r="http://schemas.openxmlformats.org/officeDocument/2006/relationships" xmlns:p="http://schemas.openxmlformats.org/presentationml/2006/main">
   <p:cSld>
     <p:bg>
       <p:bgPr>
@@ -10502,7 +8271,14 @@
         <p:cNvGrpSpPr/>
         <p:nvPr/>
       </p:nvGrpSpPr>
-      <p:grpSpPr/>
+      <p:grpSpPr>
+        <a:xfrm>
+          <a:off x="0" y="0"/>
+          <a:ext cx="0" cy="0"/>
+          <a:chOff x="0" y="0"/>
+          <a:chExt cx="0" cy="0"/>
+        </a:xfrm>
+      </p:grpSpPr>
       <p:sp>
         <p:nvSpPr>
           <p:cNvPr id="2" name="TextBox 1"/>
@@ -10680,16 +8456,16 @@
           </a:fontRef>
         </p:style>
         <p:txBody>
-          <a:bodyPr rtlCol="0" anchor="ctr" wrap="square" lIns="137160" tIns="137160" rIns="137160" bIns="137160"/>
-          <a:lstStyle/>
-          <a:p>
-            <a:pPr algn="ctr">
+          <a:bodyPr wrap="square" lIns="137160" tIns="137160" rIns="137160" bIns="137160" rtlCol="0" anchor="ctr"/>
+          <a:lstStyle/>
+          <a:p>
+            <a:pPr>
               <a:spcAft>
                 <a:spcPts val="200"/>
               </a:spcAft>
             </a:pPr>
             <a:r>
-              <a:rPr sz="1000" b="1">
+              <a:rPr sz="1000" b="1" dirty="0">
                 <a:solidFill>
                   <a:srgbClr val="F472B6"/>
                 </a:solidFill>
@@ -10698,7 +8474,7 @@
               <a:t>async</a:t>
             </a:r>
             <a:r>
-              <a:rPr sz="1000">
+              <a:rPr sz="1000" dirty="0">
                 <a:solidFill>
                   <a:srgbClr val="F1F5F9"/>
                 </a:solidFill>
@@ -10707,7 +8483,7 @@
               <a:t> </a:t>
             </a:r>
             <a:r>
-              <a:rPr sz="1000" b="1">
+              <a:rPr sz="1000" b="1" dirty="0">
                 <a:solidFill>
                   <a:srgbClr val="F472B6"/>
                 </a:solidFill>
@@ -10716,7 +8492,7 @@
               <a:t>function</a:t>
             </a:r>
             <a:r>
-              <a:rPr sz="1000">
+              <a:rPr sz="1000" dirty="0">
                 <a:solidFill>
                   <a:srgbClr val="F1F5F9"/>
                 </a:solidFill>
@@ -10725,7 +8501,7 @@
               <a:t> </a:t>
             </a:r>
             <a:r>
-              <a:rPr sz="1000">
+              <a:rPr sz="1000" dirty="0" err="1">
                 <a:solidFill>
                   <a:srgbClr val="F1F5F9"/>
                 </a:solidFill>
@@ -10734,16 +8510,111 @@
               <a:t>startScanner</a:t>
             </a:r>
             <a:r>
-              <a:rPr sz="1000">
-                <a:solidFill>
-                  <a:srgbClr val="F1F5F9"/>
-                </a:solidFill>
-                <a:latin typeface="Consolas"/>
-              </a:rPr>
-              <a:t>()</a:t>
-            </a:r>
-            <a:r>
-              <a:rPr sz="1000">
+              <a:rPr sz="1000" dirty="0">
+                <a:solidFill>
+                  <a:srgbClr val="F1F5F9"/>
+                </a:solidFill>
+                <a:latin typeface="Consolas"/>
+              </a:rPr>
+              <a:t>() {</a:t>
+            </a:r>
+          </a:p>
+          <a:p>
+            <a:pPr>
+              <a:spcAft>
+                <a:spcPts val="200"/>
+              </a:spcAft>
+            </a:pPr>
+            <a:r>
+              <a:rPr sz="1000" dirty="0">
+                <a:solidFill>
+                  <a:srgbClr val="F1F5F9"/>
+                </a:solidFill>
+                <a:latin typeface="Consolas"/>
+              </a:rPr>
+              <a:t>    </a:t>
+            </a:r>
+            <a:r>
+              <a:rPr sz="1000" b="1" dirty="0">
+                <a:solidFill>
+                  <a:srgbClr val="F472B6"/>
+                </a:solidFill>
+                <a:latin typeface="Consolas"/>
+              </a:rPr>
+              <a:t>const</a:t>
+            </a:r>
+            <a:r>
+              <a:rPr sz="1000" dirty="0">
+                <a:solidFill>
+                  <a:srgbClr val="F1F5F9"/>
+                </a:solidFill>
+                <a:latin typeface="Consolas"/>
+              </a:rPr>
+              <a:t> overlay = </a:t>
+            </a:r>
+            <a:r>
+              <a:rPr sz="1000" dirty="0" err="1">
+                <a:solidFill>
+                  <a:srgbClr val="38BDF8"/>
+                </a:solidFill>
+                <a:latin typeface="Consolas"/>
+              </a:rPr>
+              <a:t>document</a:t>
+            </a:r>
+            <a:r>
+              <a:rPr sz="1000" dirty="0" err="1">
+                <a:solidFill>
+                  <a:srgbClr val="F1F5F9"/>
+                </a:solidFill>
+                <a:latin typeface="Consolas"/>
+              </a:rPr>
+              <a:t>.getElementById</a:t>
+            </a:r>
+            <a:r>
+              <a:rPr sz="1000" dirty="0">
+                <a:solidFill>
+                  <a:srgbClr val="F1F5F9"/>
+                </a:solidFill>
+                <a:latin typeface="Consolas"/>
+              </a:rPr>
+              <a:t>('loader-overlay</a:t>
+            </a:r>
+            <a:r>
+              <a:rPr sz="1000" dirty="0">
+                <a:solidFill>
+                  <a:srgbClr val="FDBA74"/>
+                </a:solidFill>
+                <a:latin typeface="Consolas"/>
+              </a:rPr>
+              <a:t>');</a:t>
+            </a:r>
+          </a:p>
+          <a:p>
+            <a:pPr>
+              <a:spcAft>
+                <a:spcPts val="200"/>
+              </a:spcAft>
+            </a:pPr>
+            <a:r>
+              <a:rPr sz="1000" dirty="0">
+                <a:solidFill>
+                  <a:srgbClr val="F1F5F9"/>
+                </a:solidFill>
+                <a:latin typeface="Consolas"/>
+              </a:rPr>
+              <a:t>    </a:t>
+            </a:r>
+            <a:r>
+              <a:rPr sz="1000" b="1" dirty="0">
+                <a:solidFill>
+                  <a:srgbClr val="F472B6"/>
+                </a:solidFill>
+                <a:latin typeface="Consolas"/>
+              </a:rPr>
+              <a:t>const</a:t>
+            </a:r>
+            <a:r>
+              <a:rPr sz="1000" dirty="0">
                 <a:solidFill>
                   <a:srgbClr val="F1F5F9"/>
                 </a:solidFill>
@@ -10752,13 +8623,58 @@
               <a:t> </a:t>
             </a:r>
             <a:r>
-              <a:rPr sz="1000">
-                <a:solidFill>
-                  <a:srgbClr val="F1F5F9"/>
-                </a:solidFill>
-                <a:latin typeface="Consolas"/>
-              </a:rPr>
-              <a:t>{</a:t>
+              <a:rPr sz="1000" dirty="0" err="1">
+                <a:solidFill>
+                  <a:srgbClr val="F1F5F9"/>
+                </a:solidFill>
+                <a:latin typeface="Consolas"/>
+              </a:rPr>
+              <a:t>errorBox</a:t>
+            </a:r>
+            <a:r>
+              <a:rPr sz="1000" dirty="0">
+                <a:solidFill>
+                  <a:srgbClr val="F1F5F9"/>
+                </a:solidFill>
+                <a:latin typeface="Consolas"/>
+              </a:rPr>
+              <a:t> = </a:t>
+            </a:r>
+            <a:r>
+              <a:rPr sz="1000" dirty="0" err="1">
+                <a:solidFill>
+                  <a:srgbClr val="38BDF8"/>
+                </a:solidFill>
+                <a:latin typeface="Consolas"/>
+              </a:rPr>
+              <a:t>document</a:t>
+            </a:r>
+            <a:r>
+              <a:rPr sz="1000" dirty="0" err="1">
+                <a:solidFill>
+                  <a:srgbClr val="F1F5F9"/>
+                </a:solidFill>
+                <a:latin typeface="Consolas"/>
+              </a:rPr>
+              <a:t>.getElementById</a:t>
+            </a:r>
+            <a:r>
+              <a:rPr sz="1000" dirty="0">
+                <a:solidFill>
+                  <a:srgbClr val="F1F5F9"/>
+                </a:solidFill>
+                <a:latin typeface="Consolas"/>
+              </a:rPr>
+              <a:t>('error-box</a:t>
+            </a:r>
+            <a:r>
+              <a:rPr sz="1000" dirty="0">
+                <a:solidFill>
+                  <a:srgbClr val="FDBA74"/>
+                </a:solidFill>
+                <a:latin typeface="Consolas"/>
+              </a:rPr>
+              <a:t>');</a:t>
             </a:r>
           </a:p>
           <a:p>
@@ -10768,7 +8684,7 @@
               </a:spcAft>
             </a:pPr>
             <a:r>
-              <a:rPr sz="1000">
+              <a:rPr sz="1000" dirty="0">
                 <a:solidFill>
                   <a:srgbClr val="F1F5F9"/>
                 </a:solidFill>
@@ -10777,16 +8693,172 @@
               <a:t>    </a:t>
             </a:r>
             <a:r>
-              <a:rPr sz="1000" b="1">
+              <a:rPr sz="1000" dirty="0" err="1">
+                <a:solidFill>
+                  <a:srgbClr val="F1F5F9"/>
+                </a:solidFill>
+                <a:latin typeface="Consolas"/>
+              </a:rPr>
+              <a:t>errorBox.style.display</a:t>
+            </a:r>
+            <a:r>
+              <a:rPr sz="1000" dirty="0">
+                <a:solidFill>
+                  <a:srgbClr val="F1F5F9"/>
+                </a:solidFill>
+                <a:latin typeface="Consolas"/>
+              </a:rPr>
+              <a:t> = </a:t>
+            </a:r>
+            <a:r>
+              <a:rPr sz="1000" dirty="0">
+                <a:solidFill>
+                  <a:srgbClr val="FDBA74"/>
+                </a:solidFill>
+                <a:latin typeface="Consolas"/>
+              </a:rPr>
+              <a:t>'none'</a:t>
+            </a:r>
+            <a:r>
+              <a:rPr sz="1000" dirty="0">
+                <a:solidFill>
+                  <a:srgbClr val="F1F5F9"/>
+                </a:solidFill>
+                <a:latin typeface="Consolas"/>
+              </a:rPr>
+              <a:t>;</a:t>
+            </a:r>
+          </a:p>
+          <a:p>
+            <a:pPr>
+              <a:spcAft>
+                <a:spcPts val="200"/>
+              </a:spcAft>
+            </a:pPr>
+            <a:r>
+              <a:rPr sz="1000" dirty="0">
+                <a:solidFill>
+                  <a:srgbClr val="F1F5F9"/>
+                </a:solidFill>
+                <a:latin typeface="Consolas"/>
+              </a:rPr>
+              <a:t>    </a:t>
+            </a:r>
+            <a:r>
+              <a:rPr sz="1000" dirty="0" err="1">
+                <a:solidFill>
+                  <a:srgbClr val="F1F5F9"/>
+                </a:solidFill>
+                <a:latin typeface="Consolas"/>
+              </a:rPr>
+              <a:t>overlay.style.display</a:t>
+            </a:r>
+            <a:r>
+              <a:rPr sz="1000" dirty="0">
+                <a:solidFill>
+                  <a:srgbClr val="F1F5F9"/>
+                </a:solidFill>
+                <a:latin typeface="Consolas"/>
+              </a:rPr>
+              <a:t> = </a:t>
+            </a:r>
+            <a:r>
+              <a:rPr sz="1000" dirty="0">
+                <a:solidFill>
+                  <a:srgbClr val="FDBA74"/>
+                </a:solidFill>
+                <a:latin typeface="Consolas"/>
+              </a:rPr>
+              <a:t>'flex'</a:t>
+            </a:r>
+            <a:r>
+              <a:rPr sz="1000" dirty="0">
+                <a:solidFill>
+                  <a:srgbClr val="F1F5F9"/>
+                </a:solidFill>
+                <a:latin typeface="Consolas"/>
+              </a:rPr>
+              <a:t>;</a:t>
+            </a:r>
+          </a:p>
+          <a:p>
+            <a:pPr>
+              <a:spcAft>
+                <a:spcPts val="200"/>
+              </a:spcAft>
+            </a:pPr>
+            <a:r>
+              <a:rPr sz="1000" dirty="0">
+                <a:solidFill>
+                  <a:srgbClr val="F1F5F9"/>
+                </a:solidFill>
+                <a:latin typeface="Consolas"/>
+              </a:rPr>
+              <a:t>    </a:t>
+            </a:r>
+            <a:r>
+              <a:rPr sz="1000" b="1" dirty="0">
                 <a:solidFill>
                   <a:srgbClr val="F472B6"/>
                 </a:solidFill>
                 <a:latin typeface="Consolas"/>
               </a:rPr>
+              <a:t>try</a:t>
+            </a:r>
+            <a:r>
+              <a:rPr sz="1000" dirty="0">
+                <a:solidFill>
+                  <a:srgbClr val="F1F5F9"/>
+                </a:solidFill>
+                <a:latin typeface="Consolas"/>
+              </a:rPr>
+              <a:t> {</a:t>
+            </a:r>
+          </a:p>
+          <a:p>
+            <a:pPr>
+              <a:spcAft>
+                <a:spcPts val="200"/>
+              </a:spcAft>
+            </a:pPr>
+            <a:r>
+              <a:rPr sz="1000" dirty="0">
+                <a:solidFill>
+                  <a:srgbClr val="F1F5F9"/>
+                </a:solidFill>
+                <a:latin typeface="Consolas"/>
+              </a:rPr>
+              <a:t>        </a:t>
+            </a:r>
+            <a:r>
+              <a:rPr sz="1000" b="1" dirty="0">
+                <a:solidFill>
+                  <a:srgbClr val="F472B6"/>
+                </a:solidFill>
+                <a:latin typeface="Consolas"/>
+              </a:rPr>
               <a:t>const</a:t>
             </a:r>
             <a:r>
-              <a:rPr sz="1000">
+              <a:rPr sz="1000" dirty="0">
+                <a:solidFill>
+                  <a:srgbClr val="F1F5F9"/>
+                </a:solidFill>
+                <a:latin typeface="Consolas"/>
+              </a:rPr>
+              <a:t> t1 = </a:t>
+            </a:r>
+            <a:r>
+              <a:rPr sz="1000" b="1" dirty="0">
+                <a:solidFill>
+                  <a:srgbClr val="F472B6"/>
+                </a:solidFill>
+                <a:latin typeface="Consolas"/>
+              </a:rPr>
+              <a:t>await</a:t>
+            </a:r>
+            <a:r>
+              <a:rPr sz="1000" dirty="0">
                 <a:solidFill>
                   <a:srgbClr val="F1F5F9"/>
                 </a:solidFill>
@@ -10795,16 +8867,113 @@
               <a:t> </a:t>
             </a:r>
             <a:r>
-              <a:rPr sz="1000">
-                <a:solidFill>
-                  <a:srgbClr val="F1F5F9"/>
-                </a:solidFill>
-                <a:latin typeface="Consolas"/>
-              </a:rPr>
-              <a:t>overlay</a:t>
-            </a:r>
-            <a:r>
-              <a:rPr sz="1000">
+              <a:rPr sz="1000" dirty="0" err="1">
+                <a:solidFill>
+                  <a:srgbClr val="F1F5F9"/>
+                </a:solidFill>
+                <a:latin typeface="Consolas"/>
+              </a:rPr>
+              <a:t>extractText</a:t>
+            </a:r>
+            <a:r>
+              <a:rPr sz="1000" dirty="0">
+                <a:solidFill>
+                  <a:srgbClr val="F1F5F9"/>
+                </a:solidFill>
+                <a:latin typeface="Consolas"/>
+              </a:rPr>
+              <a:t>('file1</a:t>
+            </a:r>
+            <a:r>
+              <a:rPr sz="1000" dirty="0">
+                <a:solidFill>
+                  <a:srgbClr val="FDBA74"/>
+                </a:solidFill>
+                <a:latin typeface="Consolas"/>
+              </a:rPr>
+              <a:t>', '</a:t>
+            </a:r>
+            <a:r>
+              <a:rPr sz="1000" dirty="0">
+                <a:solidFill>
+                  <a:srgbClr val="F1F5F9"/>
+                </a:solidFill>
+                <a:latin typeface="Consolas"/>
+              </a:rPr>
+              <a:t>text1</a:t>
+            </a:r>
+            <a:r>
+              <a:rPr sz="1000" dirty="0">
+                <a:solidFill>
+                  <a:srgbClr val="FDBA74"/>
+                </a:solidFill>
+                <a:latin typeface="Consolas"/>
+              </a:rPr>
+              <a:t>', '</a:t>
+            </a:r>
+            <a:r>
+              <a:rPr sz="1000" dirty="0">
+                <a:solidFill>
+                  <a:srgbClr val="F1F5F9"/>
+                </a:solidFill>
+                <a:latin typeface="Consolas"/>
+              </a:rPr>
+              <a:t>Document A</a:t>
+            </a:r>
+            <a:r>
+              <a:rPr sz="1000" dirty="0">
+                <a:solidFill>
+                  <a:srgbClr val="FDBA74"/>
+                </a:solidFill>
+                <a:latin typeface="Consolas"/>
+              </a:rPr>
+              <a:t>');</a:t>
+            </a:r>
+          </a:p>
+          <a:p>
+            <a:pPr>
+              <a:spcAft>
+                <a:spcPts val="200"/>
+              </a:spcAft>
+            </a:pPr>
+            <a:r>
+              <a:rPr sz="1000" dirty="0">
+                <a:solidFill>
+                  <a:srgbClr val="F1F5F9"/>
+                </a:solidFill>
+                <a:latin typeface="Consolas"/>
+              </a:rPr>
+              <a:t>        </a:t>
+            </a:r>
+            <a:r>
+              <a:rPr sz="1000" b="1" dirty="0">
+                <a:solidFill>
+                  <a:srgbClr val="F472B6"/>
+                </a:solidFill>
+                <a:latin typeface="Consolas"/>
+              </a:rPr>
+              <a:t>const</a:t>
+            </a:r>
+            <a:r>
+              <a:rPr sz="1000" dirty="0">
+                <a:solidFill>
+                  <a:srgbClr val="F1F5F9"/>
+                </a:solidFill>
+                <a:latin typeface="Consolas"/>
+              </a:rPr>
+              <a:t> t2 = </a:t>
+            </a:r>
+            <a:r>
+              <a:rPr sz="1000" b="1" dirty="0">
+                <a:solidFill>
+                  <a:srgbClr val="F472B6"/>
+                </a:solidFill>
+                <a:latin typeface="Consolas"/>
+              </a:rPr>
+              <a:t>await</a:t>
+            </a:r>
+            <a:r>
+              <a:rPr sz="1000" dirty="0">
                 <a:solidFill>
                   <a:srgbClr val="F1F5F9"/>
                 </a:solidFill>
@@ -10813,93 +8982,66 @@
               <a:t> </a:t>
             </a:r>
             <a:r>
-              <a:rPr sz="1000">
-                <a:solidFill>
-                  <a:srgbClr val="F1F5F9"/>
-                </a:solidFill>
-                <a:latin typeface="Consolas"/>
-              </a:rPr>
-              <a:t>=</a:t>
-            </a:r>
-            <a:r>
-              <a:rPr sz="1000">
-                <a:solidFill>
-                  <a:srgbClr val="F1F5F9"/>
-                </a:solidFill>
-                <a:latin typeface="Consolas"/>
-              </a:rPr>
-              <a:t> </a:t>
-            </a:r>
-            <a:r>
-              <a:rPr sz="1000">
-                <a:solidFill>
-                  <a:srgbClr val="38BDF8"/>
-                </a:solidFill>
-                <a:latin typeface="Consolas"/>
-              </a:rPr>
-              <a:t>document</a:t>
-            </a:r>
-            <a:r>
-              <a:rPr sz="1000">
-                <a:solidFill>
-                  <a:srgbClr val="F1F5F9"/>
-                </a:solidFill>
-                <a:latin typeface="Consolas"/>
-              </a:rPr>
-              <a:t>.</a:t>
-            </a:r>
-            <a:r>
-              <a:rPr sz="1000">
-                <a:solidFill>
-                  <a:srgbClr val="F1F5F9"/>
-                </a:solidFill>
-                <a:latin typeface="Consolas"/>
-              </a:rPr>
-              <a:t>getElementById</a:t>
-            </a:r>
-            <a:r>
-              <a:rPr sz="1000">
-                <a:solidFill>
-                  <a:srgbClr val="F1F5F9"/>
-                </a:solidFill>
-                <a:latin typeface="Consolas"/>
-              </a:rPr>
-              <a:t>('</a:t>
-            </a:r>
-            <a:r>
-              <a:rPr sz="1000">
-                <a:solidFill>
-                  <a:srgbClr val="F1F5F9"/>
-                </a:solidFill>
-                <a:latin typeface="Consolas"/>
-              </a:rPr>
-              <a:t>loader</a:t>
-            </a:r>
-            <a:r>
-              <a:rPr sz="1000">
-                <a:solidFill>
-                  <a:srgbClr val="F1F5F9"/>
-                </a:solidFill>
-                <a:latin typeface="Consolas"/>
-              </a:rPr>
-              <a:t>-</a:t>
-            </a:r>
-            <a:r>
-              <a:rPr sz="1000">
-                <a:solidFill>
-                  <a:srgbClr val="F1F5F9"/>
-                </a:solidFill>
-                <a:latin typeface="Consolas"/>
-              </a:rPr>
-              <a:t>overlay</a:t>
-            </a:r>
-            <a:r>
-              <a:rPr sz="1000">
+              <a:rPr sz="1000" dirty="0" err="1">
+                <a:solidFill>
+                  <a:srgbClr val="F1F5F9"/>
+                </a:solidFill>
+                <a:latin typeface="Consolas"/>
+              </a:rPr>
+              <a:t>extractText</a:t>
+            </a:r>
+            <a:r>
+              <a:rPr sz="1000" dirty="0">
+                <a:solidFill>
+                  <a:srgbClr val="F1F5F9"/>
+                </a:solidFill>
+                <a:latin typeface="Consolas"/>
+              </a:rPr>
+              <a:t>('file2</a:t>
+            </a:r>
+            <a:r>
+              <a:rPr sz="1000" dirty="0">
                 <a:solidFill>
                   <a:srgbClr val="FDBA74"/>
                 </a:solidFill>
                 <a:latin typeface="Consolas"/>
               </a:rPr>
+              <a:t>', '</a:t>
+            </a:r>
+            <a:r>
+              <a:rPr sz="1000" dirty="0">
+                <a:solidFill>
+                  <a:srgbClr val="F1F5F9"/>
+                </a:solidFill>
+                <a:latin typeface="Consolas"/>
+              </a:rPr>
+              <a:t>text2</a:t>
+            </a:r>
+            <a:r>
+              <a:rPr sz="1000" dirty="0">
+                <a:solidFill>
+                  <a:srgbClr val="FDBA74"/>
+                </a:solidFill>
+                <a:latin typeface="Consolas"/>
+              </a:rPr>
+              <a:t>', '</a:t>
+            </a:r>
+            <a:r>
+              <a:rPr sz="1000" dirty="0">
+                <a:solidFill>
+                  <a:srgbClr val="F1F5F9"/>
+                </a:solidFill>
+                <a:latin typeface="Consolas"/>
+              </a:rPr>
+              <a:t>Document B</a:t>
+            </a:r>
+            <a:r>
+              <a:rPr sz="1000" dirty="0">
+                <a:solidFill>
+                  <a:srgbClr val="FDBA74"/>
+                </a:solidFill>
+                <a:latin typeface="Consolas"/>
+              </a:rPr>
               <a:t>');</a:t>
             </a:r>
           </a:p>
@@ -10910,139 +9052,83 @@
               </a:spcAft>
             </a:pPr>
             <a:r>
-              <a:rPr sz="1000">
-                <a:solidFill>
-                  <a:srgbClr val="F1F5F9"/>
-                </a:solidFill>
-                <a:latin typeface="Consolas"/>
-              </a:rPr>
-              <a:t>    </a:t>
-            </a:r>
-            <a:r>
-              <a:rPr sz="1000" b="1">
+              <a:rPr sz="1000" dirty="0">
+                <a:solidFill>
+                  <a:srgbClr val="F1F5F9"/>
+                </a:solidFill>
+                <a:latin typeface="Consolas"/>
+              </a:rPr>
+              <a:t>        </a:t>
+            </a:r>
+            <a:r>
+              <a:rPr sz="1000" b="1" dirty="0">
                 <a:solidFill>
                   <a:srgbClr val="F472B6"/>
                 </a:solidFill>
                 <a:latin typeface="Consolas"/>
               </a:rPr>
-              <a:t>const</a:t>
-            </a:r>
-            <a:r>
-              <a:rPr sz="1000">
-                <a:solidFill>
-                  <a:srgbClr val="F1F5F9"/>
-                </a:solidFill>
-                <a:latin typeface="Consolas"/>
-              </a:rPr>
-              <a:t> </a:t>
-            </a:r>
-            <a:r>
-              <a:rPr sz="1000">
-                <a:solidFill>
-                  <a:srgbClr val="F1F5F9"/>
-                </a:solidFill>
-                <a:latin typeface="Consolas"/>
-              </a:rPr>
-              <a:t>errorBox</a:t>
-            </a:r>
-            <a:r>
-              <a:rPr sz="1000">
-                <a:solidFill>
-                  <a:srgbClr val="F1F5F9"/>
-                </a:solidFill>
-                <a:latin typeface="Consolas"/>
-              </a:rPr>
-              <a:t> </a:t>
-            </a:r>
-            <a:r>
-              <a:rPr sz="1000">
-                <a:solidFill>
-                  <a:srgbClr val="F1F5F9"/>
-                </a:solidFill>
-                <a:latin typeface="Consolas"/>
-              </a:rPr>
-              <a:t>=</a:t>
-            </a:r>
-            <a:r>
-              <a:rPr sz="1000">
-                <a:solidFill>
-                  <a:srgbClr val="F1F5F9"/>
-                </a:solidFill>
-                <a:latin typeface="Consolas"/>
-              </a:rPr>
-              <a:t> </a:t>
-            </a:r>
-            <a:r>
-              <a:rPr sz="1000">
-                <a:solidFill>
-                  <a:srgbClr val="38BDF8"/>
-                </a:solidFill>
-                <a:latin typeface="Consolas"/>
-              </a:rPr>
-              <a:t>document</a:t>
-            </a:r>
-            <a:r>
-              <a:rPr sz="1000">
-                <a:solidFill>
-                  <a:srgbClr val="F1F5F9"/>
-                </a:solidFill>
-                <a:latin typeface="Consolas"/>
-              </a:rPr>
-              <a:t>.</a:t>
-            </a:r>
-            <a:r>
-              <a:rPr sz="1000">
-                <a:solidFill>
-                  <a:srgbClr val="F1F5F9"/>
-                </a:solidFill>
-                <a:latin typeface="Consolas"/>
-              </a:rPr>
-              <a:t>getElementById</a:t>
-            </a:r>
-            <a:r>
-              <a:rPr sz="1000">
-                <a:solidFill>
-                  <a:srgbClr val="F1F5F9"/>
-                </a:solidFill>
-                <a:latin typeface="Consolas"/>
-              </a:rPr>
-              <a:t>('</a:t>
-            </a:r>
-            <a:r>
-              <a:rPr sz="1000">
-                <a:solidFill>
-                  <a:srgbClr val="F1F5F9"/>
-                </a:solidFill>
-                <a:latin typeface="Consolas"/>
-              </a:rPr>
-              <a:t>error</a:t>
-            </a:r>
-            <a:r>
-              <a:rPr sz="1000">
-                <a:solidFill>
-                  <a:srgbClr val="F1F5F9"/>
-                </a:solidFill>
-                <a:latin typeface="Consolas"/>
-              </a:rPr>
-              <a:t>-</a:t>
-            </a:r>
-            <a:r>
-              <a:rPr sz="1000">
-                <a:solidFill>
-                  <a:srgbClr val="F1F5F9"/>
-                </a:solidFill>
-                <a:latin typeface="Consolas"/>
-              </a:rPr>
-              <a:t>box</a:t>
-            </a:r>
-            <a:r>
-              <a:rPr sz="1000">
+              <a:t>if</a:t>
+            </a:r>
+            <a:r>
+              <a:rPr sz="1000" dirty="0">
+                <a:solidFill>
+                  <a:srgbClr val="F1F5F9"/>
+                </a:solidFill>
+                <a:latin typeface="Consolas"/>
+              </a:rPr>
+              <a:t> (t1.trim() &amp;&amp; !t2.trim()) {</a:t>
+            </a:r>
+          </a:p>
+          <a:p>
+            <a:pPr>
+              <a:spcAft>
+                <a:spcPts val="200"/>
+              </a:spcAft>
+            </a:pPr>
+            <a:r>
+              <a:rPr sz="1000" dirty="0">
+                <a:solidFill>
+                  <a:srgbClr val="F1F5F9"/>
+                </a:solidFill>
+                <a:latin typeface="Consolas"/>
+              </a:rPr>
+              <a:t>            </a:t>
+            </a:r>
+            <a:r>
+              <a:rPr sz="1000" dirty="0" err="1">
+                <a:solidFill>
+                  <a:srgbClr val="F1F5F9"/>
+                </a:solidFill>
+                <a:latin typeface="Consolas"/>
+              </a:rPr>
+              <a:t>renderSingleScannerResult</a:t>
+            </a:r>
+            <a:r>
+              <a:rPr sz="1000" dirty="0">
+                <a:solidFill>
+                  <a:srgbClr val="F1F5F9"/>
+                </a:solidFill>
+                <a:latin typeface="Consolas"/>
+              </a:rPr>
+              <a:t>('A</a:t>
+            </a:r>
+            <a:r>
+              <a:rPr sz="1000" dirty="0">
                 <a:solidFill>
                   <a:srgbClr val="FDBA74"/>
                 </a:solidFill>
                 <a:latin typeface="Consolas"/>
               </a:rPr>
-              <a:t>');</a:t>
+              <a:t>',</a:t>
+            </a:r>
+            <a:r>
+              <a:rPr sz="1000" dirty="0">
+                <a:solidFill>
+                  <a:srgbClr val="F1F5F9"/>
+                </a:solidFill>
+                <a:latin typeface="Consolas"/>
+              </a:rPr>
+              <a:t> t1, file1);</a:t>
             </a:r>
           </a:p>
           <a:p>
@@ -11052,103 +9138,31 @@
               </a:spcAft>
             </a:pPr>
             <a:r>
-              <a:rPr sz="1000">
-                <a:solidFill>
-                  <a:srgbClr val="F1F5F9"/>
-                </a:solidFill>
-                <a:latin typeface="Consolas"/>
-              </a:rPr>
-              <a:t>    </a:t>
-            </a:r>
-            <a:r>
-              <a:rPr sz="1000">
-                <a:solidFill>
-                  <a:srgbClr val="F1F5F9"/>
-                </a:solidFill>
-                <a:latin typeface="Consolas"/>
-              </a:rPr>
-              <a:t>errorBox</a:t>
-            </a:r>
-            <a:r>
-              <a:rPr sz="1000">
-                <a:solidFill>
-                  <a:srgbClr val="F1F5F9"/>
-                </a:solidFill>
-                <a:latin typeface="Consolas"/>
-              </a:rPr>
-              <a:t>.</a:t>
-            </a:r>
-            <a:r>
-              <a:rPr sz="1000">
-                <a:solidFill>
-                  <a:srgbClr val="F1F5F9"/>
-                </a:solidFill>
-                <a:latin typeface="Consolas"/>
-              </a:rPr>
-              <a:t>style</a:t>
-            </a:r>
-            <a:r>
-              <a:rPr sz="1000">
-                <a:solidFill>
-                  <a:srgbClr val="F1F5F9"/>
-                </a:solidFill>
-                <a:latin typeface="Consolas"/>
-              </a:rPr>
-              <a:t>.</a:t>
-            </a:r>
-            <a:r>
-              <a:rPr sz="1000">
-                <a:solidFill>
-                  <a:srgbClr val="F1F5F9"/>
-                </a:solidFill>
-                <a:latin typeface="Consolas"/>
-              </a:rPr>
-              <a:t>display</a:t>
-            </a:r>
-            <a:r>
-              <a:rPr sz="1000">
-                <a:solidFill>
-                  <a:srgbClr val="F1F5F9"/>
-                </a:solidFill>
-                <a:latin typeface="Consolas"/>
-              </a:rPr>
-              <a:t> </a:t>
-            </a:r>
-            <a:r>
-              <a:rPr sz="1000">
-                <a:solidFill>
-                  <a:srgbClr val="F1F5F9"/>
-                </a:solidFill>
-                <a:latin typeface="Consolas"/>
-              </a:rPr>
-              <a:t>=</a:t>
-            </a:r>
-            <a:r>
-              <a:rPr sz="1000">
-                <a:solidFill>
-                  <a:srgbClr val="F1F5F9"/>
-                </a:solidFill>
-                <a:latin typeface="Consolas"/>
-              </a:rPr>
-              <a:t> </a:t>
-            </a:r>
-            <a:r>
-              <a:rPr sz="1000">
-                <a:solidFill>
-                  <a:srgbClr val="FDBA74"/>
-                </a:solidFill>
-                <a:latin typeface="Consolas"/>
-              </a:rPr>
-              <a:t>'none'</a:t>
-            </a:r>
-            <a:r>
-              <a:rPr sz="1000">
-                <a:solidFill>
-                  <a:srgbClr val="F1F5F9"/>
-                </a:solidFill>
-                <a:latin typeface="Consolas"/>
-              </a:rPr>
-              <a:t>;</a:t>
+              <a:rPr sz="1000" dirty="0">
+                <a:solidFill>
+                  <a:srgbClr val="F1F5F9"/>
+                </a:solidFill>
+                <a:latin typeface="Consolas"/>
+              </a:rPr>
+              <a:t>        } </a:t>
+            </a:r>
+            <a:r>
+              <a:rPr sz="1000" b="1" dirty="0">
+                <a:solidFill>
+                  <a:srgbClr val="F472B6"/>
+                </a:solidFill>
+                <a:latin typeface="Consolas"/>
+              </a:rPr>
+              <a:t>else</a:t>
+            </a:r>
+            <a:r>
+              <a:rPr sz="1000" dirty="0">
+                <a:solidFill>
+                  <a:srgbClr val="F1F5F9"/>
+                </a:solidFill>
+                <a:latin typeface="Consolas"/>
+              </a:rPr>
+              <a:t> {</a:t>
             </a:r>
           </a:p>
           <a:p>
@@ -11158,103 +9172,31 @@
               </a:spcAft>
             </a:pPr>
             <a:r>
-              <a:rPr sz="1000">
-                <a:solidFill>
-                  <a:srgbClr val="F1F5F9"/>
-                </a:solidFill>
-                <a:latin typeface="Consolas"/>
-              </a:rPr>
-              <a:t>    </a:t>
-            </a:r>
-            <a:r>
-              <a:rPr sz="1000">
-                <a:solidFill>
-                  <a:srgbClr val="F1F5F9"/>
-                </a:solidFill>
-                <a:latin typeface="Consolas"/>
-              </a:rPr>
-              <a:t>overlay</a:t>
-            </a:r>
-            <a:r>
-              <a:rPr sz="1000">
-                <a:solidFill>
-                  <a:srgbClr val="F1F5F9"/>
-                </a:solidFill>
-                <a:latin typeface="Consolas"/>
-              </a:rPr>
-              <a:t>.</a:t>
-            </a:r>
-            <a:r>
-              <a:rPr sz="1000">
-                <a:solidFill>
-                  <a:srgbClr val="F1F5F9"/>
-                </a:solidFill>
-                <a:latin typeface="Consolas"/>
-              </a:rPr>
-              <a:t>style</a:t>
-            </a:r>
-            <a:r>
-              <a:rPr sz="1000">
-                <a:solidFill>
-                  <a:srgbClr val="F1F5F9"/>
-                </a:solidFill>
-                <a:latin typeface="Consolas"/>
-              </a:rPr>
-              <a:t>.</a:t>
-            </a:r>
-            <a:r>
-              <a:rPr sz="1000">
-                <a:solidFill>
-                  <a:srgbClr val="F1F5F9"/>
-                </a:solidFill>
-                <a:latin typeface="Consolas"/>
-              </a:rPr>
-              <a:t>display</a:t>
-            </a:r>
-            <a:r>
-              <a:rPr sz="1000">
-                <a:solidFill>
-                  <a:srgbClr val="F1F5F9"/>
-                </a:solidFill>
-                <a:latin typeface="Consolas"/>
-              </a:rPr>
-              <a:t> </a:t>
-            </a:r>
-            <a:r>
-              <a:rPr sz="1000">
-                <a:solidFill>
-                  <a:srgbClr val="F1F5F9"/>
-                </a:solidFill>
-                <a:latin typeface="Consolas"/>
-              </a:rPr>
-              <a:t>=</a:t>
-            </a:r>
-            <a:r>
-              <a:rPr sz="1000">
-                <a:solidFill>
-                  <a:srgbClr val="F1F5F9"/>
-                </a:solidFill>
-                <a:latin typeface="Consolas"/>
-              </a:rPr>
-              <a:t> </a:t>
-            </a:r>
-            <a:r>
-              <a:rPr sz="1000">
-                <a:solidFill>
-                  <a:srgbClr val="FDBA74"/>
-                </a:solidFill>
-                <a:latin typeface="Consolas"/>
-              </a:rPr>
-              <a:t>'flex'</a:t>
-            </a:r>
-            <a:r>
-              <a:rPr sz="1000">
-                <a:solidFill>
-                  <a:srgbClr val="F1F5F9"/>
-                </a:solidFill>
-                <a:latin typeface="Consolas"/>
-              </a:rPr>
-              <a:t>;</a:t>
+              <a:rPr sz="1000" dirty="0">
+                <a:solidFill>
+                  <a:srgbClr val="F1F5F9"/>
+                </a:solidFill>
+                <a:latin typeface="Consolas"/>
+              </a:rPr>
+              <a:t>            </a:t>
+            </a:r>
+            <a:r>
+              <a:rPr sz="1000" dirty="0" err="1">
+                <a:solidFill>
+                  <a:srgbClr val="F1F5F9"/>
+                </a:solidFill>
+                <a:latin typeface="Consolas"/>
+              </a:rPr>
+              <a:t>renderComparisonResult</a:t>
+            </a:r>
+            <a:r>
+              <a:rPr sz="1000" dirty="0">
+                <a:solidFill>
+                  <a:srgbClr val="F1F5F9"/>
+                </a:solidFill>
+                <a:latin typeface="Consolas"/>
+              </a:rPr>
+              <a:t>(t1, t2);</a:t>
             </a:r>
           </a:p>
           <a:p>
@@ -11264,40 +9206,47 @@
               </a:spcAft>
             </a:pPr>
             <a:r>
-              <a:rPr sz="1000">
-                <a:solidFill>
-                  <a:srgbClr val="F1F5F9"/>
-                </a:solidFill>
-                <a:latin typeface="Consolas"/>
-              </a:rPr>
-              <a:t>    </a:t>
-            </a:r>
-            <a:r>
-              <a:rPr sz="1000" b="1">
+              <a:rPr sz="1000" dirty="0">
+                <a:solidFill>
+                  <a:srgbClr val="F1F5F9"/>
+                </a:solidFill>
+                <a:latin typeface="Consolas"/>
+              </a:rPr>
+              <a:t>        }</a:t>
+            </a:r>
+          </a:p>
+          <a:p>
+            <a:pPr>
+              <a:spcAft>
+                <a:spcPts val="200"/>
+              </a:spcAft>
+            </a:pPr>
+            <a:r>
+              <a:rPr sz="1000" dirty="0">
+                <a:solidFill>
+                  <a:srgbClr val="F1F5F9"/>
+                </a:solidFill>
+                <a:latin typeface="Consolas"/>
+              </a:rPr>
+              <a:t>    } </a:t>
+            </a:r>
+            <a:r>
+              <a:rPr sz="1000" b="1" dirty="0">
                 <a:solidFill>
                   <a:srgbClr val="F472B6"/>
                 </a:solidFill>
                 <a:latin typeface="Consolas"/>
               </a:rPr>
-              <a:t>try</a:t>
-            </a:r>
-            <a:r>
-              <a:rPr sz="1000">
-                <a:solidFill>
-                  <a:srgbClr val="F1F5F9"/>
-                </a:solidFill>
-                <a:latin typeface="Consolas"/>
-              </a:rPr>
-              <a:t> </a:t>
-            </a:r>
-            <a:r>
-              <a:rPr sz="1000">
-                <a:solidFill>
-                  <a:srgbClr val="F1F5F9"/>
-                </a:solidFill>
-                <a:latin typeface="Consolas"/>
-              </a:rPr>
-              <a:t>{</a:t>
+              <a:t>catch</a:t>
+            </a:r>
+            <a:r>
+              <a:rPr sz="1000" dirty="0">
+                <a:solidFill>
+                  <a:srgbClr val="F1F5F9"/>
+                </a:solidFill>
+                <a:latin typeface="Consolas"/>
+              </a:rPr>
+              <a:t> (err) {</a:t>
             </a:r>
           </a:p>
           <a:p>
@@ -11307,7 +9256,7 @@
               </a:spcAft>
             </a:pPr>
             <a:r>
-              <a:rPr sz="1000">
+              <a:rPr sz="1000" dirty="0">
                 <a:solidFill>
                   <a:srgbClr val="F1F5F9"/>
                 </a:solidFill>
@@ -11316,166 +9265,22 @@
               <a:t>        </a:t>
             </a:r>
             <a:r>
-              <a:rPr sz="1000" b="1">
-                <a:solidFill>
-                  <a:srgbClr val="F472B6"/>
-                </a:solidFill>
-                <a:latin typeface="Consolas"/>
-              </a:rPr>
-              <a:t>const</a:t>
-            </a:r>
-            <a:r>
-              <a:rPr sz="1000">
-                <a:solidFill>
-                  <a:srgbClr val="F1F5F9"/>
-                </a:solidFill>
-                <a:latin typeface="Consolas"/>
-              </a:rPr>
-              <a:t> </a:t>
-            </a:r>
-            <a:r>
-              <a:rPr sz="1000">
-                <a:solidFill>
-                  <a:srgbClr val="F1F5F9"/>
-                </a:solidFill>
-                <a:latin typeface="Consolas"/>
-              </a:rPr>
-              <a:t>t1</a:t>
-            </a:r>
-            <a:r>
-              <a:rPr sz="1000">
-                <a:solidFill>
-                  <a:srgbClr val="F1F5F9"/>
-                </a:solidFill>
-                <a:latin typeface="Consolas"/>
-              </a:rPr>
-              <a:t> </a:t>
-            </a:r>
-            <a:r>
-              <a:rPr sz="1000">
-                <a:solidFill>
-                  <a:srgbClr val="F1F5F9"/>
-                </a:solidFill>
-                <a:latin typeface="Consolas"/>
-              </a:rPr>
-              <a:t>=</a:t>
-            </a:r>
-            <a:r>
-              <a:rPr sz="1000">
-                <a:solidFill>
-                  <a:srgbClr val="F1F5F9"/>
-                </a:solidFill>
-                <a:latin typeface="Consolas"/>
-              </a:rPr>
-              <a:t> </a:t>
-            </a:r>
-            <a:r>
-              <a:rPr sz="1000" b="1">
-                <a:solidFill>
-                  <a:srgbClr val="F472B6"/>
-                </a:solidFill>
-                <a:latin typeface="Consolas"/>
-              </a:rPr>
-              <a:t>await</a:t>
-            </a:r>
-            <a:r>
-              <a:rPr sz="1000">
-                <a:solidFill>
-                  <a:srgbClr val="F1F5F9"/>
-                </a:solidFill>
-                <a:latin typeface="Consolas"/>
-              </a:rPr>
-              <a:t> </a:t>
-            </a:r>
-            <a:r>
-              <a:rPr sz="1000">
-                <a:solidFill>
-                  <a:srgbClr val="F1F5F9"/>
-                </a:solidFill>
-                <a:latin typeface="Consolas"/>
-              </a:rPr>
-              <a:t>extractText</a:t>
-            </a:r>
-            <a:r>
-              <a:rPr sz="1000">
-                <a:solidFill>
-                  <a:srgbClr val="F1F5F9"/>
-                </a:solidFill>
-                <a:latin typeface="Consolas"/>
-              </a:rPr>
-              <a:t>('</a:t>
-            </a:r>
-            <a:r>
-              <a:rPr sz="1000">
-                <a:solidFill>
-                  <a:srgbClr val="F1F5F9"/>
-                </a:solidFill>
-                <a:latin typeface="Consolas"/>
-              </a:rPr>
-              <a:t>file1</a:t>
-            </a:r>
-            <a:r>
-              <a:rPr sz="1000">
-                <a:solidFill>
-                  <a:srgbClr val="FDBA74"/>
-                </a:solidFill>
-                <a:latin typeface="Consolas"/>
-              </a:rPr>
-              <a:t>', '</a:t>
-            </a:r>
-            <a:r>
-              <a:rPr sz="1000">
-                <a:solidFill>
-                  <a:srgbClr val="F1F5F9"/>
-                </a:solidFill>
-                <a:latin typeface="Consolas"/>
-              </a:rPr>
-              <a:t>text1</a:t>
-            </a:r>
-            <a:r>
-              <a:rPr sz="1000">
-                <a:solidFill>
-                  <a:srgbClr val="FDBA74"/>
-                </a:solidFill>
-                <a:latin typeface="Consolas"/>
-              </a:rPr>
-              <a:t>', '</a:t>
-            </a:r>
-            <a:r>
-              <a:rPr sz="1000">
-                <a:solidFill>
-                  <a:srgbClr val="F1F5F9"/>
-                </a:solidFill>
-                <a:latin typeface="Consolas"/>
-              </a:rPr>
-              <a:t>Document</a:t>
-            </a:r>
-            <a:r>
-              <a:rPr sz="1000">
-                <a:solidFill>
-                  <a:srgbClr val="F1F5F9"/>
-                </a:solidFill>
-                <a:latin typeface="Consolas"/>
-              </a:rPr>
-              <a:t> </a:t>
-            </a:r>
-            <a:r>
-              <a:rPr sz="1000">
-                <a:solidFill>
-                  <a:srgbClr val="F1F5F9"/>
-                </a:solidFill>
-                <a:latin typeface="Consolas"/>
-              </a:rPr>
-              <a:t>A</a:t>
-            </a:r>
-            <a:r>
-              <a:rPr sz="1000">
-                <a:solidFill>
-                  <a:srgbClr val="FDBA74"/>
-                </a:solidFill>
-                <a:latin typeface="Consolas"/>
-              </a:rPr>
-              <a:t>');</a:t>
+              <a:rPr sz="1000" dirty="0" err="1">
+                <a:solidFill>
+                  <a:srgbClr val="F1F5F9"/>
+                </a:solidFill>
+                <a:latin typeface="Consolas"/>
+              </a:rPr>
+              <a:t>errorBox.innerText</a:t>
+            </a:r>
+            <a:r>
+              <a:rPr sz="1000" dirty="0">
+                <a:solidFill>
+                  <a:srgbClr val="F1F5F9"/>
+                </a:solidFill>
+                <a:latin typeface="Consolas"/>
+              </a:rPr>
+              <a:t> = err;</a:t>
             </a:r>
           </a:p>
           <a:p>
@@ -11485,175 +9290,13 @@
               </a:spcAft>
             </a:pPr>
             <a:r>
-              <a:rPr sz="1000">
-                <a:solidFill>
-                  <a:srgbClr val="F1F5F9"/>
-                </a:solidFill>
-                <a:latin typeface="Consolas"/>
-              </a:rPr>
-              <a:t>        </a:t>
-            </a:r>
-            <a:r>
-              <a:rPr sz="1000" b="1">
-                <a:solidFill>
-                  <a:srgbClr val="F472B6"/>
-                </a:solidFill>
-                <a:latin typeface="Consolas"/>
-              </a:rPr>
-              <a:t>const</a:t>
-            </a:r>
-            <a:r>
-              <a:rPr sz="1000">
-                <a:solidFill>
-                  <a:srgbClr val="F1F5F9"/>
-                </a:solidFill>
-                <a:latin typeface="Consolas"/>
-              </a:rPr>
-              <a:t> </a:t>
-            </a:r>
-            <a:r>
-              <a:rPr sz="1000">
-                <a:solidFill>
-                  <a:srgbClr val="F1F5F9"/>
-                </a:solidFill>
-                <a:latin typeface="Consolas"/>
-              </a:rPr>
-              <a:t>t2</a:t>
-            </a:r>
-            <a:r>
-              <a:rPr sz="1000">
-                <a:solidFill>
-                  <a:srgbClr val="F1F5F9"/>
-                </a:solidFill>
-                <a:latin typeface="Consolas"/>
-              </a:rPr>
-              <a:t> </a:t>
-            </a:r>
-            <a:r>
-              <a:rPr sz="1000">
-                <a:solidFill>
-                  <a:srgbClr val="F1F5F9"/>
-                </a:solidFill>
-                <a:latin typeface="Consolas"/>
-              </a:rPr>
-              <a:t>=</a:t>
-            </a:r>
-            <a:r>
-              <a:rPr sz="1000">
-                <a:solidFill>
-                  <a:srgbClr val="F1F5F9"/>
-                </a:solidFill>
-                <a:latin typeface="Consolas"/>
-              </a:rPr>
-              <a:t> </a:t>
-            </a:r>
-            <a:r>
-              <a:rPr sz="1000" b="1">
-                <a:solidFill>
-                  <a:srgbClr val="F472B6"/>
-                </a:solidFill>
-                <a:latin typeface="Consolas"/>
-              </a:rPr>
-              <a:t>await</a:t>
-            </a:r>
-            <a:r>
-              <a:rPr sz="1000">
-                <a:solidFill>
-                  <a:srgbClr val="F1F5F9"/>
-                </a:solidFill>
-                <a:latin typeface="Consolas"/>
-              </a:rPr>
-              <a:t> </a:t>
-            </a:r>
-            <a:r>
-              <a:rPr sz="1000">
-                <a:solidFill>
-                  <a:srgbClr val="F1F5F9"/>
-                </a:solidFill>
-                <a:latin typeface="Consolas"/>
-              </a:rPr>
-              <a:t>extractText</a:t>
-            </a:r>
-            <a:r>
-              <a:rPr sz="1000">
-                <a:solidFill>
-                  <a:srgbClr val="F1F5F9"/>
-                </a:solidFill>
-                <a:latin typeface="Consolas"/>
-              </a:rPr>
-              <a:t>('</a:t>
-            </a:r>
-            <a:r>
-              <a:rPr sz="1000">
-                <a:solidFill>
-                  <a:srgbClr val="F1F5F9"/>
-                </a:solidFill>
-                <a:latin typeface="Consolas"/>
-              </a:rPr>
-              <a:t>file2</a:t>
-            </a:r>
-            <a:r>
-              <a:rPr sz="1000">
-                <a:solidFill>
-                  <a:srgbClr val="FDBA74"/>
-                </a:solidFill>
-                <a:latin typeface="Consolas"/>
-              </a:rPr>
-              <a:t>', '</a:t>
-            </a:r>
-            <a:r>
-              <a:rPr sz="1000">
-                <a:solidFill>
-                  <a:srgbClr val="F1F5F9"/>
-                </a:solidFill>
-                <a:latin typeface="Consolas"/>
-              </a:rPr>
-              <a:t>text2</a:t>
-            </a:r>
-            <a:r>
-              <a:rPr sz="1000">
-                <a:solidFill>
-                  <a:srgbClr val="FDBA74"/>
-                </a:solidFill>
-                <a:latin typeface="Consolas"/>
-              </a:rPr>
-              <a:t>', '</a:t>
-            </a:r>
-            <a:r>
-              <a:rPr sz="1000">
-                <a:solidFill>
-                  <a:srgbClr val="F1F5F9"/>
-                </a:solidFill>
-                <a:latin typeface="Consolas"/>
-              </a:rPr>
-              <a:t>Document</a:t>
-            </a:r>
-            <a:r>
-              <a:rPr sz="1000">
-                <a:solidFill>
-                  <a:srgbClr val="F1F5F9"/>
-                </a:solidFill>
-                <a:latin typeface="Consolas"/>
-              </a:rPr>
-              <a:t> </a:t>
-            </a:r>
-            <a:r>
-              <a:rPr sz="1000">
-                <a:solidFill>
-                  <a:srgbClr val="F1F5F9"/>
-                </a:solidFill>
-                <a:latin typeface="Consolas"/>
-              </a:rPr>
-              <a:t>B</a:t>
-            </a:r>
-            <a:r>
-              <a:rPr sz="1000">
-                <a:solidFill>
-                  <a:srgbClr val="FDBA74"/>
-                </a:solidFill>
-                <a:latin typeface="Consolas"/>
-              </a:rPr>
-              <a:t>');</a:t>
+              <a:rPr sz="1000" dirty="0">
+                <a:solidFill>
+                  <a:srgbClr val="F1F5F9"/>
+                </a:solidFill>
+                <a:latin typeface="Consolas"/>
+              </a:rPr>
+              <a:t>    }</a:t>
             </a:r>
           </a:p>
           <a:p>
@@ -11663,657 +9306,7 @@
               </a:spcAft>
             </a:pPr>
             <a:r>
-              <a:rPr sz="1000">
-                <a:solidFill>
-                  <a:srgbClr val="F1F5F9"/>
-                </a:solidFill>
-                <a:latin typeface="Consolas"/>
-              </a:rPr>
-              <a:t>        </a:t>
-            </a:r>
-            <a:r>
-              <a:rPr sz="1000" b="1">
-                <a:solidFill>
-                  <a:srgbClr val="F472B6"/>
-                </a:solidFill>
-                <a:latin typeface="Consolas"/>
-              </a:rPr>
-              <a:t>if</a:t>
-            </a:r>
-            <a:r>
-              <a:rPr sz="1000">
-                <a:solidFill>
-                  <a:srgbClr val="F1F5F9"/>
-                </a:solidFill>
-                <a:latin typeface="Consolas"/>
-              </a:rPr>
-              <a:t> </a:t>
-            </a:r>
-            <a:r>
-              <a:rPr sz="1000">
-                <a:solidFill>
-                  <a:srgbClr val="F1F5F9"/>
-                </a:solidFill>
-                <a:latin typeface="Consolas"/>
-              </a:rPr>
-              <a:t>(</a:t>
-            </a:r>
-            <a:r>
-              <a:rPr sz="1000">
-                <a:solidFill>
-                  <a:srgbClr val="F1F5F9"/>
-                </a:solidFill>
-                <a:latin typeface="Consolas"/>
-              </a:rPr>
-              <a:t>t1</a:t>
-            </a:r>
-            <a:r>
-              <a:rPr sz="1000">
-                <a:solidFill>
-                  <a:srgbClr val="F1F5F9"/>
-                </a:solidFill>
-                <a:latin typeface="Consolas"/>
-              </a:rPr>
-              <a:t>.</a:t>
-            </a:r>
-            <a:r>
-              <a:rPr sz="1000">
-                <a:solidFill>
-                  <a:srgbClr val="F1F5F9"/>
-                </a:solidFill>
-                <a:latin typeface="Consolas"/>
-              </a:rPr>
-              <a:t>trim</a:t>
-            </a:r>
-            <a:r>
-              <a:rPr sz="1000">
-                <a:solidFill>
-                  <a:srgbClr val="F1F5F9"/>
-                </a:solidFill>
-                <a:latin typeface="Consolas"/>
-              </a:rPr>
-              <a:t>()</a:t>
-            </a:r>
-            <a:r>
-              <a:rPr sz="1000">
-                <a:solidFill>
-                  <a:srgbClr val="F1F5F9"/>
-                </a:solidFill>
-                <a:latin typeface="Consolas"/>
-              </a:rPr>
-              <a:t> </a:t>
-            </a:r>
-            <a:r>
-              <a:rPr sz="1000">
-                <a:solidFill>
-                  <a:srgbClr val="F1F5F9"/>
-                </a:solidFill>
-                <a:latin typeface="Consolas"/>
-              </a:rPr>
-              <a:t>&amp;&amp;</a:t>
-            </a:r>
-            <a:r>
-              <a:rPr sz="1000">
-                <a:solidFill>
-                  <a:srgbClr val="F1F5F9"/>
-                </a:solidFill>
-                <a:latin typeface="Consolas"/>
-              </a:rPr>
-              <a:t> </a:t>
-            </a:r>
-            <a:r>
-              <a:rPr sz="1000">
-                <a:solidFill>
-                  <a:srgbClr val="F1F5F9"/>
-                </a:solidFill>
-                <a:latin typeface="Consolas"/>
-              </a:rPr>
-              <a:t>!</a:t>
-            </a:r>
-            <a:r>
-              <a:rPr sz="1000">
-                <a:solidFill>
-                  <a:srgbClr val="F1F5F9"/>
-                </a:solidFill>
-                <a:latin typeface="Consolas"/>
-              </a:rPr>
-              <a:t>t2</a:t>
-            </a:r>
-            <a:r>
-              <a:rPr sz="1000">
-                <a:solidFill>
-                  <a:srgbClr val="F1F5F9"/>
-                </a:solidFill>
-                <a:latin typeface="Consolas"/>
-              </a:rPr>
-              <a:t>.</a:t>
-            </a:r>
-            <a:r>
-              <a:rPr sz="1000">
-                <a:solidFill>
-                  <a:srgbClr val="F1F5F9"/>
-                </a:solidFill>
-                <a:latin typeface="Consolas"/>
-              </a:rPr>
-              <a:t>trim</a:t>
-            </a:r>
-            <a:r>
-              <a:rPr sz="1000">
-                <a:solidFill>
-                  <a:srgbClr val="F1F5F9"/>
-                </a:solidFill>
-                <a:latin typeface="Consolas"/>
-              </a:rPr>
-              <a:t>())</a:t>
-            </a:r>
-            <a:r>
-              <a:rPr sz="1000">
-                <a:solidFill>
-                  <a:srgbClr val="F1F5F9"/>
-                </a:solidFill>
-                <a:latin typeface="Consolas"/>
-              </a:rPr>
-              <a:t> </a:t>
-            </a:r>
-            <a:r>
-              <a:rPr sz="1000">
-                <a:solidFill>
-                  <a:srgbClr val="F1F5F9"/>
-                </a:solidFill>
-                <a:latin typeface="Consolas"/>
-              </a:rPr>
-              <a:t>{</a:t>
-            </a:r>
-          </a:p>
-          <a:p>
-            <a:pPr>
-              <a:spcAft>
-                <a:spcPts val="200"/>
-              </a:spcAft>
-            </a:pPr>
-            <a:r>
-              <a:rPr sz="1000">
-                <a:solidFill>
-                  <a:srgbClr val="F1F5F9"/>
-                </a:solidFill>
-                <a:latin typeface="Consolas"/>
-              </a:rPr>
-              <a:t>            </a:t>
-            </a:r>
-            <a:r>
-              <a:rPr sz="1000">
-                <a:solidFill>
-                  <a:srgbClr val="F1F5F9"/>
-                </a:solidFill>
-                <a:latin typeface="Consolas"/>
-              </a:rPr>
-              <a:t>renderSingleScannerResult</a:t>
-            </a:r>
-            <a:r>
-              <a:rPr sz="1000">
-                <a:solidFill>
-                  <a:srgbClr val="F1F5F9"/>
-                </a:solidFill>
-                <a:latin typeface="Consolas"/>
-              </a:rPr>
-              <a:t>('</a:t>
-            </a:r>
-            <a:r>
-              <a:rPr sz="1000">
-                <a:solidFill>
-                  <a:srgbClr val="F1F5F9"/>
-                </a:solidFill>
-                <a:latin typeface="Consolas"/>
-              </a:rPr>
-              <a:t>A</a:t>
-            </a:r>
-            <a:r>
-              <a:rPr sz="1000">
-                <a:solidFill>
-                  <a:srgbClr val="FDBA74"/>
-                </a:solidFill>
-                <a:latin typeface="Consolas"/>
-              </a:rPr>
-              <a:t>',</a:t>
-            </a:r>
-            <a:r>
-              <a:rPr sz="1000">
-                <a:solidFill>
-                  <a:srgbClr val="F1F5F9"/>
-                </a:solidFill>
-                <a:latin typeface="Consolas"/>
-              </a:rPr>
-              <a:t> </a:t>
-            </a:r>
-            <a:r>
-              <a:rPr sz="1000">
-                <a:solidFill>
-                  <a:srgbClr val="F1F5F9"/>
-                </a:solidFill>
-                <a:latin typeface="Consolas"/>
-              </a:rPr>
-              <a:t>t1</a:t>
-            </a:r>
-            <a:r>
-              <a:rPr sz="1000">
-                <a:solidFill>
-                  <a:srgbClr val="F1F5F9"/>
-                </a:solidFill>
-                <a:latin typeface="Consolas"/>
-              </a:rPr>
-              <a:t>,</a:t>
-            </a:r>
-            <a:r>
-              <a:rPr sz="1000">
-                <a:solidFill>
-                  <a:srgbClr val="F1F5F9"/>
-                </a:solidFill>
-                <a:latin typeface="Consolas"/>
-              </a:rPr>
-              <a:t> </a:t>
-            </a:r>
-            <a:r>
-              <a:rPr sz="1000">
-                <a:solidFill>
-                  <a:srgbClr val="F1F5F9"/>
-                </a:solidFill>
-                <a:latin typeface="Consolas"/>
-              </a:rPr>
-              <a:t>file1</a:t>
-            </a:r>
-            <a:r>
-              <a:rPr sz="1000">
-                <a:solidFill>
-                  <a:srgbClr val="F1F5F9"/>
-                </a:solidFill>
-                <a:latin typeface="Consolas"/>
-              </a:rPr>
-              <a:t>);</a:t>
-            </a:r>
-          </a:p>
-          <a:p>
-            <a:pPr>
-              <a:spcAft>
-                <a:spcPts val="200"/>
-              </a:spcAft>
-            </a:pPr>
-            <a:r>
-              <a:rPr sz="1000">
-                <a:solidFill>
-                  <a:srgbClr val="F1F5F9"/>
-                </a:solidFill>
-                <a:latin typeface="Consolas"/>
-              </a:rPr>
-              <a:t>        </a:t>
-            </a:r>
-            <a:r>
-              <a:rPr sz="1000">
-                <a:solidFill>
-                  <a:srgbClr val="F1F5F9"/>
-                </a:solidFill>
-                <a:latin typeface="Consolas"/>
-              </a:rPr>
-              <a:t>}</a:t>
-            </a:r>
-            <a:r>
-              <a:rPr sz="1000">
-                <a:solidFill>
-                  <a:srgbClr val="F1F5F9"/>
-                </a:solidFill>
-                <a:latin typeface="Consolas"/>
-              </a:rPr>
-              <a:t> </a:t>
-            </a:r>
-            <a:r>
-              <a:rPr sz="1000" b="1">
-                <a:solidFill>
-                  <a:srgbClr val="F472B6"/>
-                </a:solidFill>
-                <a:latin typeface="Consolas"/>
-              </a:rPr>
-              <a:t>else</a:t>
-            </a:r>
-            <a:r>
-              <a:rPr sz="1000">
-                <a:solidFill>
-                  <a:srgbClr val="F1F5F9"/>
-                </a:solidFill>
-                <a:latin typeface="Consolas"/>
-              </a:rPr>
-              <a:t> </a:t>
-            </a:r>
-            <a:r>
-              <a:rPr sz="1000">
-                <a:solidFill>
-                  <a:srgbClr val="F1F5F9"/>
-                </a:solidFill>
-                <a:latin typeface="Consolas"/>
-              </a:rPr>
-              <a:t>{</a:t>
-            </a:r>
-          </a:p>
-          <a:p>
-            <a:pPr>
-              <a:spcAft>
-                <a:spcPts val="200"/>
-              </a:spcAft>
-            </a:pPr>
-            <a:r>
-              <a:rPr sz="1000">
-                <a:solidFill>
-                  <a:srgbClr val="F1F5F9"/>
-                </a:solidFill>
-                <a:latin typeface="Consolas"/>
-              </a:rPr>
-              <a:t>            </a:t>
-            </a:r>
-            <a:r>
-              <a:rPr sz="1000">
-                <a:solidFill>
-                  <a:srgbClr val="F1F5F9"/>
-                </a:solidFill>
-                <a:latin typeface="Consolas"/>
-              </a:rPr>
-              <a:t>renderComparisonResult</a:t>
-            </a:r>
-            <a:r>
-              <a:rPr sz="1000">
-                <a:solidFill>
-                  <a:srgbClr val="F1F5F9"/>
-                </a:solidFill>
-                <a:latin typeface="Consolas"/>
-              </a:rPr>
-              <a:t>(</a:t>
-            </a:r>
-            <a:r>
-              <a:rPr sz="1000">
-                <a:solidFill>
-                  <a:srgbClr val="F1F5F9"/>
-                </a:solidFill>
-                <a:latin typeface="Consolas"/>
-              </a:rPr>
-              <a:t>t1</a:t>
-            </a:r>
-            <a:r>
-              <a:rPr sz="1000">
-                <a:solidFill>
-                  <a:srgbClr val="F1F5F9"/>
-                </a:solidFill>
-                <a:latin typeface="Consolas"/>
-              </a:rPr>
-              <a:t>,</a:t>
-            </a:r>
-            <a:r>
-              <a:rPr sz="1000">
-                <a:solidFill>
-                  <a:srgbClr val="F1F5F9"/>
-                </a:solidFill>
-                <a:latin typeface="Consolas"/>
-              </a:rPr>
-              <a:t> </a:t>
-            </a:r>
-            <a:r>
-              <a:rPr sz="1000">
-                <a:solidFill>
-                  <a:srgbClr val="F1F5F9"/>
-                </a:solidFill>
-                <a:latin typeface="Consolas"/>
-              </a:rPr>
-              <a:t>t2</a:t>
-            </a:r>
-            <a:r>
-              <a:rPr sz="1000">
-                <a:solidFill>
-                  <a:srgbClr val="F1F5F9"/>
-                </a:solidFill>
-                <a:latin typeface="Consolas"/>
-              </a:rPr>
-              <a:t>);</a:t>
-            </a:r>
-          </a:p>
-          <a:p>
-            <a:pPr>
-              <a:spcAft>
-                <a:spcPts val="200"/>
-              </a:spcAft>
-            </a:pPr>
-            <a:r>
-              <a:rPr sz="1000">
-                <a:solidFill>
-                  <a:srgbClr val="F1F5F9"/>
-                </a:solidFill>
-                <a:latin typeface="Consolas"/>
-              </a:rPr>
-              <a:t>        </a:t>
-            </a:r>
-            <a:r>
-              <a:rPr sz="1000">
-                <a:solidFill>
-                  <a:srgbClr val="F1F5F9"/>
-                </a:solidFill>
-                <a:latin typeface="Consolas"/>
-              </a:rPr>
-              <a:t>}</a:t>
-            </a:r>
-          </a:p>
-          <a:p>
-            <a:pPr>
-              <a:spcAft>
-                <a:spcPts val="200"/>
-              </a:spcAft>
-            </a:pPr>
-            <a:r>
-              <a:rPr sz="1000">
-                <a:solidFill>
-                  <a:srgbClr val="F1F5F9"/>
-                </a:solidFill>
-                <a:latin typeface="Consolas"/>
-              </a:rPr>
-              <a:t>    </a:t>
-            </a:r>
-            <a:r>
-              <a:rPr sz="1000">
-                <a:solidFill>
-                  <a:srgbClr val="F1F5F9"/>
-                </a:solidFill>
-                <a:latin typeface="Consolas"/>
-              </a:rPr>
-              <a:t>}</a:t>
-            </a:r>
-            <a:r>
-              <a:rPr sz="1000">
-                <a:solidFill>
-                  <a:srgbClr val="F1F5F9"/>
-                </a:solidFill>
-                <a:latin typeface="Consolas"/>
-              </a:rPr>
-              <a:t> </a:t>
-            </a:r>
-            <a:r>
-              <a:rPr sz="1000" b="1">
-                <a:solidFill>
-                  <a:srgbClr val="F472B6"/>
-                </a:solidFill>
-                <a:latin typeface="Consolas"/>
-              </a:rPr>
-              <a:t>catch</a:t>
-            </a:r>
-            <a:r>
-              <a:rPr sz="1000">
-                <a:solidFill>
-                  <a:srgbClr val="F1F5F9"/>
-                </a:solidFill>
-                <a:latin typeface="Consolas"/>
-              </a:rPr>
-              <a:t> </a:t>
-            </a:r>
-            <a:r>
-              <a:rPr sz="1000">
-                <a:solidFill>
-                  <a:srgbClr val="F1F5F9"/>
-                </a:solidFill>
-                <a:latin typeface="Consolas"/>
-              </a:rPr>
-              <a:t>(</a:t>
-            </a:r>
-            <a:r>
-              <a:rPr sz="1000">
-                <a:solidFill>
-                  <a:srgbClr val="F1F5F9"/>
-                </a:solidFill>
-                <a:latin typeface="Consolas"/>
-              </a:rPr>
-              <a:t>err</a:t>
-            </a:r>
-            <a:r>
-              <a:rPr sz="1000">
-                <a:solidFill>
-                  <a:srgbClr val="F1F5F9"/>
-                </a:solidFill>
-                <a:latin typeface="Consolas"/>
-              </a:rPr>
-              <a:t>)</a:t>
-            </a:r>
-            <a:r>
-              <a:rPr sz="1000">
-                <a:solidFill>
-                  <a:srgbClr val="F1F5F9"/>
-                </a:solidFill>
-                <a:latin typeface="Consolas"/>
-              </a:rPr>
-              <a:t> </a:t>
-            </a:r>
-            <a:r>
-              <a:rPr sz="1000">
-                <a:solidFill>
-                  <a:srgbClr val="F1F5F9"/>
-                </a:solidFill>
-                <a:latin typeface="Consolas"/>
-              </a:rPr>
-              <a:t>{</a:t>
-            </a:r>
-          </a:p>
-          <a:p>
-            <a:pPr>
-              <a:spcAft>
-                <a:spcPts val="200"/>
-              </a:spcAft>
-            </a:pPr>
-            <a:r>
-              <a:rPr sz="1000">
-                <a:solidFill>
-                  <a:srgbClr val="F1F5F9"/>
-                </a:solidFill>
-                <a:latin typeface="Consolas"/>
-              </a:rPr>
-              <a:t>        </a:t>
-            </a:r>
-            <a:r>
-              <a:rPr sz="1000">
-                <a:solidFill>
-                  <a:srgbClr val="F1F5F9"/>
-                </a:solidFill>
-                <a:latin typeface="Consolas"/>
-              </a:rPr>
-              <a:t>errorBox</a:t>
-            </a:r>
-            <a:r>
-              <a:rPr sz="1000">
-                <a:solidFill>
-                  <a:srgbClr val="F1F5F9"/>
-                </a:solidFill>
-                <a:latin typeface="Consolas"/>
-              </a:rPr>
-              <a:t>.</a:t>
-            </a:r>
-            <a:r>
-              <a:rPr sz="1000">
-                <a:solidFill>
-                  <a:srgbClr val="F1F5F9"/>
-                </a:solidFill>
-                <a:latin typeface="Consolas"/>
-              </a:rPr>
-              <a:t>innerText</a:t>
-            </a:r>
-            <a:r>
-              <a:rPr sz="1000">
-                <a:solidFill>
-                  <a:srgbClr val="F1F5F9"/>
-                </a:solidFill>
-                <a:latin typeface="Consolas"/>
-              </a:rPr>
-              <a:t> </a:t>
-            </a:r>
-            <a:r>
-              <a:rPr sz="1000">
-                <a:solidFill>
-                  <a:srgbClr val="F1F5F9"/>
-                </a:solidFill>
-                <a:latin typeface="Consolas"/>
-              </a:rPr>
-              <a:t>=</a:t>
-            </a:r>
-            <a:r>
-              <a:rPr sz="1000">
-                <a:solidFill>
-                  <a:srgbClr val="F1F5F9"/>
-                </a:solidFill>
-                <a:latin typeface="Consolas"/>
-              </a:rPr>
-              <a:t> </a:t>
-            </a:r>
-            <a:r>
-              <a:rPr sz="1000">
-                <a:solidFill>
-                  <a:srgbClr val="F1F5F9"/>
-                </a:solidFill>
-                <a:latin typeface="Consolas"/>
-              </a:rPr>
-              <a:t>err</a:t>
-            </a:r>
-            <a:r>
-              <a:rPr sz="1000">
-                <a:solidFill>
-                  <a:srgbClr val="F1F5F9"/>
-                </a:solidFill>
-                <a:latin typeface="Consolas"/>
-              </a:rPr>
-              <a:t>;</a:t>
-            </a:r>
-          </a:p>
-          <a:p>
-            <a:pPr>
-              <a:spcAft>
-                <a:spcPts val="200"/>
-              </a:spcAft>
-            </a:pPr>
-            <a:r>
-              <a:rPr sz="1000">
-                <a:solidFill>
-                  <a:srgbClr val="F1F5F9"/>
-                </a:solidFill>
-                <a:latin typeface="Consolas"/>
-              </a:rPr>
-              <a:t>    </a:t>
-            </a:r>
-            <a:r>
-              <a:rPr sz="1000">
-                <a:solidFill>
-                  <a:srgbClr val="F1F5F9"/>
-                </a:solidFill>
-                <a:latin typeface="Consolas"/>
-              </a:rPr>
-              <a:t>}</a:t>
-            </a:r>
-          </a:p>
-          <a:p>
-            <a:pPr>
-              <a:spcAft>
-                <a:spcPts val="200"/>
-              </a:spcAft>
-            </a:pPr>
-            <a:r>
-              <a:rPr sz="1000">
+              <a:rPr sz="1000" dirty="0">
                 <a:solidFill>
                   <a:srgbClr val="F1F5F9"/>
                 </a:solidFill>
@@ -12333,7 +9326,7 @@
 </file>
 
 <file path=ppt/slides/slide29.xml><?xml version="1.0" encoding="utf-8"?>
-<p:sld xmlns:a="http://schemas.openxmlformats.org/drawingml/2006/main" xmlns:p="http://schemas.openxmlformats.org/presentationml/2006/main" xmlns:r="http://schemas.openxmlformats.org/officeDocument/2006/relationships">
+<p:sld xmlns:a="http://schemas.openxmlformats.org/drawingml/2006/main" xmlns:r="http://schemas.openxmlformats.org/officeDocument/2006/relationships" xmlns:p="http://schemas.openxmlformats.org/presentationml/2006/main">
   <p:cSld>
     <p:bg>
       <p:bgPr>
@@ -12349,7 +9342,14 @@
         <p:cNvGrpSpPr/>
         <p:nvPr/>
       </p:nvGrpSpPr>
-      <p:grpSpPr/>
+      <p:grpSpPr>
+        <a:xfrm>
+          <a:off x="0" y="0"/>
+          <a:ext cx="0" cy="0"/>
+          <a:chOff x="0" y="0"/>
+          <a:chExt cx="0" cy="0"/>
+        </a:xfrm>
+      </p:grpSpPr>
       <p:sp>
         <p:nvSpPr>
           <p:cNvPr id="2" name="TextBox 1"/>
@@ -12506,7 +9506,7 @@
 </file>
 
 <file path=ppt/slides/slide3.xml><?xml version="1.0" encoding="utf-8"?>
-<p:sld xmlns:a="http://schemas.openxmlformats.org/drawingml/2006/main" xmlns:p="http://schemas.openxmlformats.org/presentationml/2006/main" xmlns:r="http://schemas.openxmlformats.org/officeDocument/2006/relationships">
+<p:sld xmlns:a="http://schemas.openxmlformats.org/drawingml/2006/main" xmlns:r="http://schemas.openxmlformats.org/officeDocument/2006/relationships" xmlns:p="http://schemas.openxmlformats.org/presentationml/2006/main">
   <p:cSld>
     <p:bg>
       <p:bgPr>
@@ -12522,7 +9522,14 @@
         <p:cNvGrpSpPr/>
         <p:nvPr/>
       </p:nvGrpSpPr>
-      <p:grpSpPr/>
+      <p:grpSpPr>
+        <a:xfrm>
+          <a:off x="0" y="0"/>
+          <a:ext cx="0" cy="0"/>
+          <a:chOff x="0" y="0"/>
+          <a:chExt cx="0" cy="0"/>
+        </a:xfrm>
+      </p:grpSpPr>
       <p:sp>
         <p:nvSpPr>
           <p:cNvPr id="2" name="TextBox 1"/>
@@ -12695,7 +9702,7 @@
 </file>
 
 <file path=ppt/slides/slide30.xml><?xml version="1.0" encoding="utf-8"?>
-<p:sld xmlns:a="http://schemas.openxmlformats.org/drawingml/2006/main" xmlns:p="http://schemas.openxmlformats.org/presentationml/2006/main" xmlns:r="http://schemas.openxmlformats.org/officeDocument/2006/relationships">
+<p:sld xmlns:a="http://schemas.openxmlformats.org/drawingml/2006/main" xmlns:r="http://schemas.openxmlformats.org/officeDocument/2006/relationships" xmlns:p="http://schemas.openxmlformats.org/presentationml/2006/main">
   <p:cSld>
     <p:bg>
       <p:bgPr>
@@ -12711,7 +9718,14 @@
         <p:cNvGrpSpPr/>
         <p:nvPr/>
       </p:nvGrpSpPr>
-      <p:grpSpPr/>
+      <p:grpSpPr>
+        <a:xfrm>
+          <a:off x="0" y="0"/>
+          <a:ext cx="0" cy="0"/>
+          <a:chOff x="0" y="0"/>
+          <a:chExt cx="0" cy="0"/>
+        </a:xfrm>
+      </p:grpSpPr>
       <p:sp>
         <p:nvSpPr>
           <p:cNvPr id="2" name="TextBox 1"/>
@@ -12892,7 +9906,7 @@
 </file>
 
 <file path=ppt/slides/slide31.xml><?xml version="1.0" encoding="utf-8"?>
-<p:sld xmlns:a="http://schemas.openxmlformats.org/drawingml/2006/main" xmlns:p="http://schemas.openxmlformats.org/presentationml/2006/main" xmlns:r="http://schemas.openxmlformats.org/officeDocument/2006/relationships">
+<p:sld xmlns:a="http://schemas.openxmlformats.org/drawingml/2006/main" xmlns:r="http://schemas.openxmlformats.org/officeDocument/2006/relationships" xmlns:p="http://schemas.openxmlformats.org/presentationml/2006/main">
   <p:cSld>
     <p:bg>
       <p:bgPr>
@@ -12908,7 +9922,14 @@
         <p:cNvGrpSpPr/>
         <p:nvPr/>
       </p:nvGrpSpPr>
-      <p:grpSpPr/>
+      <p:grpSpPr>
+        <a:xfrm>
+          <a:off x="0" y="0"/>
+          <a:ext cx="0" cy="0"/>
+          <a:chOff x="0" y="0"/>
+          <a:chExt cx="0" cy="0"/>
+        </a:xfrm>
+      </p:grpSpPr>
       <p:sp>
         <p:nvSpPr>
           <p:cNvPr id="2" name="TextBox 1"/>
@@ -13041,7 +10062,7 @@
 </file>
 
 <file path=ppt/slides/slide32.xml><?xml version="1.0" encoding="utf-8"?>
-<p:sld xmlns:a="http://schemas.openxmlformats.org/drawingml/2006/main" xmlns:p="http://schemas.openxmlformats.org/presentationml/2006/main" xmlns:r="http://schemas.openxmlformats.org/officeDocument/2006/relationships">
+<p:sld xmlns:a="http://schemas.openxmlformats.org/drawingml/2006/main" xmlns:r="http://schemas.openxmlformats.org/officeDocument/2006/relationships" xmlns:p="http://schemas.openxmlformats.org/presentationml/2006/main">
   <p:cSld>
     <p:bg>
       <p:bgPr>
@@ -13057,7 +10078,14 @@
         <p:cNvGrpSpPr/>
         <p:nvPr/>
       </p:nvGrpSpPr>
-      <p:grpSpPr/>
+      <p:grpSpPr>
+        <a:xfrm>
+          <a:off x="0" y="0"/>
+          <a:ext cx="0" cy="0"/>
+          <a:chOff x="0" y="0"/>
+          <a:chExt cx="0" cy="0"/>
+        </a:xfrm>
+      </p:grpSpPr>
       <p:sp>
         <p:nvSpPr>
           <p:cNvPr id="2" name="TextBox 1"/>
@@ -13188,7 +10216,7 @@
 </file>
 
 <file path=ppt/slides/slide4.xml><?xml version="1.0" encoding="utf-8"?>
-<p:sld xmlns:a="http://schemas.openxmlformats.org/drawingml/2006/main" xmlns:p="http://schemas.openxmlformats.org/presentationml/2006/main" xmlns:r="http://schemas.openxmlformats.org/officeDocument/2006/relationships">
+<p:sld xmlns:a="http://schemas.openxmlformats.org/drawingml/2006/main" xmlns:r="http://schemas.openxmlformats.org/officeDocument/2006/relationships" xmlns:p="http://schemas.openxmlformats.org/presentationml/2006/main">
   <p:cSld>
     <p:bg>
       <p:bgPr>
@@ -13204,7 +10232,14 @@
         <p:cNvGrpSpPr/>
         <p:nvPr/>
       </p:nvGrpSpPr>
-      <p:grpSpPr/>
+      <p:grpSpPr>
+        <a:xfrm>
+          <a:off x="0" y="0"/>
+          <a:ext cx="0" cy="0"/>
+          <a:chOff x="0" y="0"/>
+          <a:chExt cx="0" cy="0"/>
+        </a:xfrm>
+      </p:grpSpPr>
       <p:sp>
         <p:nvSpPr>
           <p:cNvPr id="2" name="TextBox 1"/>
@@ -13337,7 +10372,7 @@
 </file>
 
 <file path=ppt/slides/slide5.xml><?xml version="1.0" encoding="utf-8"?>
-<p:sld xmlns:a="http://schemas.openxmlformats.org/drawingml/2006/main" xmlns:p="http://schemas.openxmlformats.org/presentationml/2006/main" xmlns:r="http://schemas.openxmlformats.org/officeDocument/2006/relationships">
+<p:sld xmlns:a="http://schemas.openxmlformats.org/drawingml/2006/main" xmlns:r="http://schemas.openxmlformats.org/officeDocument/2006/relationships" xmlns:p="http://schemas.openxmlformats.org/presentationml/2006/main">
   <p:cSld>
     <p:bg>
       <p:bgPr>
@@ -13353,7 +10388,14 @@
         <p:cNvGrpSpPr/>
         <p:nvPr/>
       </p:nvGrpSpPr>
-      <p:grpSpPr/>
+      <p:grpSpPr>
+        <a:xfrm>
+          <a:off x="0" y="0"/>
+          <a:ext cx="0" cy="0"/>
+          <a:chOff x="0" y="0"/>
+          <a:chExt cx="0" cy="0"/>
+        </a:xfrm>
+      </p:grpSpPr>
       <p:sp>
         <p:nvSpPr>
           <p:cNvPr id="2" name="TextBox 1"/>
@@ -13502,7 +10544,7 @@
 </file>
 
 <file path=ppt/slides/slide6.xml><?xml version="1.0" encoding="utf-8"?>
-<p:sld xmlns:a="http://schemas.openxmlformats.org/drawingml/2006/main" xmlns:p="http://schemas.openxmlformats.org/presentationml/2006/main" xmlns:r="http://schemas.openxmlformats.org/officeDocument/2006/relationships">
+<p:sld xmlns:a="http://schemas.openxmlformats.org/drawingml/2006/main" xmlns:r="http://schemas.openxmlformats.org/officeDocument/2006/relationships" xmlns:p="http://schemas.openxmlformats.org/presentationml/2006/main">
   <p:cSld>
     <p:bg>
       <p:bgPr>
@@ -13518,7 +10560,14 @@
         <p:cNvGrpSpPr/>
         <p:nvPr/>
       </p:nvGrpSpPr>
-      <p:grpSpPr/>
+      <p:grpSpPr>
+        <a:xfrm>
+          <a:off x="0" y="0"/>
+          <a:ext cx="0" cy="0"/>
+          <a:chOff x="0" y="0"/>
+          <a:chExt cx="0" cy="0"/>
+        </a:xfrm>
+      </p:grpSpPr>
       <p:sp>
         <p:nvSpPr>
           <p:cNvPr id="2" name="TextBox 1"/>
@@ -13651,7 +10700,7 @@
 </file>
 
 <file path=ppt/slides/slide7.xml><?xml version="1.0" encoding="utf-8"?>
-<p:sld xmlns:a="http://schemas.openxmlformats.org/drawingml/2006/main" xmlns:p="http://schemas.openxmlformats.org/presentationml/2006/main" xmlns:r="http://schemas.openxmlformats.org/officeDocument/2006/relationships">
+<p:sld xmlns:a="http://schemas.openxmlformats.org/drawingml/2006/main" xmlns:r="http://schemas.openxmlformats.org/officeDocument/2006/relationships" xmlns:p="http://schemas.openxmlformats.org/presentationml/2006/main">
   <p:cSld>
     <p:bg>
       <p:bgPr>
@@ -13667,7 +10716,14 @@
         <p:cNvGrpSpPr/>
         <p:nvPr/>
       </p:nvGrpSpPr>
-      <p:grpSpPr/>
+      <p:grpSpPr>
+        <a:xfrm>
+          <a:off x="0" y="0"/>
+          <a:ext cx="0" cy="0"/>
+          <a:chOff x="0" y="0"/>
+          <a:chExt cx="0" cy="0"/>
+        </a:xfrm>
+      </p:grpSpPr>
       <p:sp>
         <p:nvSpPr>
           <p:cNvPr id="2" name="TextBox 1"/>
@@ -13800,7 +10856,7 @@
 </file>
 
 <file path=ppt/slides/slide8.xml><?xml version="1.0" encoding="utf-8"?>
-<p:sld xmlns:a="http://schemas.openxmlformats.org/drawingml/2006/main" xmlns:p="http://schemas.openxmlformats.org/presentationml/2006/main" xmlns:r="http://schemas.openxmlformats.org/officeDocument/2006/relationships">
+<p:sld xmlns:a="http://schemas.openxmlformats.org/drawingml/2006/main" xmlns:r="http://schemas.openxmlformats.org/officeDocument/2006/relationships" xmlns:p="http://schemas.openxmlformats.org/presentationml/2006/main">
   <p:cSld>
     <p:bg>
       <p:bgPr>
@@ -13816,7 +10872,14 @@
         <p:cNvGrpSpPr/>
         <p:nvPr/>
       </p:nvGrpSpPr>
-      <p:grpSpPr/>
+      <p:grpSpPr>
+        <a:xfrm>
+          <a:off x="0" y="0"/>
+          <a:ext cx="0" cy="0"/>
+          <a:chOff x="0" y="0"/>
+          <a:chExt cx="0" cy="0"/>
+        </a:xfrm>
+      </p:grpSpPr>
       <p:sp>
         <p:nvSpPr>
           <p:cNvPr id="2" name="TextBox 1"/>
@@ -13949,7 +11012,7 @@
 </file>
 
 <file path=ppt/slides/slide9.xml><?xml version="1.0" encoding="utf-8"?>
-<p:sld xmlns:a="http://schemas.openxmlformats.org/drawingml/2006/main" xmlns:p="http://schemas.openxmlformats.org/presentationml/2006/main" xmlns:r="http://schemas.openxmlformats.org/officeDocument/2006/relationships">
+<p:sld xmlns:a="http://schemas.openxmlformats.org/drawingml/2006/main" xmlns:r="http://schemas.openxmlformats.org/officeDocument/2006/relationships" xmlns:p="http://schemas.openxmlformats.org/presentationml/2006/main">
   <p:cSld>
     <p:bg>
       <p:bgPr>
@@ -13965,7 +11028,14 @@
         <p:cNvGrpSpPr/>
         <p:nvPr/>
       </p:nvGrpSpPr>
-      <p:grpSpPr/>
+      <p:grpSpPr>
+        <a:xfrm>
+          <a:off x="0" y="0"/>
+          <a:ext cx="0" cy="0"/>
+          <a:chOff x="0" y="0"/>
+          <a:chExt cx="0" cy="0"/>
+        </a:xfrm>
+      </p:grpSpPr>
       <p:sp>
         <p:nvSpPr>
           <p:cNvPr id="2" name="TextBox 1"/>
